--- a/VNPAY-seminar.pptx
+++ b/VNPAY-seminar.pptx
@@ -3146,7 +3146,7 @@
                 <a:solidFill>
                   <a:srgbClr val="0A5BA8"/>
                 </a:solidFill>
-                <a:latin typeface="Calibri"/>
+                <a:latin typeface="Arial"/>
               </a:rPr>
               <a:t>SEMINAR</a:t>
             </a:r>
@@ -3162,7 +3162,7 @@
                 <a:solidFill>
                   <a:srgbClr val="16181D"/>
                 </a:solidFill>
-                <a:latin typeface="Calibri"/>
+                <a:latin typeface="Arial"/>
               </a:rPr>
               <a:t>Nhúng VNPAY vào một cửa hàng có sẵn</a:t>
             </a:r>
@@ -3178,7 +3178,7 @@
                 <a:solidFill>
                   <a:srgbClr val="6B7788"/>
                 </a:solidFill>
-                <a:latin typeface="Calibri"/>
+                <a:latin typeface="Arial"/>
               </a:rPr>
               <a:t>Mở file ShopStart.java đã tải trước. Hôm nay mình điền 6 chỗ TODO trong đó.</a:t>
             </a:r>
@@ -3194,7 +3194,7 @@
                 <a:solidFill>
                   <a:srgbClr val="6B7788"/>
                 </a:solidFill>
-                <a:latin typeface="Calibri"/>
+                <a:latin typeface="Arial"/>
               </a:rPr>
               <a:t>Cần JDK 17 trở lên. Không cần Maven, không cần cài thư viện nào.</a:t>
             </a:r>
@@ -3259,7 +3259,7 @@
                 <a:solidFill>
                   <a:srgbClr val="0A5BA8"/>
                 </a:solidFill>
-                <a:latin typeface="Calibri"/>
+                <a:latin typeface="Arial"/>
               </a:rPr>
               <a:t>DỪNG LẠI KIỂM TRA</a:t>
             </a:r>
@@ -3275,7 +3275,7 @@
                 <a:solidFill>
                   <a:srgbClr val="16181D"/>
                 </a:solidFill>
-                <a:latin typeface="Calibri"/>
+                <a:latin typeface="Arial"/>
               </a:rPr>
               <a:t>Chạy thử đã, đừng viết tiếp</a:t>
             </a:r>
@@ -3291,7 +3291,7 @@
         <p:spPr>
           <a:xfrm>
             <a:off x="566928" y="1425447"/>
-            <a:ext cx="11057839" cy="1362456"/>
+            <a:ext cx="11057839" cy="1122680"/>
           </a:xfrm>
           <a:prstGeom prst="rect">
             <a:avLst/>
@@ -3306,7 +3306,7 @@
           </a:ln>
         </p:spPr>
         <p:txBody>
-          <a:bodyPr wrap="none" lIns="201168" rIns="146304" tIns="128016" bIns="128016">
+          <a:bodyPr wrap="none" lIns="201168" rIns="146304" tIns="100584" bIns="82296">
             <a:spAutoFit/>
           </a:bodyPr>
           <a:lstStyle/>
@@ -3321,7 +3321,7 @@
                 <a:solidFill>
                   <a:srgbClr val="E4ECF5"/>
                 </a:solidFill>
-                <a:latin typeface="Consolas"/>
+                <a:latin typeface="Roboto Mono"/>
               </a:rPr>
               <a:t>export VNPAY_TMN_CODE=... VNPAY_HASH_SECRET=...</a:t>
             </a:r>
@@ -3337,7 +3337,7 @@
                 <a:solidFill>
                   <a:srgbClr val="E4ECF5"/>
                 </a:solidFill>
-                <a:latin typeface="Consolas"/>
+                <a:latin typeface="Roboto Mono"/>
               </a:rPr>
               <a:t>java ShopStart.java</a:t>
             </a:r>
@@ -3360,7 +3360,7 @@
                 <a:solidFill>
                   <a:srgbClr val="E4ECF5"/>
                 </a:solidFill>
-                <a:latin typeface="Consolas"/>
+                <a:latin typeface="Roboto Mono"/>
               </a:rPr>
               <a:t># mở http://localhost:8080, bấm Mua ngay rồi Thanh toán</a:t>
             </a:r>
@@ -3375,8 +3375,8 @@
         </p:nvSpPr>
         <p:spPr>
           <a:xfrm>
-            <a:off x="566928" y="2906775"/>
-            <a:ext cx="11057839" cy="843534"/>
+            <a:off x="566928" y="2666999"/>
+            <a:ext cx="11057839" cy="733044"/>
           </a:xfrm>
           <a:prstGeom prst="rect">
             <a:avLst/>
@@ -3406,7 +3406,7 @@
                 <a:solidFill>
                   <a:srgbClr val="0B6B47"/>
                 </a:solidFill>
-                <a:latin typeface="Calibri"/>
+                <a:latin typeface="Arial"/>
               </a:rPr>
               <a:t>Hiện ra form nhập thẻ NCB</a:t>
             </a:r>
@@ -3422,7 +3422,7 @@
                 <a:solidFill>
                   <a:srgbClr val="16181D"/>
                 </a:solidFill>
-                <a:latin typeface="Calibri"/>
+                <a:latin typeface="Arial"/>
               </a:rPr>
               <a:t>Chữ ký đúng rồi. Đi tiếp phần ngrok.</a:t>
             </a:r>
@@ -3437,8 +3437,8 @@
         </p:nvSpPr>
         <p:spPr>
           <a:xfrm>
-            <a:off x="566928" y="3869181"/>
-            <a:ext cx="11057839" cy="1100709"/>
+            <a:off x="566928" y="3518915"/>
+            <a:ext cx="11057839" cy="980694"/>
           </a:xfrm>
           <a:prstGeom prst="rect">
             <a:avLst/>
@@ -3468,7 +3468,7 @@
                 <a:solidFill>
                   <a:srgbClr val="C42B22"/>
                 </a:solidFill>
-                <a:latin typeface="Calibri"/>
+                <a:latin typeface="Arial"/>
               </a:rPr>
               <a:t>Báo Chữ ký không hợp lệ</a:t>
             </a:r>
@@ -3484,7 +3484,7 @@
                 <a:solidFill>
                   <a:srgbClr val="16181D"/>
                 </a:solidFill>
-                <a:latin typeface="Calibri"/>
+                <a:latin typeface="Arial"/>
               </a:rPr>
               <a:t>Sai HashSecret, hoặc quên encode ở TODO 2.</a:t>
             </a:r>
@@ -3500,7 +3500,7 @@
                 <a:solidFill>
                   <a:srgbClr val="16181D"/>
                 </a:solidFill>
-                <a:latin typeface="Calibri"/>
+                <a:latin typeface="Arial"/>
               </a:rPr>
               <a:t>Báo website không tồn tại thì là sai TmnCode, hoặc vnp_ReturnUrl không khớp domain đã khai.</a:t>
             </a:r>
@@ -3565,7 +3565,7 @@
                 <a:solidFill>
                   <a:srgbClr val="0A5BA8"/>
                 </a:solidFill>
-                <a:latin typeface="Calibri"/>
+                <a:latin typeface="Arial"/>
               </a:rPr>
               <a:t>BẮT BUỘC</a:t>
             </a:r>
@@ -3581,7 +3581,7 @@
                 <a:solidFill>
                   <a:srgbClr val="16181D"/>
                 </a:solidFill>
-                <a:latin typeface="Calibri"/>
+                <a:latin typeface="Arial"/>
               </a:rPr>
               <a:t>ngrok, để VNPAY với tới máy mình</a:t>
             </a:r>
@@ -3620,7 +3620,7 @@
                 <a:solidFill>
                   <a:srgbClr val="16181D"/>
                 </a:solidFill>
-                <a:latin typeface="Calibri"/>
+                <a:latin typeface="Arial"/>
               </a:rPr>
               <a:t>IPN là cuộc gọi từ server VNPAY vào server mình. Máy ở localhost thì từ internet không ai thấy.</a:t>
             </a:r>
@@ -3636,7 +3636,7 @@
         <p:spPr>
           <a:xfrm>
             <a:off x="566928" y="2017267"/>
-            <a:ext cx="11057839" cy="1094994"/>
+            <a:ext cx="11057839" cy="901446"/>
           </a:xfrm>
           <a:prstGeom prst="rect">
             <a:avLst/>
@@ -3651,7 +3651,7 @@
           </a:ln>
         </p:spPr>
         <p:txBody>
-          <a:bodyPr wrap="none" lIns="201168" rIns="146304" tIns="128016" bIns="128016">
+          <a:bodyPr wrap="none" lIns="201168" rIns="146304" tIns="100584" bIns="82296">
             <a:spAutoFit/>
           </a:bodyPr>
           <a:lstStyle/>
@@ -3666,7 +3666,7 @@
                 <a:solidFill>
                   <a:srgbClr val="E4ECF5"/>
                 </a:solidFill>
-                <a:latin typeface="Consolas"/>
+                <a:latin typeface="Roboto Mono"/>
               </a:rPr>
               <a:t>ngrok http 8080</a:t>
             </a:r>
@@ -3689,7 +3689,7 @@
                 <a:solidFill>
                   <a:srgbClr val="E4ECF5"/>
                 </a:solidFill>
-                <a:latin typeface="Consolas"/>
+                <a:latin typeface="Roboto Mono"/>
               </a:rPr>
               <a:t>Forwarding   https://a1b2-42-115-242-109.ngrok-free.app -&gt; http://localhost:8080</a:t>
             </a:r>
@@ -3704,7 +3704,7 @@
         </p:nvSpPr>
         <p:spPr>
           <a:xfrm>
-            <a:off x="566928" y="3231133"/>
+            <a:off x="566928" y="3037585"/>
             <a:ext cx="11057839" cy="472948"/>
           </a:xfrm>
           <a:prstGeom prst="rect">
@@ -3728,7 +3728,7 @@
                 <a:solidFill>
                   <a:srgbClr val="16181D"/>
                 </a:solidFill>
-                <a:latin typeface="Calibri"/>
+                <a:latin typeface="Arial"/>
               </a:rPr>
               <a:t>Khai 2 URL vào sandbox.vnpayment.vn/merchantv2, mục Cấu hình, Thông tin website:</a:t>
             </a:r>
@@ -3743,8 +3743,8 @@
         </p:nvSpPr>
         <p:spPr>
           <a:xfrm>
-            <a:off x="566928" y="3822953"/>
-            <a:ext cx="11057839" cy="827532"/>
+            <a:off x="566928" y="3629405"/>
+            <a:ext cx="11057839" cy="680212"/>
           </a:xfrm>
           <a:prstGeom prst="rect">
             <a:avLst/>
@@ -3759,7 +3759,7 @@
           </a:ln>
         </p:spPr>
         <p:txBody>
-          <a:bodyPr wrap="none" lIns="201168" rIns="146304" tIns="128016" bIns="128016">
+          <a:bodyPr wrap="none" lIns="201168" rIns="146304" tIns="100584" bIns="82296">
             <a:spAutoFit/>
           </a:bodyPr>
           <a:lstStyle/>
@@ -3774,7 +3774,7 @@
                 <a:solidFill>
                   <a:srgbClr val="E4ECF5"/>
                 </a:solidFill>
-                <a:latin typeface="Consolas"/>
+                <a:latin typeface="Roboto Mono"/>
               </a:rPr>
               <a:t>URL trả về             https://a1b2-....ngrok-free.app/vnpay/return</a:t>
             </a:r>
@@ -3790,7 +3790,7 @@
                 <a:solidFill>
                   <a:srgbClr val="E4ECF5"/>
                 </a:solidFill>
-                <a:latin typeface="Consolas"/>
+                <a:latin typeface="Roboto Mono"/>
               </a:rPr>
               <a:t>URL nhận kết quả IPN   https://a1b2-....ngrok-free.app/vnpay/ipn</a:t>
             </a:r>
@@ -3805,8 +3805,8 @@
         </p:nvSpPr>
         <p:spPr>
           <a:xfrm>
-            <a:off x="566928" y="4769357"/>
-            <a:ext cx="11057839" cy="1100709"/>
+            <a:off x="566928" y="4428489"/>
+            <a:ext cx="11057839" cy="980694"/>
           </a:xfrm>
           <a:prstGeom prst="rect">
             <a:avLst/>
@@ -3836,7 +3836,7 @@
                 <a:solidFill>
                   <a:srgbClr val="C42B22"/>
                 </a:solidFill>
-                <a:latin typeface="Calibri"/>
+                <a:latin typeface="Arial"/>
               </a:rPr>
               <a:t>Hai chuyện của bản ngrok miễn phí</a:t>
             </a:r>
@@ -3852,7 +3852,7 @@
                 <a:solidFill>
                   <a:srgbClr val="16181D"/>
                 </a:solidFill>
-                <a:latin typeface="Calibri"/>
+                <a:latin typeface="Arial"/>
               </a:rPr>
               <a:t>Địa chỉ đổi mỗi lần chạy lại, phải khai lại trong portal. Làm sát giờ demo.</a:t>
             </a:r>
@@ -3868,7 +3868,7 @@
                 <a:solidFill>
                   <a:srgbClr val="16181D"/>
                 </a:solidFill>
-                <a:latin typeface="Calibri"/>
+                <a:latin typeface="Arial"/>
               </a:rPr>
               <a:t>Lần đầu mở bằng trình duyệt gặp trang cảnh báo, bấm Visit Site là qua. IPN không dính.</a:t>
             </a:r>
@@ -3933,7 +3933,7 @@
                 <a:solidFill>
                   <a:srgbClr val="0A5BA8"/>
                 </a:solidFill>
-                <a:latin typeface="Calibri"/>
+                <a:latin typeface="Arial"/>
               </a:rPr>
               <a:t>TODO 5</a:t>
             </a:r>
@@ -3949,7 +3949,7 @@
                 <a:solidFill>
                   <a:srgbClr val="16181D"/>
                 </a:solidFill>
-                <a:latin typeface="Calibri"/>
+                <a:latin typeface="Arial"/>
               </a:rPr>
               <a:t>Nhận IPN, nơi duy nhất được cộng tiền</a:t>
             </a:r>
@@ -3988,7 +3988,7 @@
                 <a:solidFill>
                   <a:srgbClr val="16181D"/>
                 </a:solidFill>
-                <a:latin typeface="Calibri"/>
+                <a:latin typeface="Arial"/>
               </a:rPr>
               <a:t>VNPAY retry tới khi nhận RspCode 00, nên hàm này gọi mấy lần cũng chỉ cộng tiền một lần.</a:t>
             </a:r>
@@ -4004,7 +4004,7 @@
         <p:spPr>
           <a:xfrm>
             <a:off x="566928" y="2017267"/>
-            <a:ext cx="11057839" cy="4664583"/>
+            <a:ext cx="11057839" cy="3854069"/>
           </a:xfrm>
           <a:prstGeom prst="rect">
             <a:avLst/>
@@ -4019,7 +4019,7 @@
           </a:ln>
         </p:spPr>
         <p:txBody>
-          <a:bodyPr wrap="none" lIns="201168" rIns="146304" tIns="128016" bIns="128016">
+          <a:bodyPr wrap="none" lIns="201168" rIns="146304" tIns="100584" bIns="82296">
             <a:spAutoFit/>
           </a:bodyPr>
           <a:lstStyle/>
@@ -4034,7 +4034,7 @@
                 <a:solidFill>
                   <a:srgbClr val="E4ECF5"/>
                 </a:solidFill>
-                <a:latin typeface="Consolas"/>
+                <a:latin typeface="Roboto Mono"/>
               </a:rPr>
               <a:t>if (!isValidSignature(params))</a:t>
             </a:r>
@@ -4050,7 +4050,7 @@
                 <a:solidFill>
                   <a:srgbClr val="E4ECF5"/>
                 </a:solidFill>
-                <a:latin typeface="Consolas"/>
+                <a:latin typeface="Roboto Mono"/>
               </a:rPr>
               <a:t>    return rsp("97", "Invalid Checksum");</a:t>
             </a:r>
@@ -4073,7 +4073,7 @@
                 <a:solidFill>
                   <a:srgbClr val="E4ECF5"/>
                 </a:solidFill>
-                <a:latin typeface="Consolas"/>
+                <a:latin typeface="Roboto Mono"/>
               </a:rPr>
               <a:t>Order order = ORDERS.get(params.get("vnp_TxnRef"));</a:t>
             </a:r>
@@ -4089,7 +4089,7 @@
                 <a:solidFill>
                   <a:srgbClr val="E4ECF5"/>
                 </a:solidFill>
-                <a:latin typeface="Consolas"/>
+                <a:latin typeface="Roboto Mono"/>
               </a:rPr>
               <a:t>if (order == null)              return rsp("01", "Order not Found");</a:t>
             </a:r>
@@ -4112,7 +4112,7 @@
                 <a:solidFill>
                   <a:srgbClr val="E4ECF5"/>
                 </a:solidFill>
-                <a:latin typeface="Consolas"/>
+                <a:latin typeface="Roboto Mono"/>
               </a:rPr>
               <a:t>if (Long.parseLong(params.get("vnp_Amount")) != order.amount * 100)</a:t>
             </a:r>
@@ -4128,7 +4128,7 @@
                 <a:solidFill>
                   <a:srgbClr val="E4ECF5"/>
                 </a:solidFill>
-                <a:latin typeface="Consolas"/>
+                <a:latin typeface="Roboto Mono"/>
               </a:rPr>
               <a:t>    return rsp("04", "Invalid Amount");        // chống sửa số tiền trên URL</a:t>
             </a:r>
@@ -4144,7 +4144,7 @@
                 <a:solidFill>
                   <a:srgbClr val="E4ECF5"/>
                 </a:solidFill>
-                <a:latin typeface="Consolas"/>
+                <a:latin typeface="Roboto Mono"/>
               </a:rPr>
               <a:t>synchronized (order) {</a:t>
             </a:r>
@@ -4160,7 +4160,7 @@
                 <a:solidFill>
                   <a:srgbClr val="E4ECF5"/>
                 </a:solidFill>
-                <a:latin typeface="Consolas"/>
+                <a:latin typeface="Roboto Mono"/>
               </a:rPr>
               <a:t>    if (!"PENDING".equals(order.status))</a:t>
             </a:r>
@@ -4176,7 +4176,7 @@
                 <a:solidFill>
                   <a:srgbClr val="E4ECF5"/>
                 </a:solidFill>
-                <a:latin typeface="Consolas"/>
+                <a:latin typeface="Roboto Mono"/>
               </a:rPr>
               <a:t>        return rsp("02", "Order already confirmed");</a:t>
             </a:r>
@@ -4199,7 +4199,7 @@
                 <a:solidFill>
                   <a:srgbClr val="E4ECF5"/>
                 </a:solidFill>
-                <a:latin typeface="Consolas"/>
+                <a:latin typeface="Roboto Mono"/>
               </a:rPr>
               <a:t>    boolean paid = "00".equals(params.get("vnp_ResponseCode"))</a:t>
             </a:r>
@@ -4215,7 +4215,7 @@
                 <a:solidFill>
                   <a:srgbClr val="E4ECF5"/>
                 </a:solidFill>
-                <a:latin typeface="Consolas"/>
+                <a:latin typeface="Roboto Mono"/>
               </a:rPr>
               <a:t>                &amp;&amp; "00".equals(params.get("vnp_TransactionStatus"));</a:t>
             </a:r>
@@ -4231,7 +4231,7 @@
                 <a:solidFill>
                   <a:srgbClr val="E4ECF5"/>
                 </a:solidFill>
-                <a:latin typeface="Consolas"/>
+                <a:latin typeface="Roboto Mono"/>
               </a:rPr>
               <a:t>    order.status = paid ? "PAID" : "FAILED";</a:t>
             </a:r>
@@ -4247,7 +4247,7 @@
                 <a:solidFill>
                   <a:srgbClr val="E4ECF5"/>
                 </a:solidFill>
-                <a:latin typeface="Consolas"/>
+                <a:latin typeface="Roboto Mono"/>
               </a:rPr>
               <a:t>}</a:t>
             </a:r>
@@ -4263,7 +4263,7 @@
                 <a:solidFill>
                   <a:srgbClr val="E4ECF5"/>
                 </a:solidFill>
-                <a:latin typeface="Consolas"/>
+                <a:latin typeface="Roboto Mono"/>
               </a:rPr>
               <a:t>return rsp("00", "Confirm Success");           // VNPAY ngừng retry</a:t>
             </a:r>
@@ -4328,7 +4328,7 @@
                 <a:solidFill>
                   <a:srgbClr val="0A5BA8"/>
                 </a:solidFill>
-                <a:latin typeface="Calibri"/>
+                <a:latin typeface="Arial"/>
               </a:rPr>
               <a:t>TODO 6</a:t>
             </a:r>
@@ -4344,7 +4344,7 @@
                 <a:solidFill>
                   <a:srgbClr val="16181D"/>
                 </a:solidFill>
-                <a:latin typeface="Calibri"/>
+                <a:latin typeface="Arial"/>
               </a:rPr>
               <a:t>ReturnURL chỉ để vẽ màn hình</a:t>
             </a:r>
@@ -4383,7 +4383,7 @@
                 <a:solidFill>
                   <a:srgbClr val="6B7788"/>
                 </a:solidFill>
-                <a:latin typeface="Consolas"/>
+                <a:latin typeface="Roboto Mono"/>
               </a:rPr>
               <a:t>ShopStart.java</a:t>
             </a:r>
@@ -4399,7 +4399,7 @@
         <p:spPr>
           <a:xfrm>
             <a:off x="566928" y="1681479"/>
-            <a:ext cx="11057839" cy="1897380"/>
+            <a:ext cx="11057839" cy="1565148"/>
           </a:xfrm>
           <a:prstGeom prst="rect">
             <a:avLst/>
@@ -4414,7 +4414,7 @@
           </a:ln>
         </p:spPr>
         <p:txBody>
-          <a:bodyPr wrap="none" lIns="201168" rIns="146304" tIns="128016" bIns="128016">
+          <a:bodyPr wrap="none" lIns="201168" rIns="146304" tIns="100584" bIns="82296">
             <a:spAutoFit/>
           </a:bodyPr>
           <a:lstStyle/>
@@ -4429,7 +4429,7 @@
                 <a:solidFill>
                   <a:srgbClr val="E4ECF5"/>
                 </a:solidFill>
-                <a:latin typeface="Consolas"/>
+                <a:latin typeface="Roboto Mono"/>
               </a:rPr>
               <a:t>static String handleReturn(Map&lt;String, String&gt; params) {</a:t>
             </a:r>
@@ -4445,7 +4445,7 @@
                 <a:solidFill>
                   <a:srgbClr val="E4ECF5"/>
                 </a:solidFill>
-                <a:latin typeface="Consolas"/>
+                <a:latin typeface="Roboto Mono"/>
               </a:rPr>
               <a:t>    boolean valid = isValidSignature(params);</a:t>
             </a:r>
@@ -4461,7 +4461,7 @@
                 <a:solidFill>
                   <a:srgbClr val="E4ECF5"/>
                 </a:solidFill>
-                <a:latin typeface="Consolas"/>
+                <a:latin typeface="Roboto Mono"/>
               </a:rPr>
               <a:t>    String txnRef = params.getOrDefault("vnp_TxnRef", "");</a:t>
             </a:r>
@@ -4484,7 +4484,7 @@
                 <a:solidFill>
                   <a:srgbClr val="E4ECF5"/>
                 </a:solidFill>
-                <a:latin typeface="Consolas"/>
+                <a:latin typeface="Roboto Mono"/>
               </a:rPr>
               <a:t>    return "/?txnRef=" + encode(txnRef) + "&amp;valid=" + valid;</a:t>
             </a:r>
@@ -4500,7 +4500,7 @@
                 <a:solidFill>
                   <a:srgbClr val="E4ECF5"/>
                 </a:solidFill>
-                <a:latin typeface="Consolas"/>
+                <a:latin typeface="Roboto Mono"/>
               </a:rPr>
               <a:t>}</a:t>
             </a:r>
@@ -4515,7 +4515,7 @@
         </p:nvSpPr>
         <p:spPr>
           <a:xfrm>
-            <a:off x="566928" y="3697731"/>
+            <a:off x="566928" y="3365499"/>
             <a:ext cx="11057839" cy="836168"/>
           </a:xfrm>
           <a:prstGeom prst="rect">
@@ -4539,7 +4539,7 @@
                 <a:solidFill>
                   <a:srgbClr val="16181D"/>
                 </a:solidFill>
-                <a:latin typeface="Calibri"/>
+                <a:latin typeface="Arial"/>
               </a:rPr>
               <a:t>Để ý cái KHÔNG có ở đây: không dòng nào đổi trạng thái đơn hàng.</a:t>
             </a:r>
@@ -4555,7 +4555,7 @@
                 <a:solidFill>
                   <a:srgbClr val="16181D"/>
                 </a:solidFill>
-                <a:latin typeface="Calibri"/>
+                <a:latin typeface="Arial"/>
               </a:rPr>
               <a:t>Tham số trên trình duyệt là dữ liệu do khách mang về, không phải sự thật.</a:t>
             </a:r>
@@ -4570,7 +4570,7 @@
         </p:nvSpPr>
         <p:spPr>
           <a:xfrm>
-            <a:off x="566928" y="4652771"/>
+            <a:off x="566928" y="4320539"/>
             <a:ext cx="11057839" cy="219456"/>
           </a:xfrm>
           <a:prstGeom prst="rect">
@@ -4594,7 +4594,7 @@
                 <a:solidFill>
                   <a:srgbClr val="6B7788"/>
                 </a:solidFill>
-                <a:latin typeface="Consolas"/>
+                <a:latin typeface="Roboto Mono"/>
               </a:rPr>
               <a:t>trang kết quả, phía trình duyệt</a:t>
             </a:r>
@@ -4609,8 +4609,8 @@
         </p:nvSpPr>
         <p:spPr>
           <a:xfrm>
-            <a:off x="566928" y="4908803"/>
-            <a:ext cx="11057839" cy="1629918"/>
+            <a:off x="566928" y="4576571"/>
+            <a:ext cx="11057839" cy="1343914"/>
           </a:xfrm>
           <a:prstGeom prst="rect">
             <a:avLst/>
@@ -4625,7 +4625,7 @@
           </a:ln>
         </p:spPr>
         <p:txBody>
-          <a:bodyPr wrap="none" lIns="201168" rIns="146304" tIns="128016" bIns="128016">
+          <a:bodyPr wrap="none" lIns="201168" rIns="146304" tIns="100584" bIns="82296">
             <a:spAutoFit/>
           </a:bodyPr>
           <a:lstStyle/>
@@ -4640,7 +4640,7 @@
                 <a:solidFill>
                   <a:srgbClr val="E4ECF5"/>
                 </a:solidFill>
-                <a:latin typeface="Consolas"/>
+                <a:latin typeface="Roboto Mono"/>
               </a:rPr>
               <a:t>// không đọc kết quả từ URL, hỏi lại server cho chắc</a:t>
             </a:r>
@@ -4656,7 +4656,7 @@
                 <a:solidFill>
                   <a:srgbClr val="E4ECF5"/>
                 </a:solidFill>
-                <a:latin typeface="Consolas"/>
+                <a:latin typeface="Roboto Mono"/>
               </a:rPr>
               <a:t>const res   = await fetch('/api/orders?txnRef=' + txnRef);</a:t>
             </a:r>
@@ -4672,7 +4672,7 @@
                 <a:solidFill>
                   <a:srgbClr val="E4ECF5"/>
                 </a:solidFill>
-                <a:latin typeface="Consolas"/>
+                <a:latin typeface="Roboto Mono"/>
               </a:rPr>
               <a:t>const order = await res.json();</a:t>
             </a:r>
@@ -4695,7 +4695,7 @@
                 <a:solidFill>
                   <a:srgbClr val="E4ECF5"/>
                 </a:solidFill>
-                <a:latin typeface="Consolas"/>
+                <a:latin typeface="Roboto Mono"/>
               </a:rPr>
               <a:t>if (order.status === 'PAID') showSuccess(order);</a:t>
             </a:r>
@@ -4760,7 +4760,7 @@
                 <a:solidFill>
                   <a:srgbClr val="0A5BA8"/>
                 </a:solidFill>
-                <a:latin typeface="Calibri"/>
+                <a:latin typeface="Arial"/>
               </a:rPr>
               <a:t>TÌNH HUỐNG THẬT</a:t>
             </a:r>
@@ -4776,7 +4776,7 @@
                 <a:solidFill>
                   <a:srgbClr val="16181D"/>
                 </a:solidFill>
-                <a:latin typeface="Calibri"/>
+                <a:latin typeface="Arial"/>
               </a:rPr>
               <a:t>Khi IPN không bao giờ về</a:t>
             </a:r>
@@ -4792,7 +4792,7 @@
         <p:spPr>
           <a:xfrm>
             <a:off x="566928" y="1425447"/>
-            <a:ext cx="11057839" cy="1357884"/>
+            <a:ext cx="11057839" cy="1228344"/>
           </a:xfrm>
           <a:prstGeom prst="rect">
             <a:avLst/>
@@ -4822,7 +4822,7 @@
                 <a:solidFill>
                   <a:srgbClr val="C42B22"/>
                 </a:solidFill>
-                <a:latin typeface="Calibri"/>
+                <a:latin typeface="Arial"/>
               </a:rPr>
               <a:t>Chuyện xảy ra lúc mình dựng bài này</a:t>
             </a:r>
@@ -4838,7 +4838,7 @@
                 <a:solidFill>
                   <a:srgbClr val="16181D"/>
                 </a:solidFill>
-                <a:latin typeface="Calibri"/>
+                <a:latin typeface="Arial"/>
               </a:rPr>
               <a:t>Portal sandbox không cho khai IPN URL. Danh sách website trống trơn,</a:t>
             </a:r>
@@ -4854,7 +4854,7 @@
                 <a:solidFill>
                   <a:srgbClr val="16181D"/>
                 </a:solidFill>
-                <a:latin typeface="Calibri"/>
+                <a:latin typeface="Arial"/>
               </a:rPr>
               <a:t>Cài đặt thông báo báo "Kết nối hệ thống tạm thời bị gián đoạn".</a:t>
             </a:r>
@@ -4870,7 +4870,7 @@
                 <a:solidFill>
                   <a:srgbClr val="16181D"/>
                 </a:solidFill>
-                <a:latin typeface="Calibri"/>
+                <a:latin typeface="Arial"/>
               </a:rPr>
               <a:t>Code đúng hết mà IPN không tới. Chỉ biết mỗi IPN thì demo chết tại chỗ.</a:t>
             </a:r>
@@ -4885,7 +4885,7 @@
         </p:nvSpPr>
         <p:spPr>
           <a:xfrm>
-            <a:off x="566928" y="2902203"/>
+            <a:off x="566928" y="2772663"/>
             <a:ext cx="11057839" cy="836168"/>
           </a:xfrm>
           <a:prstGeom prst="rect">
@@ -4909,7 +4909,7 @@
                 <a:solidFill>
                   <a:srgbClr val="16181D"/>
                 </a:solidFill>
-                <a:latin typeface="Calibri"/>
+                <a:latin typeface="Arial"/>
               </a:rPr>
               <a:t>Đường lùi là API querydr: server tự hỏi VNPAY trạng thái thật.</a:t>
             </a:r>
@@ -4925,7 +4925,7 @@
                 <a:solidFill>
                   <a:srgbClr val="16181D"/>
                 </a:solidFill>
-                <a:latin typeface="Calibri"/>
+                <a:latin typeface="Arial"/>
               </a:rPr>
               <a:t>Vẫn an toàn như IPN vì đủ ba lớp: hỏi thẳng VNPAY, verify chữ ký response, so lại số tiền.</a:t>
             </a:r>
@@ -4940,8 +4940,8 @@
         </p:nvSpPr>
         <p:spPr>
           <a:xfrm>
-            <a:off x="566928" y="3857243"/>
-            <a:ext cx="11057839" cy="1362456"/>
+            <a:off x="566928" y="3727703"/>
+            <a:ext cx="11057839" cy="1122680"/>
           </a:xfrm>
           <a:prstGeom prst="rect">
             <a:avLst/>
@@ -4956,7 +4956,7 @@
           </a:ln>
         </p:spPr>
         <p:txBody>
-          <a:bodyPr wrap="none" lIns="201168" rIns="146304" tIns="128016" bIns="128016">
+          <a:bodyPr wrap="none" lIns="201168" rIns="146304" tIns="100584" bIns="82296">
             <a:spAutoFit/>
           </a:bodyPr>
           <a:lstStyle/>
@@ -4971,7 +4971,7 @@
                 <a:solidFill>
                   <a:srgbClr val="E4ECF5"/>
                 </a:solidFill>
-                <a:latin typeface="Consolas"/>
+                <a:latin typeface="Roboto Mono"/>
               </a:rPr>
               <a:t>// Hash của querydr không sort alphabet, nối bằng '|' đúng thứ tự tài liệu</a:t>
             </a:r>
@@ -4987,7 +4987,7 @@
                 <a:solidFill>
                   <a:srgbClr val="E4ECF5"/>
                 </a:solidFill>
-                <a:latin typeface="Consolas"/>
+                <a:latin typeface="Roboto Mono"/>
               </a:rPr>
               <a:t>String hashData = String.join("|",</a:t>
             </a:r>
@@ -5003,7 +5003,7 @@
                 <a:solidFill>
                   <a:srgbClr val="E4ECF5"/>
                 </a:solidFill>
-                <a:latin typeface="Consolas"/>
+                <a:latin typeface="Roboto Mono"/>
               </a:rPr>
               <a:t>        requestId, "2.1.0", "querydr", TMN_CODE,</a:t>
             </a:r>
@@ -5019,7 +5019,7 @@
                 <a:solidFill>
                   <a:srgbClr val="E4ECF5"/>
                 </a:solidFill>
-                <a:latin typeface="Consolas"/>
+                <a:latin typeface="Roboto Mono"/>
               </a:rPr>
               <a:t>        txnRef, transactionDate, createDate, ipAddr, orderInfo);</a:t>
             </a:r>
@@ -5034,8 +5034,8 @@
         </p:nvSpPr>
         <p:spPr>
           <a:xfrm>
-            <a:off x="566928" y="5338571"/>
-            <a:ext cx="11057839" cy="1100709"/>
+            <a:off x="566928" y="4969255"/>
+            <a:ext cx="11057839" cy="980694"/>
           </a:xfrm>
           <a:prstGeom prst="rect">
             <a:avLst/>
@@ -5065,7 +5065,7 @@
                 <a:solidFill>
                   <a:srgbClr val="0B6B47"/>
                 </a:solidFill>
-                <a:latin typeface="Calibri"/>
+                <a:latin typeface="Arial"/>
               </a:rPr>
               <a:t>Mang về dùng cho đồ án</a:t>
             </a:r>
@@ -5081,7 +5081,7 @@
                 <a:solidFill>
                   <a:srgbClr val="16181D"/>
                 </a:solidFill>
-                <a:latin typeface="Calibri"/>
+                <a:latin typeface="Arial"/>
               </a:rPr>
               <a:t>Một job @Scheduled quét đơn PENDING quá hạn rồi gọi querydr.</a:t>
             </a:r>
@@ -5097,7 +5097,7 @@
                 <a:solidFill>
                   <a:srgbClr val="16181D"/>
                 </a:solidFill>
-                <a:latin typeface="Calibri"/>
+                <a:latin typeface="Arial"/>
               </a:rPr>
               <a:t>Hệ thống thanh toán thật nào cũng có, vì IPN thất lạc là chuyện bình thường.</a:t>
             </a:r>
@@ -5162,7 +5162,7 @@
                 <a:solidFill>
                   <a:srgbClr val="0A5BA8"/>
                 </a:solidFill>
-                <a:latin typeface="Calibri"/>
+                <a:latin typeface="Arial"/>
               </a:rPr>
               <a:t>DEMO</a:t>
             </a:r>
@@ -5178,7 +5178,7 @@
                 <a:solidFill>
                   <a:srgbClr val="16181D"/>
                 </a:solidFill>
-                <a:latin typeface="Calibri"/>
+                <a:latin typeface="Arial"/>
               </a:rPr>
               <a:t>Quẹt thẻ thật trên sandbox</a:t>
             </a:r>
@@ -5194,7 +5194,7 @@
         <p:spPr>
           <a:xfrm>
             <a:off x="566928" y="1425447"/>
-            <a:ext cx="11057839" cy="1362456"/>
+            <a:ext cx="11057839" cy="1122680"/>
           </a:xfrm>
           <a:prstGeom prst="rect">
             <a:avLst/>
@@ -5209,7 +5209,7 @@
           </a:ln>
         </p:spPr>
         <p:txBody>
-          <a:bodyPr wrap="none" lIns="201168" rIns="146304" tIns="128016" bIns="128016">
+          <a:bodyPr wrap="none" lIns="201168" rIns="146304" tIns="100584" bIns="82296">
             <a:spAutoFit/>
           </a:bodyPr>
           <a:lstStyle/>
@@ -5224,7 +5224,7 @@
                 <a:solidFill>
                   <a:srgbClr val="E4ECF5"/>
                 </a:solidFill>
-                <a:latin typeface="Consolas"/>
+                <a:latin typeface="Roboto Mono"/>
               </a:rPr>
               <a:t>Số thẻ          9704198526191432198</a:t>
             </a:r>
@@ -5240,7 +5240,7 @@
                 <a:solidFill>
                   <a:srgbClr val="E4ECF5"/>
                 </a:solidFill>
-                <a:latin typeface="Consolas"/>
+                <a:latin typeface="Roboto Mono"/>
               </a:rPr>
               <a:t>Tên chủ thẻ     NGUYEN VAN A</a:t>
             </a:r>
@@ -5256,7 +5256,7 @@
                 <a:solidFill>
                   <a:srgbClr val="E4ECF5"/>
                 </a:solidFill>
-                <a:latin typeface="Consolas"/>
+                <a:latin typeface="Roboto Mono"/>
               </a:rPr>
               <a:t>Ngày phát hành  07/15</a:t>
             </a:r>
@@ -5272,7 +5272,7 @@
                 <a:solidFill>
                   <a:srgbClr val="E4ECF5"/>
                 </a:solidFill>
-                <a:latin typeface="Consolas"/>
+                <a:latin typeface="Roboto Mono"/>
               </a:rPr>
               <a:t>OTP             123456</a:t>
             </a:r>
@@ -5287,7 +5287,7 @@
         </p:nvSpPr>
         <p:spPr>
           <a:xfrm>
-            <a:off x="566928" y="2906775"/>
+            <a:off x="566928" y="2666999"/>
             <a:ext cx="11057839" cy="472948"/>
           </a:xfrm>
           <a:prstGeom prst="rect">
@@ -5311,7 +5311,7 @@
                 <a:solidFill>
                   <a:srgbClr val="16181D"/>
                 </a:solidFill>
-                <a:latin typeface="Calibri"/>
+                <a:latin typeface="Arial"/>
               </a:rPr>
               <a:t>Log server lúc chốt đơn, nên mở sẵn cửa sổ terminal khi demo:</a:t>
             </a:r>
@@ -5326,8 +5326,8 @@
         </p:nvSpPr>
         <p:spPr>
           <a:xfrm>
-            <a:off x="566928" y="3498595"/>
-            <a:ext cx="11057839" cy="560070"/>
+            <a:off x="566928" y="3258819"/>
+            <a:ext cx="11057839" cy="458978"/>
           </a:xfrm>
           <a:prstGeom prst="rect">
             <a:avLst/>
@@ -5342,7 +5342,7 @@
           </a:ln>
         </p:spPr>
         <p:txBody>
-          <a:bodyPr wrap="none" lIns="201168" rIns="146304" tIns="128016" bIns="128016">
+          <a:bodyPr wrap="none" lIns="201168" rIns="146304" tIns="100584" bIns="82296">
             <a:spAutoFit/>
           </a:bodyPr>
           <a:lstStyle/>
@@ -5357,7 +5357,7 @@
                 <a:solidFill>
                   <a:srgbClr val="E4ECF5"/>
                 </a:solidFill>
-                <a:latin typeface="Consolas"/>
+                <a:latin typeface="Roboto Mono"/>
               </a:rPr>
               <a:t>Chot bang querydr: txnRef=20260920125606777443 status=PAID transactionNo=15683165</a:t>
             </a:r>
@@ -5372,8 +5372,8 @@
         </p:nvSpPr>
         <p:spPr>
           <a:xfrm>
-            <a:off x="566928" y="4177537"/>
-            <a:ext cx="11057839" cy="1100709"/>
+            <a:off x="566928" y="3836669"/>
+            <a:ext cx="11057839" cy="980694"/>
           </a:xfrm>
           <a:prstGeom prst="rect">
             <a:avLst/>
@@ -5403,7 +5403,7 @@
                 <a:solidFill>
                   <a:srgbClr val="0A5BA8"/>
                 </a:solidFill>
-                <a:latin typeface="Calibri"/>
+                <a:latin typeface="Arial"/>
               </a:rPr>
               <a:t>Phòng khi wifi trục trặc</a:t>
             </a:r>
@@ -5419,7 +5419,7 @@
                 <a:solidFill>
                   <a:srgbClr val="16181D"/>
                 </a:solidFill>
-                <a:latin typeface="Calibri"/>
+                <a:latin typeface="Arial"/>
               </a:rPr>
               <a:t>demo-local.sh tự ký IPN bằng chính HashSecret, diễn được cả ba ca:</a:t>
             </a:r>
@@ -5435,7 +5435,7 @@
                 <a:solidFill>
                   <a:srgbClr val="16181D"/>
                 </a:solidFill>
-                <a:latin typeface="Calibri"/>
+                <a:latin typeface="Arial"/>
               </a:rPr>
               <a:t>thành công ra 00, retry ra 02, bị sửa số tiền ra 97. Không cần internet, không cần bấm thẻ.</a:t>
             </a:r>
@@ -5500,7 +5500,7 @@
                 <a:solidFill>
                   <a:srgbClr val="0A5BA8"/>
                 </a:solidFill>
-                <a:latin typeface="Calibri"/>
+                <a:latin typeface="Arial"/>
               </a:rPr>
               <a:t>ĐƯA VÀO ĐỒ ÁN</a:t>
             </a:r>
@@ -5516,7 +5516,7 @@
                 <a:solidFill>
                   <a:srgbClr val="16181D"/>
                 </a:solidFill>
-                <a:latin typeface="Calibri"/>
+                <a:latin typeface="Arial"/>
               </a:rPr>
               <a:t>Từ file demo sang microservice</a:t>
             </a:r>
@@ -5532,7 +5532,7 @@
         <p:spPr>
           <a:xfrm>
             <a:off x="566928" y="1425447"/>
-            <a:ext cx="11057839" cy="2761488"/>
+            <a:ext cx="11057839" cy="2279904"/>
           </a:xfrm>
           <a:prstGeom prst="rect">
             <a:avLst/>
@@ -5547,7 +5547,7 @@
           </a:ln>
         </p:spPr>
         <p:txBody>
-          <a:bodyPr wrap="none" lIns="201168" rIns="146304" tIns="128016" bIns="128016">
+          <a:bodyPr wrap="none" lIns="201168" rIns="146304" tIns="100584" bIns="82296">
             <a:spAutoFit/>
           </a:bodyPr>
           <a:lstStyle/>
@@ -5562,7 +5562,7 @@
                 <a:solidFill>
                   <a:srgbClr val="E4ECF5"/>
                 </a:solidFill>
-                <a:latin typeface="Consolas"/>
+                <a:latin typeface="Roboto Mono"/>
               </a:rPr>
               <a:t>payment-service đứng riêng, service khác chỉ nghe event OrderPaid</a:t>
             </a:r>
@@ -5585,7 +5585,7 @@
                 <a:solidFill>
                   <a:srgbClr val="E4ECF5"/>
                 </a:solidFill>
-                <a:latin typeface="Consolas"/>
+                <a:latin typeface="Roboto Mono"/>
               </a:rPr>
               <a:t>HashSecret nạp từ Vault hoặc K8s Secret, không để trong application.yml</a:t>
             </a:r>
@@ -5608,7 +5608,7 @@
                 <a:solidFill>
                   <a:srgbClr val="E4ECF5"/>
                 </a:solidFill>
-                <a:latin typeface="Consolas"/>
+                <a:latin typeface="Roboto Mono"/>
               </a:rPr>
               <a:t>Bảng payment_transaction có UNIQUE(txn_ref) và optimistic lock</a:t>
             </a:r>
@@ -5624,7 +5624,7 @@
                 <a:solidFill>
                   <a:srgbClr val="E4ECF5"/>
                 </a:solidFill>
-                <a:latin typeface="Consolas"/>
+                <a:latin typeface="Roboto Mono"/>
               </a:rPr>
               <a:t>(demo dùng synchronized, chạy nhiều instance là không đủ)</a:t>
             </a:r>
@@ -5647,7 +5647,7 @@
                 <a:solidFill>
                   <a:srgbClr val="E4ECF5"/>
                 </a:solidFill>
-                <a:latin typeface="Consolas"/>
+                <a:latin typeface="Roboto Mono"/>
               </a:rPr>
               <a:t>Nhiều cổng thanh toán thì bọc sau interface PaymentGateway</a:t>
             </a:r>
@@ -5662,7 +5662,7 @@
         </p:nvSpPr>
         <p:spPr>
           <a:xfrm>
-            <a:off x="566928" y="4305807"/>
+            <a:off x="566928" y="3824223"/>
             <a:ext cx="11057839" cy="1199388"/>
           </a:xfrm>
           <a:prstGeom prst="rect">
@@ -5686,7 +5686,7 @@
                 <a:solidFill>
                   <a:srgbClr val="16181D"/>
                 </a:solidFill>
-                <a:latin typeface="Calibri"/>
+                <a:latin typeface="Arial"/>
               </a:rPr>
               <a:t>Đồ án nào dùng được ngay: bất kỳ chỗ nào có đặt hàng hoặc nạp tiền.</a:t>
             </a:r>
@@ -5702,7 +5702,7 @@
                 <a:solidFill>
                   <a:srgbClr val="16181D"/>
                 </a:solidFill>
-                <a:latin typeface="Calibri"/>
+                <a:latin typeface="Arial"/>
               </a:rPr>
               <a:t>Bán hàng online, đặt vé, đặt sân, đóng học phí, ví điện tử, quyên góp.</a:t>
             </a:r>
@@ -5718,7 +5718,7 @@
                 <a:solidFill>
                   <a:srgbClr val="16181D"/>
                 </a:solidFill>
-                <a:latin typeface="Calibri"/>
+                <a:latin typeface="Arial"/>
               </a:rPr>
               <a:t>Việc phải làm chỉ là thay chỗ lưu đơn hàng bằng repository của mình.</a:t>
             </a:r>
@@ -5783,7 +5783,7 @@
                 <a:solidFill>
                   <a:srgbClr val="0A5BA8"/>
                 </a:solidFill>
-                <a:latin typeface="Calibri"/>
+                <a:latin typeface="Arial"/>
               </a:rPr>
               <a:t>TỔNG KẾT</a:t>
             </a:r>
@@ -5799,7 +5799,7 @@
                 <a:solidFill>
                   <a:srgbClr val="16181D"/>
                 </a:solidFill>
-                <a:latin typeface="Calibri"/>
+                <a:latin typeface="Arial"/>
               </a:rPr>
               <a:t>Sáu điều nên nhớ</a:t>
             </a:r>
@@ -5815,7 +5815,7 @@
         <p:spPr>
           <a:xfrm>
             <a:off x="566928" y="1425447"/>
-            <a:ext cx="11057839" cy="2144268"/>
+            <a:ext cx="11057839" cy="1769364"/>
           </a:xfrm>
           <a:prstGeom prst="rect">
             <a:avLst/>
@@ -5830,7 +5830,7 @@
           </a:ln>
         </p:spPr>
         <p:txBody>
-          <a:bodyPr wrap="none" lIns="201168" rIns="146304" tIns="128016" bIns="128016">
+          <a:bodyPr wrap="none" lIns="201168" rIns="146304" tIns="100584" bIns="82296">
             <a:spAutoFit/>
           </a:bodyPr>
           <a:lstStyle/>
@@ -5845,7 +5845,7 @@
                 <a:solidFill>
                   <a:srgbClr val="E4ECF5"/>
                 </a:solidFill>
-                <a:latin typeface="Consolas"/>
+                <a:latin typeface="Roboto Mono"/>
               </a:rPr>
               <a:t>1. Chỉ tin IPN và querydr, hai kênh server gọi server</a:t>
             </a:r>
@@ -5861,7 +5861,7 @@
                 <a:solidFill>
                   <a:srgbClr val="E4ECF5"/>
                 </a:solidFill>
-                <a:latin typeface="Consolas"/>
+                <a:latin typeface="Roboto Mono"/>
               </a:rPr>
               <a:t>2. So lại số tiền với đơn trong DB trước khi đánh dấu PAID</a:t>
             </a:r>
@@ -5877,7 +5877,7 @@
                 <a:solidFill>
                   <a:srgbClr val="E4ECF5"/>
                 </a:solidFill>
-                <a:latin typeface="Consolas"/>
+                <a:latin typeface="Roboto Mono"/>
               </a:rPr>
               <a:t>3. Idempotent bằng trạng thái đơn, đã xử lý thì trả 02</a:t>
             </a:r>
@@ -5893,7 +5893,7 @@
                 <a:solidFill>
                   <a:srgbClr val="E4ECF5"/>
                 </a:solidFill>
-                <a:latin typeface="Consolas"/>
+                <a:latin typeface="Roboto Mono"/>
               </a:rPr>
               <a:t>4. vnp_TxnRef duy nhất trong 24h, thanh toán lại phải sinh mã mới</a:t>
             </a:r>
@@ -5909,7 +5909,7 @@
                 <a:solidFill>
                   <a:srgbClr val="E4ECF5"/>
                 </a:solidFill>
-                <a:latin typeface="Consolas"/>
+                <a:latin typeface="Roboto Mono"/>
               </a:rPr>
               <a:t>5. Giờ Asia/Ho_Chi_Minh, đừng dùng Etc/GMT+7</a:t>
             </a:r>
@@ -5925,7 +5925,7 @@
                 <a:solidFill>
                   <a:srgbClr val="E4ECF5"/>
                 </a:solidFill>
-                <a:latin typeface="Consolas"/>
+                <a:latin typeface="Roboto Mono"/>
               </a:rPr>
               <a:t>6. Không log secret, không log chữ ký</a:t>
             </a:r>
@@ -5940,8 +5940,8 @@
         </p:nvSpPr>
         <p:spPr>
           <a:xfrm>
-            <a:off x="566928" y="3688587"/>
-            <a:ext cx="11057839" cy="843534"/>
+            <a:off x="566928" y="3313683"/>
+            <a:ext cx="11057839" cy="733044"/>
           </a:xfrm>
           <a:prstGeom prst="rect">
             <a:avLst/>
@@ -5971,7 +5971,7 @@
                 <a:solidFill>
                   <a:srgbClr val="0A5BA8"/>
                 </a:solidFill>
-                <a:latin typeface="Calibri"/>
+                <a:latin typeface="Arial"/>
               </a:rPr>
               <a:t>Nếu chỉ nhớ được một câu</a:t>
             </a:r>
@@ -5987,7 +5987,7 @@
                 <a:solidFill>
                   <a:srgbClr val="16181D"/>
                 </a:solidFill>
-                <a:latin typeface="Calibri"/>
+                <a:latin typeface="Arial"/>
               </a:rPr>
               <a:t>Tham số trên trình duyệt là dữ liệu do khách mang về, không phải sự thật.</a:t>
             </a:r>
@@ -6002,7 +6002,7 @@
         </p:nvSpPr>
         <p:spPr>
           <a:xfrm>
-            <a:off x="566928" y="4650993"/>
+            <a:off x="566928" y="4165599"/>
             <a:ext cx="11057839" cy="767588"/>
           </a:xfrm>
           <a:prstGeom prst="rect">
@@ -6026,7 +6026,7 @@
                 <a:solidFill>
                   <a:srgbClr val="16181D"/>
                 </a:solidFill>
-                <a:latin typeface="Calibri"/>
+                <a:latin typeface="Arial"/>
               </a:rPr>
               <a:t>Giới hạn: bắt buộc redirect nên app mobile phải nhúng WebView. Sandbox không giống</a:t>
             </a:r>
@@ -6042,7 +6042,7 @@
                 <a:solidFill>
                   <a:srgbClr val="16181D"/>
                 </a:solidFill>
-                <a:latin typeface="Calibri"/>
+                <a:latin typeface="Arial"/>
               </a:rPr>
               <a:t>production 100%. Hoàn tiền phải gọi API refund rồi đối soát tay. ngrok free đổi địa chỉ mỗi lần chạy.</a:t>
             </a:r>
@@ -6107,7 +6107,7 @@
                 <a:solidFill>
                   <a:srgbClr val="0A5BA8"/>
                 </a:solidFill>
-                <a:latin typeface="Calibri"/>
+                <a:latin typeface="Arial"/>
               </a:rPr>
               <a:t>HỎI ĐÁP</a:t>
             </a:r>
@@ -6123,7 +6123,7 @@
                 <a:solidFill>
                   <a:srgbClr val="16181D"/>
                 </a:solidFill>
-                <a:latin typeface="Calibri"/>
+                <a:latin typeface="Arial"/>
               </a:rPr>
               <a:t>Mấy câu chắc sẽ bị hỏi</a:t>
             </a:r>
@@ -6162,7 +6162,7 @@
                 <a:solidFill>
                   <a:srgbClr val="16181D"/>
                 </a:solidFill>
-                <a:latin typeface="Calibri"/>
+                <a:latin typeface="Arial"/>
               </a:rPr>
               <a:t>IPN không về thì đơn treo mãi à?</a:t>
             </a:r>
@@ -6178,7 +6178,7 @@
                 <a:solidFill>
                   <a:srgbClr val="16181D"/>
                 </a:solidFill>
-                <a:latin typeface="Calibri"/>
+                <a:latin typeface="Arial"/>
               </a:rPr>
               <a:t>Không. Job quét đơn PENDING quá hạn rồi gọi querydr để chốt.</a:t>
             </a:r>
@@ -6201,7 +6201,7 @@
                 <a:solidFill>
                   <a:srgbClr val="16181D"/>
                 </a:solidFill>
-                <a:latin typeface="Calibri"/>
+                <a:latin typeface="Arial"/>
               </a:rPr>
               <a:t>Sao phải cài ngrok, không có cách nào khác?</a:t>
             </a:r>
@@ -6217,7 +6217,7 @@
                 <a:solidFill>
                   <a:srgbClr val="16181D"/>
                 </a:solidFill>
-                <a:latin typeface="Calibri"/>
+                <a:latin typeface="Arial"/>
               </a:rPr>
               <a:t>Cần một địa chỉ công khai để VNPAY gọi vào. Deploy lên server thật cũng được, nhưng chậm hơn.</a:t>
             </a:r>
@@ -6240,7 +6240,7 @@
                 <a:solidFill>
                   <a:srgbClr val="16181D"/>
                 </a:solidFill>
-                <a:latin typeface="Calibri"/>
+                <a:latin typeface="Arial"/>
               </a:rPr>
               <a:t>Báo sai chữ ký mà không hiểu vì sao?</a:t>
             </a:r>
@@ -6256,7 +6256,7 @@
                 <a:solidFill>
                   <a:srgbClr val="16181D"/>
                 </a:solidFill>
-                <a:latin typeface="Calibri"/>
+                <a:latin typeface="Arial"/>
               </a:rPr>
               <a:t>In hashData ra rồi so từng ký tự. Gần như luôn là quên URL-encode, hoặc quên bỏ vnp_SecureHash.</a:t>
             </a:r>
@@ -6279,7 +6279,7 @@
                 <a:solidFill>
                   <a:srgbClr val="16181D"/>
                 </a:solidFill>
-                <a:latin typeface="Calibri"/>
+                <a:latin typeface="Arial"/>
               </a:rPr>
               <a:t>Test được không nếu chưa có thẻ, chưa có mạng?</a:t>
             </a:r>
@@ -6295,7 +6295,7 @@
                 <a:solidFill>
                   <a:srgbClr val="16181D"/>
                 </a:solidFill>
-                <a:latin typeface="Calibri"/>
+                <a:latin typeface="Arial"/>
               </a:rPr>
               <a:t>Được, phần ký và verify có unit test chạy offline hoàn toàn.</a:t>
             </a:r>
@@ -6360,7 +6360,7 @@
                 <a:solidFill>
                   <a:srgbClr val="0A5BA8"/>
                 </a:solidFill>
-                <a:latin typeface="Calibri"/>
+                <a:latin typeface="Arial"/>
               </a:rPr>
               <a:t>BÀN GIAO</a:t>
             </a:r>
@@ -6376,7 +6376,7 @@
                 <a:solidFill>
                   <a:srgbClr val="16181D"/>
                 </a:solidFill>
-                <a:latin typeface="Calibri"/>
+                <a:latin typeface="Arial"/>
               </a:rPr>
               <a:t>Mang về dùng cho đồ án</a:t>
             </a:r>
@@ -6415,7 +6415,7 @@
                 <a:solidFill>
                   <a:srgbClr val="16181D"/>
                 </a:solidFill>
-                <a:latin typeface="Calibri"/>
+                <a:latin typeface="Arial"/>
               </a:rPr>
               <a:t>Sau buổi hôm nay mình bỏ bản làm xong vào đúng thư mục Drive lúc nãy.</a:t>
             </a:r>
@@ -6431,7 +6431,7 @@
         <p:spPr>
           <a:xfrm>
             <a:off x="566928" y="2017267"/>
-            <a:ext cx="11057839" cy="1527048"/>
+            <a:ext cx="11057839" cy="1258824"/>
           </a:xfrm>
           <a:prstGeom prst="rect">
             <a:avLst/>
@@ -6446,7 +6446,7 @@
           </a:ln>
         </p:spPr>
         <p:txBody>
-          <a:bodyPr wrap="none" lIns="201168" rIns="146304" tIns="128016" bIns="128016">
+          <a:bodyPr wrap="none" lIns="201168" rIns="146304" tIns="100584" bIns="82296">
             <a:spAutoFit/>
           </a:bodyPr>
           <a:lstStyle/>
@@ -6461,7 +6461,7 @@
                 <a:solidFill>
                   <a:srgbClr val="E4ECF5"/>
                 </a:solidFill>
-                <a:latin typeface="Consolas"/>
+                <a:latin typeface="Roboto Mono"/>
               </a:rPr>
               <a:t>VnpayDemo.java      bản đã điền xong 6 TODO</a:t>
             </a:r>
@@ -6477,7 +6477,7 @@
                 <a:solidFill>
                   <a:srgbClr val="E4ECF5"/>
                 </a:solidFill>
-                <a:latin typeface="Consolas"/>
+                <a:latin typeface="Roboto Mono"/>
               </a:rPr>
               <a:t>  Bước 4 và 5       hàm ký và verify chữ ký</a:t>
             </a:r>
@@ -6493,7 +6493,7 @@
                 <a:solidFill>
                   <a:srgbClr val="E4ECF5"/>
                 </a:solidFill>
-                <a:latin typeface="Consolas"/>
+                <a:latin typeface="Roboto Mono"/>
               </a:rPr>
               <a:t>  Bước 8            đối soát khi IPN không về</a:t>
             </a:r>
@@ -6509,7 +6509,7 @@
                 <a:solidFill>
                   <a:srgbClr val="E4ECF5"/>
                 </a:solidFill>
-                <a:latin typeface="Consolas"/>
+                <a:latin typeface="Roboto Mono"/>
               </a:rPr>
               <a:t>  VNPAY_MODE        chạy có ngrok hay không ngrok</a:t>
             </a:r>
@@ -6524,8 +6524,8 @@
         </p:nvSpPr>
         <p:spPr>
           <a:xfrm>
-            <a:off x="566928" y="3663187"/>
-            <a:ext cx="11057839" cy="1357884"/>
+            <a:off x="566928" y="3394963"/>
+            <a:ext cx="11057839" cy="1228344"/>
           </a:xfrm>
           <a:prstGeom prst="rect">
             <a:avLst/>
@@ -6555,7 +6555,7 @@
                 <a:solidFill>
                   <a:srgbClr val="0B6B47"/>
                 </a:solidFill>
-                <a:latin typeface="Calibri"/>
+                <a:latin typeface="Arial"/>
               </a:rPr>
               <a:t>Ba bước để nhét vào đồ án của bạn</a:t>
             </a:r>
@@ -6571,7 +6571,7 @@
                 <a:solidFill>
                   <a:srgbClr val="16181D"/>
                 </a:solidFill>
-                <a:latin typeface="Calibri"/>
+                <a:latin typeface="Arial"/>
               </a:rPr>
               <a:t>1. Copy hai hàm hmacSHA512 và buildQueryString sang project</a:t>
             </a:r>
@@ -6587,7 +6587,7 @@
                 <a:solidFill>
                   <a:srgbClr val="16181D"/>
                 </a:solidFill>
-                <a:latin typeface="Calibri"/>
+                <a:latin typeface="Arial"/>
               </a:rPr>
               <a:t>2. Thay chỗ lưu đơn hàng bằng repository sẵn có của bạn</a:t>
             </a:r>
@@ -6603,7 +6603,7 @@
                 <a:solidFill>
                   <a:srgbClr val="16181D"/>
                 </a:solidFill>
-                <a:latin typeface="Calibri"/>
+                <a:latin typeface="Arial"/>
               </a:rPr>
               <a:t>3. Nạp TmnCode và HashSecret từ biến môi trường, đừng hardcode</a:t>
             </a:r>
@@ -6618,7 +6618,7 @@
         </p:nvSpPr>
         <p:spPr>
           <a:xfrm>
-            <a:off x="566928" y="5139943"/>
+            <a:off x="566928" y="4742179"/>
             <a:ext cx="11057839" cy="457200"/>
           </a:xfrm>
           <a:prstGeom prst="rect">
@@ -6642,7 +6642,7 @@
                 <a:solidFill>
                   <a:srgbClr val="6B7788"/>
                 </a:solidFill>
-                <a:latin typeface="Calibri"/>
+                <a:latin typeface="Arial"/>
               </a:rPr>
               <a:t>Có gì không chạy cứ nhắn mình.</a:t>
             </a:r>
@@ -6707,7 +6707,7 @@
                 <a:solidFill>
                   <a:srgbClr val="0A5BA8"/>
                 </a:solidFill>
-                <a:latin typeface="Calibri"/>
+                <a:latin typeface="Arial"/>
               </a:rPr>
               <a:t>VẤN ĐỀ</a:t>
             </a:r>
@@ -6723,7 +6723,7 @@
                 <a:solidFill>
                   <a:srgbClr val="16181D"/>
                 </a:solidFill>
-                <a:latin typeface="Calibri"/>
+                <a:latin typeface="Arial"/>
               </a:rPr>
               <a:t>Tại sao phải qua cổng thanh toán</a:t>
             </a:r>
@@ -6762,7 +6762,7 @@
                 <a:solidFill>
                   <a:srgbClr val="16181D"/>
                 </a:solidFill>
-                <a:latin typeface="Calibri"/>
+                <a:latin typeface="Arial"/>
               </a:rPr>
               <a:t>Lưu số thẻ trên server của mình là vi phạm PCI-DSS, và ngân hàng không cấp API trực tiếp cho đồ án.</a:t>
             </a:r>
@@ -6778,7 +6778,7 @@
                 <a:solidFill>
                   <a:srgbClr val="16181D"/>
                 </a:solidFill>
-                <a:latin typeface="Calibri"/>
+                <a:latin typeface="Arial"/>
               </a:rPr>
               <a:t>VNPAY đảo ngược luồng: khách nhập thẻ trên trang của VNPAY, không phải trang của mình.</a:t>
             </a:r>
@@ -6794,7 +6794,7 @@
                 <a:solidFill>
                   <a:srgbClr val="16181D"/>
                 </a:solidFill>
-                <a:latin typeface="Calibri"/>
+                <a:latin typeface="Arial"/>
               </a:rPr>
               <a:t>Server mình chỉ trao đổi chữ ký, không bao giờ thấy số thẻ.</a:t>
             </a:r>
@@ -6810,7 +6810,7 @@
         <p:spPr>
           <a:xfrm>
             <a:off x="566928" y="2743707"/>
-            <a:ext cx="11057839" cy="1100709"/>
+            <a:ext cx="11057839" cy="980694"/>
           </a:xfrm>
           <a:prstGeom prst="rect">
             <a:avLst/>
@@ -6840,7 +6840,7 @@
                 <a:solidFill>
                   <a:srgbClr val="0A5BA8"/>
                 </a:solidFill>
-                <a:latin typeface="Calibri"/>
+                <a:latin typeface="Arial"/>
               </a:rPr>
               <a:t>Câu chốt cho cả buổi</a:t>
             </a:r>
@@ -6856,7 +6856,7 @@
                 <a:solidFill>
                   <a:srgbClr val="16181D"/>
                 </a:solidFill>
-                <a:latin typeface="Calibri"/>
+                <a:latin typeface="Arial"/>
               </a:rPr>
               <a:t>VNPAY không có SDK. Nó chỉ là redirect cộng một chữ ký HMAC-SHA512.</a:t>
             </a:r>
@@ -6872,7 +6872,7 @@
                 <a:solidFill>
                   <a:srgbClr val="16181D"/>
                 </a:solidFill>
-                <a:latin typeface="Calibri"/>
+                <a:latin typeface="Arial"/>
               </a:rPr>
               <a:t>Nắm được chữ ký là xong 90% bài toán.</a:t>
             </a:r>
@@ -6937,7 +6937,7 @@
                 <a:solidFill>
                   <a:srgbClr val="0A5BA8"/>
                 </a:solidFill>
-                <a:latin typeface="Calibri"/>
+                <a:latin typeface="Arial"/>
               </a:rPr>
               <a:t>KIẾN TRÚC</a:t>
             </a:r>
@@ -6953,7 +6953,7 @@
                 <a:solidFill>
                   <a:srgbClr val="16181D"/>
                 </a:solidFill>
-                <a:latin typeface="Calibri"/>
+                <a:latin typeface="Arial"/>
               </a:rPr>
               <a:t>Bốn đường đi, chỉ hai đường được tin</a:t>
             </a:r>
@@ -6969,7 +6969,7 @@
         <p:spPr>
           <a:xfrm>
             <a:off x="566928" y="1425447"/>
-            <a:ext cx="11057839" cy="2164842"/>
+            <a:ext cx="11057839" cy="1786382"/>
           </a:xfrm>
           <a:prstGeom prst="rect">
             <a:avLst/>
@@ -6984,7 +6984,7 @@
           </a:ln>
         </p:spPr>
         <p:txBody>
-          <a:bodyPr wrap="none" lIns="201168" rIns="146304" tIns="128016" bIns="128016">
+          <a:bodyPr wrap="none" lIns="201168" rIns="146304" tIns="100584" bIns="82296">
             <a:spAutoFit/>
           </a:bodyPr>
           <a:lstStyle/>
@@ -6999,7 +6999,7 @@
                 <a:solidFill>
                   <a:srgbClr val="E4ECF5"/>
                 </a:solidFill>
-                <a:latin typeface="Consolas"/>
+                <a:latin typeface="Roboto Mono"/>
               </a:rPr>
               <a:t>1. Browser -&gt; Server mình    tạo đơn PENDING, ký tham số, trả về paymentUrl</a:t>
             </a:r>
@@ -7022,7 +7022,7 @@
                 <a:solidFill>
                   <a:srgbClr val="E4ECF5"/>
                 </a:solidFill>
-                <a:latin typeface="Consolas"/>
+                <a:latin typeface="Roboto Mono"/>
               </a:rPr>
               <a:t>2. VNPAY   -&gt; Server mình    IPN, gọi thẳng server. TIN ĐƯỢC, cộng tiền ở đây</a:t>
             </a:r>
@@ -7045,7 +7045,7 @@
                 <a:solidFill>
                   <a:srgbClr val="E4ECF5"/>
                 </a:solidFill>
-                <a:latin typeface="Consolas"/>
+                <a:latin typeface="Roboto Mono"/>
               </a:rPr>
               <a:t>3. VNPAY   -&gt; Browser        ReturnURL. KHÔNG TIN, chỉ để vẽ màn hình</a:t>
             </a:r>
@@ -7068,7 +7068,7 @@
                 <a:solidFill>
                   <a:srgbClr val="E4ECF5"/>
                 </a:solidFill>
-                <a:latin typeface="Consolas"/>
+                <a:latin typeface="Roboto Mono"/>
               </a:rPr>
               <a:t>4. Server mình -&gt; VNPAY      querydr, hỏi lại trạng thái. TIN ĐƯỢC</a:t>
             </a:r>
@@ -7083,8 +7083,8 @@
         </p:nvSpPr>
         <p:spPr>
           <a:xfrm>
-            <a:off x="566928" y="3709161"/>
-            <a:ext cx="11057839" cy="1357884"/>
+            <a:off x="566928" y="3330701"/>
+            <a:ext cx="11057839" cy="1228344"/>
           </a:xfrm>
           <a:prstGeom prst="rect">
             <a:avLst/>
@@ -7114,7 +7114,7 @@
                 <a:solidFill>
                   <a:srgbClr val="C42B22"/>
                 </a:solidFill>
-                <a:latin typeface="Calibri"/>
+                <a:latin typeface="Arial"/>
               </a:rPr>
               <a:t>Hỏi cả lớp trước khi sang slide sau</a:t>
             </a:r>
@@ -7130,7 +7130,7 @@
                 <a:solidFill>
                   <a:srgbClr val="16181D"/>
                 </a:solidFill>
-                <a:latin typeface="Calibri"/>
+                <a:latin typeface="Arial"/>
               </a:rPr>
               <a:t>"Sao không cộng tiền luôn ở ReturnURL cho nhanh?"</a:t>
             </a:r>
@@ -7146,7 +7146,7 @@
                 <a:solidFill>
                   <a:srgbClr val="16181D"/>
                 </a:solidFill>
-                <a:latin typeface="Calibri"/>
+                <a:latin typeface="Arial"/>
               </a:rPr>
               <a:t>Vì đó là URL trên trình duyệt của khách. Sửa vnp_ResponseCode=00 là mua hàng miễn phí.</a:t>
             </a:r>
@@ -7162,7 +7162,7 @@
                 <a:solidFill>
                   <a:srgbClr val="16181D"/>
                 </a:solidFill>
-                <a:latin typeface="Calibri"/>
+                <a:latin typeface="Arial"/>
               </a:rPr>
               <a:t>Và khách tắt tab ngay sau khi trả tiền thì ReturnURL không bao giờ về.</a:t>
             </a:r>
@@ -7227,7 +7227,7 @@
                 <a:solidFill>
                   <a:srgbClr val="0A5BA8"/>
                 </a:solidFill>
-                <a:latin typeface="Calibri"/>
+                <a:latin typeface="Arial"/>
               </a:rPr>
               <a:t>LỘ TRÌNH</a:t>
             </a:r>
@@ -7243,7 +7243,7 @@
                 <a:solidFill>
                   <a:srgbClr val="16181D"/>
                 </a:solidFill>
-                <a:latin typeface="Calibri"/>
+                <a:latin typeface="Arial"/>
               </a:rPr>
               <a:t>Sáu chỗ trống trong ShopStart.java</a:t>
             </a:r>
@@ -7259,7 +7259,7 @@
         <p:spPr>
           <a:xfrm>
             <a:off x="566928" y="1425447"/>
-            <a:ext cx="11057839" cy="2144268"/>
+            <a:ext cx="11057839" cy="1769364"/>
           </a:xfrm>
           <a:prstGeom prst="rect">
             <a:avLst/>
@@ -7274,7 +7274,7 @@
           </a:ln>
         </p:spPr>
         <p:txBody>
-          <a:bodyPr wrap="none" lIns="201168" rIns="146304" tIns="128016" bIns="128016">
+          <a:bodyPr wrap="none" lIns="201168" rIns="146304" tIns="100584" bIns="82296">
             <a:spAutoFit/>
           </a:bodyPr>
           <a:lstStyle/>
@@ -7289,7 +7289,7 @@
                 <a:solidFill>
                   <a:srgbClr val="E4ECF5"/>
                 </a:solidFill>
-                <a:latin typeface="Consolas"/>
+                <a:latin typeface="Roboto Mono"/>
               </a:rPr>
               <a:t>TODO 1   Cấu hình TmnCode và HashSecret                    2 phút</a:t>
             </a:r>
@@ -7305,7 +7305,7 @@
                 <a:solidFill>
                   <a:srgbClr val="E4ECF5"/>
                 </a:solidFill>
-                <a:latin typeface="Consolas"/>
+                <a:latin typeface="Roboto Mono"/>
               </a:rPr>
               <a:t>TODO 2   Hàm ký HMAC-SHA512                                6 phút</a:t>
             </a:r>
@@ -7321,7 +7321,7 @@
                 <a:solidFill>
                   <a:srgbClr val="E4ECF5"/>
                 </a:solidFill>
-                <a:latin typeface="Consolas"/>
+                <a:latin typeface="Roboto Mono"/>
               </a:rPr>
               <a:t>TODO 3   Hàm verify chữ ký                                 3 phút</a:t>
             </a:r>
@@ -7337,7 +7337,7 @@
                 <a:solidFill>
                   <a:srgbClr val="E4ECF5"/>
                 </a:solidFill>
-                <a:latin typeface="Consolas"/>
+                <a:latin typeface="Roboto Mono"/>
               </a:rPr>
               <a:t>TODO 4   Tạo URL thanh toán                                5 phút</a:t>
             </a:r>
@@ -7353,7 +7353,7 @@
                 <a:solidFill>
                   <a:srgbClr val="E4ECF5"/>
                 </a:solidFill>
-                <a:latin typeface="Consolas"/>
+                <a:latin typeface="Roboto Mono"/>
               </a:rPr>
               <a:t>TODO 5   Nhận IPN                                          5 phút</a:t>
             </a:r>
@@ -7369,7 +7369,7 @@
                 <a:solidFill>
                   <a:srgbClr val="E4ECF5"/>
                 </a:solidFill>
-                <a:latin typeface="Consolas"/>
+                <a:latin typeface="Roboto Mono"/>
               </a:rPr>
               <a:t>TODO 6   ReturnURL và chốt trạng thái đơn                  4 phút</a:t>
             </a:r>
@@ -7384,7 +7384,7 @@
         </p:nvSpPr>
         <p:spPr>
           <a:xfrm>
-            <a:off x="566928" y="3688587"/>
+            <a:off x="566928" y="3313683"/>
             <a:ext cx="11057839" cy="836168"/>
           </a:xfrm>
           <a:prstGeom prst="rect">
@@ -7408,7 +7408,7 @@
                 <a:solidFill>
                   <a:srgbClr val="16181D"/>
                 </a:solidFill>
-                <a:latin typeface="Calibri"/>
+                <a:latin typeface="Arial"/>
               </a:rPr>
               <a:t>Phần đơn hàng, giao diện và server đã viết sẵn trong file, mình không đụng tới.</a:t>
             </a:r>
@@ -7424,7 +7424,7 @@
                 <a:solidFill>
                   <a:srgbClr val="16181D"/>
                 </a:solidFill>
-                <a:latin typeface="Calibri"/>
+                <a:latin typeface="Arial"/>
               </a:rPr>
               <a:t>Ai gõ không kịp cứ ngồi xem, cuối buổi mình gửi bản làm xong.</a:t>
             </a:r>
@@ -7489,7 +7489,7 @@
                 <a:solidFill>
                   <a:srgbClr val="0A5BA8"/>
                 </a:solidFill>
-                <a:latin typeface="Calibri"/>
+                <a:latin typeface="Arial"/>
               </a:rPr>
               <a:t>TODO 1</a:t>
             </a:r>
@@ -7505,7 +7505,7 @@
                 <a:solidFill>
                   <a:srgbClr val="16181D"/>
                 </a:solidFill>
-                <a:latin typeface="Calibri"/>
+                <a:latin typeface="Arial"/>
               </a:rPr>
               <a:t>Cấu hình</a:t>
             </a:r>
@@ -7544,7 +7544,7 @@
                 <a:solidFill>
                   <a:srgbClr val="6B7788"/>
                 </a:solidFill>
-                <a:latin typeface="Consolas"/>
+                <a:latin typeface="Roboto Mono"/>
               </a:rPr>
               <a:t>ShopStart.java</a:t>
             </a:r>
@@ -7560,7 +7560,7 @@
         <p:spPr>
           <a:xfrm>
             <a:off x="566928" y="1681479"/>
-            <a:ext cx="11057839" cy="2164842"/>
+            <a:ext cx="11057839" cy="1786382"/>
           </a:xfrm>
           <a:prstGeom prst="rect">
             <a:avLst/>
@@ -7575,7 +7575,7 @@
           </a:ln>
         </p:spPr>
         <p:txBody>
-          <a:bodyPr wrap="none" lIns="201168" rIns="146304" tIns="128016" bIns="128016">
+          <a:bodyPr wrap="none" lIns="201168" rIns="146304" tIns="100584" bIns="82296">
             <a:spAutoFit/>
           </a:bodyPr>
           <a:lstStyle/>
@@ -7590,7 +7590,7 @@
                 <a:solidFill>
                   <a:srgbClr val="E4ECF5"/>
                 </a:solidFill>
-                <a:latin typeface="Consolas"/>
+                <a:latin typeface="Roboto Mono"/>
               </a:rPr>
               <a:t>static final String TMN_CODE    = env("VNPAY_TMN_CODE", "CHANGE_ME");</a:t>
             </a:r>
@@ -7606,7 +7606,7 @@
                 <a:solidFill>
                   <a:srgbClr val="E4ECF5"/>
                 </a:solidFill>
-                <a:latin typeface="Consolas"/>
+                <a:latin typeface="Roboto Mono"/>
               </a:rPr>
               <a:t>static final String HASH_SECRET = env("VNPAY_HASH_SECRET", "CHANGE_ME");</a:t>
             </a:r>
@@ -7622,7 +7622,7 @@
                 <a:solidFill>
                   <a:srgbClr val="E4ECF5"/>
                 </a:solidFill>
-                <a:latin typeface="Consolas"/>
+                <a:latin typeface="Roboto Mono"/>
               </a:rPr>
               <a:t>static final String RETURN_URL  = env("VNPAY_RETURN_URL",</a:t>
             </a:r>
@@ -7638,7 +7638,7 @@
                 <a:solidFill>
                   <a:srgbClr val="E4ECF5"/>
                 </a:solidFill>
-                <a:latin typeface="Consolas"/>
+                <a:latin typeface="Roboto Mono"/>
               </a:rPr>
               <a:t>                                      "http://localhost:8080/vnpay/return");</a:t>
             </a:r>
@@ -7661,7 +7661,7 @@
                 <a:solidFill>
                   <a:srgbClr val="E4ECF5"/>
                 </a:solidFill>
-                <a:latin typeface="Consolas"/>
+                <a:latin typeface="Roboto Mono"/>
               </a:rPr>
               <a:t>static final String PAY_URL = "https://sandbox.vnpayment.vn/paymentv2/vpcpay.html";</a:t>
             </a:r>
@@ -7677,7 +7677,7 @@
                 <a:solidFill>
                   <a:srgbClr val="E4ECF5"/>
                 </a:solidFill>
-                <a:latin typeface="Consolas"/>
+                <a:latin typeface="Roboto Mono"/>
               </a:rPr>
               <a:t>static final String API_URL = "https://sandbox.vnpayment.vn/merchant_webapi/api/transaction";</a:t>
             </a:r>
@@ -7692,7 +7692,7 @@
         </p:nvSpPr>
         <p:spPr>
           <a:xfrm>
-            <a:off x="566928" y="3965193"/>
+            <a:off x="566928" y="3586733"/>
             <a:ext cx="11057839" cy="472948"/>
           </a:xfrm>
           <a:prstGeom prst="rect">
@@ -7716,7 +7716,7 @@
                 <a:solidFill>
                   <a:srgbClr val="16181D"/>
                 </a:solidFill>
-                <a:latin typeface="Calibri"/>
+                <a:latin typeface="Arial"/>
               </a:rPr>
               <a:t>Chạy app thì truyền qua biến môi trường:</a:t>
             </a:r>
@@ -7731,8 +7731,8 @@
         </p:nvSpPr>
         <p:spPr>
           <a:xfrm>
-            <a:off x="566928" y="4557013"/>
-            <a:ext cx="11057839" cy="1094994"/>
+            <a:off x="566928" y="4178553"/>
+            <a:ext cx="11057839" cy="901446"/>
           </a:xfrm>
           <a:prstGeom prst="rect">
             <a:avLst/>
@@ -7747,7 +7747,7 @@
           </a:ln>
         </p:spPr>
         <p:txBody>
-          <a:bodyPr wrap="none" lIns="201168" rIns="146304" tIns="128016" bIns="128016">
+          <a:bodyPr wrap="none" lIns="201168" rIns="146304" tIns="100584" bIns="82296">
             <a:spAutoFit/>
           </a:bodyPr>
           <a:lstStyle/>
@@ -7762,7 +7762,7 @@
                 <a:solidFill>
                   <a:srgbClr val="E4ECF5"/>
                 </a:solidFill>
-                <a:latin typeface="Consolas"/>
+                <a:latin typeface="Roboto Mono"/>
               </a:rPr>
               <a:t>export VNPAY_TMN_CODE=xxxxxxxx</a:t>
             </a:r>
@@ -7778,7 +7778,7 @@
                 <a:solidFill>
                   <a:srgbClr val="E4ECF5"/>
                 </a:solidFill>
-                <a:latin typeface="Consolas"/>
+                <a:latin typeface="Roboto Mono"/>
               </a:rPr>
               <a:t>export VNPAY_HASH_SECRET=xxxxxxxxxxxxxxxx</a:t>
             </a:r>
@@ -7794,7 +7794,7 @@
                 <a:solidFill>
                   <a:srgbClr val="E4ECF5"/>
                 </a:solidFill>
-                <a:latin typeface="Consolas"/>
+                <a:latin typeface="Roboto Mono"/>
               </a:rPr>
               <a:t>java ShopStart.java</a:t>
             </a:r>
@@ -7809,8 +7809,8 @@
         </p:nvSpPr>
         <p:spPr>
           <a:xfrm>
-            <a:off x="566928" y="5770879"/>
-            <a:ext cx="11057839" cy="843534"/>
+            <a:off x="566928" y="5198871"/>
+            <a:ext cx="11057839" cy="733044"/>
           </a:xfrm>
           <a:prstGeom prst="rect">
             <a:avLst/>
@@ -7840,7 +7840,7 @@
                 <a:solidFill>
                   <a:srgbClr val="C42B22"/>
                 </a:solidFill>
-                <a:latin typeface="Calibri"/>
+                <a:latin typeface="Arial"/>
               </a:rPr>
               <a:t>Đừng hardcode secret rồi push lên GitHub</a:t>
             </a:r>
@@ -7856,7 +7856,7 @@
                 <a:solidFill>
                   <a:srgbClr val="16181D"/>
                 </a:solidFill>
-                <a:latin typeface="Calibri"/>
+                <a:latin typeface="Arial"/>
               </a:rPr>
               <a:t>Ai clone repo cũng ký được đơn thay bạn. GitHub có bot quét chuyện này.</a:t>
             </a:r>
@@ -7921,7 +7921,7 @@
                 <a:solidFill>
                   <a:srgbClr val="0A5BA8"/>
                 </a:solidFill>
-                <a:latin typeface="Calibri"/>
+                <a:latin typeface="Arial"/>
               </a:rPr>
               <a:t>TODO 2</a:t>
             </a:r>
@@ -7937,7 +7937,7 @@
                 <a:solidFill>
                   <a:srgbClr val="16181D"/>
                 </a:solidFill>
-                <a:latin typeface="Calibri"/>
+                <a:latin typeface="Arial"/>
               </a:rPr>
               <a:t>Hàm ký, phần khó nhất</a:t>
             </a:r>
@@ -7976,7 +7976,7 @@
                 <a:solidFill>
                   <a:srgbClr val="16181D"/>
                 </a:solidFill>
-                <a:latin typeface="Calibri"/>
+                <a:latin typeface="Arial"/>
               </a:rPr>
               <a:t>Ba bước: sort alphabet, URL-encode giá trị, rồi HMAC-SHA512 ra hex chữ thường.</a:t>
             </a:r>
@@ -8015,7 +8015,7 @@
                 <a:solidFill>
                   <a:srgbClr val="6B7788"/>
                 </a:solidFill>
-                <a:latin typeface="Consolas"/>
+                <a:latin typeface="Roboto Mono"/>
               </a:rPr>
               <a:t>ShopStart.java</a:t>
             </a:r>
@@ -8031,7 +8031,7 @@
         <p:spPr>
           <a:xfrm>
             <a:off x="566928" y="2273299"/>
-            <a:ext cx="11057839" cy="3769614"/>
+            <a:ext cx="11057839" cy="3113786"/>
           </a:xfrm>
           <a:prstGeom prst="rect">
             <a:avLst/>
@@ -8046,7 +8046,7 @@
           </a:ln>
         </p:spPr>
         <p:txBody>
-          <a:bodyPr wrap="none" lIns="201168" rIns="146304" tIns="128016" bIns="128016">
+          <a:bodyPr wrap="none" lIns="201168" rIns="146304" tIns="100584" bIns="82296">
             <a:spAutoFit/>
           </a:bodyPr>
           <a:lstStyle/>
@@ -8061,7 +8061,7 @@
                 <a:solidFill>
                   <a:srgbClr val="E4ECF5"/>
                 </a:solidFill>
-                <a:latin typeface="Consolas"/>
+                <a:latin typeface="Roboto Mono"/>
               </a:rPr>
               <a:t>static String hmacSHA512(String secretKey, String data) {</a:t>
             </a:r>
@@ -8077,7 +8077,7 @@
                 <a:solidFill>
                   <a:srgbClr val="E4ECF5"/>
                 </a:solidFill>
-                <a:latin typeface="Consolas"/>
+                <a:latin typeface="Roboto Mono"/>
               </a:rPr>
               <a:t>    try {</a:t>
             </a:r>
@@ -8093,7 +8093,7 @@
                 <a:solidFill>
                   <a:srgbClr val="E4ECF5"/>
                 </a:solidFill>
-                <a:latin typeface="Consolas"/>
+                <a:latin typeface="Roboto Mono"/>
               </a:rPr>
               <a:t>        Mac mac = Mac.getInstance("HmacSHA512");</a:t>
             </a:r>
@@ -8109,7 +8109,7 @@
                 <a:solidFill>
                   <a:srgbClr val="E4ECF5"/>
                 </a:solidFill>
-                <a:latin typeface="Consolas"/>
+                <a:latin typeface="Roboto Mono"/>
               </a:rPr>
               <a:t>        mac.init(new SecretKeySpec(secretKey.getBytes(UTF_8), "HmacSHA512"));</a:t>
             </a:r>
@@ -8125,7 +8125,7 @@
                 <a:solidFill>
                   <a:srgbClr val="E4ECF5"/>
                 </a:solidFill>
-                <a:latin typeface="Consolas"/>
+                <a:latin typeface="Roboto Mono"/>
               </a:rPr>
               <a:t>        byte[] bytes = mac.doFinal(data.getBytes(UTF_8));</a:t>
             </a:r>
@@ -8148,7 +8148,7 @@
                 <a:solidFill>
                   <a:srgbClr val="E4ECF5"/>
                 </a:solidFill>
-                <a:latin typeface="Consolas"/>
+                <a:latin typeface="Roboto Mono"/>
               </a:rPr>
               <a:t>        StringBuilder hex = new StringBuilder(bytes.length * 2);</a:t>
             </a:r>
@@ -8164,7 +8164,7 @@
                 <a:solidFill>
                   <a:srgbClr val="E4ECF5"/>
                 </a:solidFill>
-                <a:latin typeface="Consolas"/>
+                <a:latin typeface="Roboto Mono"/>
               </a:rPr>
               <a:t>        for (byte b : bytes) hex.append(String.format("%02x", b));</a:t>
             </a:r>
@@ -8180,7 +8180,7 @@
                 <a:solidFill>
                   <a:srgbClr val="E4ECF5"/>
                 </a:solidFill>
-                <a:latin typeface="Consolas"/>
+                <a:latin typeface="Roboto Mono"/>
               </a:rPr>
               <a:t>        return hex.toString();                      // hex chữ thường</a:t>
             </a:r>
@@ -8196,7 +8196,7 @@
                 <a:solidFill>
                   <a:srgbClr val="E4ECF5"/>
                 </a:solidFill>
-                <a:latin typeface="Consolas"/>
+                <a:latin typeface="Roboto Mono"/>
               </a:rPr>
               <a:t>    } catch (Exception e) {</a:t>
             </a:r>
@@ -8212,7 +8212,7 @@
                 <a:solidFill>
                   <a:srgbClr val="E4ECF5"/>
                 </a:solidFill>
-                <a:latin typeface="Consolas"/>
+                <a:latin typeface="Roboto Mono"/>
               </a:rPr>
               <a:t>        throw new IllegalStateException("Không tạo được HMAC-SHA512", e);</a:t>
             </a:r>
@@ -8228,7 +8228,7 @@
                 <a:solidFill>
                   <a:srgbClr val="E4ECF5"/>
                 </a:solidFill>
-                <a:latin typeface="Consolas"/>
+                <a:latin typeface="Roboto Mono"/>
               </a:rPr>
               <a:t>    }</a:t>
             </a:r>
@@ -8244,7 +8244,7 @@
                 <a:solidFill>
                   <a:srgbClr val="E4ECF5"/>
                 </a:solidFill>
-                <a:latin typeface="Consolas"/>
+                <a:latin typeface="Roboto Mono"/>
               </a:rPr>
               <a:t>}</a:t>
             </a:r>
@@ -8309,7 +8309,7 @@
                 <a:solidFill>
                   <a:srgbClr val="0A5BA8"/>
                 </a:solidFill>
-                <a:latin typeface="Calibri"/>
+                <a:latin typeface="Arial"/>
               </a:rPr>
               <a:t>TODO 2</a:t>
             </a:r>
@@ -8325,7 +8325,7 @@
                 <a:solidFill>
                   <a:srgbClr val="16181D"/>
                 </a:solidFill>
-                <a:latin typeface="Calibri"/>
+                <a:latin typeface="Arial"/>
               </a:rPr>
               <a:t>Ráp chuỗi để đem đi băm</a:t>
             </a:r>
@@ -8364,7 +8364,7 @@
                 <a:solidFill>
                   <a:srgbClr val="6B7788"/>
                 </a:solidFill>
-                <a:latin typeface="Consolas"/>
+                <a:latin typeface="Roboto Mono"/>
               </a:rPr>
               <a:t>ShopStart.java</a:t>
             </a:r>
@@ -8380,7 +8380,7 @@
         <p:spPr>
           <a:xfrm>
             <a:off x="566928" y="1681479"/>
-            <a:ext cx="11057839" cy="3502152"/>
+            <a:ext cx="11057839" cy="2892552"/>
           </a:xfrm>
           <a:prstGeom prst="rect">
             <a:avLst/>
@@ -8395,7 +8395,7 @@
           </a:ln>
         </p:spPr>
         <p:txBody>
-          <a:bodyPr wrap="none" lIns="201168" rIns="146304" tIns="128016" bIns="128016">
+          <a:bodyPr wrap="none" lIns="201168" rIns="146304" tIns="100584" bIns="82296">
             <a:spAutoFit/>
           </a:bodyPr>
           <a:lstStyle/>
@@ -8410,7 +8410,7 @@
                 <a:solidFill>
                   <a:srgbClr val="E4ECF5"/>
                 </a:solidFill>
-                <a:latin typeface="Consolas"/>
+                <a:latin typeface="Roboto Mono"/>
               </a:rPr>
               <a:t>static String buildQueryString(Map&lt;String, String&gt; params) {</a:t>
             </a:r>
@@ -8426,7 +8426,7 @@
                 <a:solidFill>
                   <a:srgbClr val="E4ECF5"/>
                 </a:solidFill>
-                <a:latin typeface="Consolas"/>
+                <a:latin typeface="Roboto Mono"/>
               </a:rPr>
               <a:t>    StringBuilder sb = new StringBuilder();</a:t>
             </a:r>
@@ -8449,7 +8449,7 @@
                 <a:solidFill>
                   <a:srgbClr val="E4ECF5"/>
                 </a:solidFill>
-                <a:latin typeface="Consolas"/>
+                <a:latin typeface="Roboto Mono"/>
               </a:rPr>
               <a:t>    for (var e : new TreeMap&lt;&gt;(params).entrySet()) {          // 1. sort alphabet</a:t>
             </a:r>
@@ -8465,7 +8465,7 @@
                 <a:solidFill>
                   <a:srgbClr val="E4ECF5"/>
                 </a:solidFill>
-                <a:latin typeface="Consolas"/>
+                <a:latin typeface="Roboto Mono"/>
               </a:rPr>
               <a:t>        if (e.getValue() == null || e.getValue().isEmpty()) continue;</a:t>
             </a:r>
@@ -8481,7 +8481,7 @@
                 <a:solidFill>
                   <a:srgbClr val="E4ECF5"/>
                 </a:solidFill>
-                <a:latin typeface="Consolas"/>
+                <a:latin typeface="Roboto Mono"/>
               </a:rPr>
               <a:t>        if (sb.length() &gt; 0) sb.append('&amp;');</a:t>
             </a:r>
@@ -8504,7 +8504,7 @@
                 <a:solidFill>
                   <a:srgbClr val="E4ECF5"/>
                 </a:solidFill>
-                <a:latin typeface="Consolas"/>
+                <a:latin typeface="Roboto Mono"/>
               </a:rPr>
               <a:t>        sb.append(URLEncoder.encode(e.getKey(), US_ASCII)).append('=')</a:t>
             </a:r>
@@ -8520,7 +8520,7 @@
                 <a:solidFill>
                   <a:srgbClr val="E4ECF5"/>
                 </a:solidFill>
-                <a:latin typeface="Consolas"/>
+                <a:latin typeface="Roboto Mono"/>
               </a:rPr>
               <a:t>          .append(URLEncoder.encode(e.getValue(), US_ASCII));  // 2. encode giá trị</a:t>
             </a:r>
@@ -8536,7 +8536,7 @@
                 <a:solidFill>
                   <a:srgbClr val="E4ECF5"/>
                 </a:solidFill>
-                <a:latin typeface="Consolas"/>
+                <a:latin typeface="Roboto Mono"/>
               </a:rPr>
               <a:t>    }</a:t>
             </a:r>
@@ -8552,7 +8552,7 @@
                 <a:solidFill>
                   <a:srgbClr val="E4ECF5"/>
                 </a:solidFill>
-                <a:latin typeface="Consolas"/>
+                <a:latin typeface="Roboto Mono"/>
               </a:rPr>
               <a:t>    return sb.toString();</a:t>
             </a:r>
@@ -8568,7 +8568,7 @@
                 <a:solidFill>
                   <a:srgbClr val="E4ECF5"/>
                 </a:solidFill>
-                <a:latin typeface="Consolas"/>
+                <a:latin typeface="Roboto Mono"/>
               </a:rPr>
               <a:t>}</a:t>
             </a:r>
@@ -8583,8 +8583,8 @@
         </p:nvSpPr>
         <p:spPr>
           <a:xfrm>
-            <a:off x="566928" y="5302503"/>
-            <a:ext cx="11057839" cy="1100709"/>
+            <a:off x="566928" y="4692903"/>
+            <a:ext cx="11057839" cy="980694"/>
           </a:xfrm>
           <a:prstGeom prst="rect">
             <a:avLst/>
@@ -8614,7 +8614,7 @@
                 <a:solidFill>
                   <a:srgbClr val="C42B22"/>
                 </a:solidFill>
-                <a:latin typeface="Calibri"/>
+                <a:latin typeface="Arial"/>
               </a:rPr>
               <a:t>Đây là chỗ 90% người mới bị sai chữ ký</a:t>
             </a:r>
@@ -8630,7 +8630,7 @@
                 <a:solidFill>
                   <a:srgbClr val="16181D"/>
                 </a:solidFill>
-                <a:latin typeface="Calibri"/>
+                <a:latin typeface="Arial"/>
               </a:rPr>
               <a:t>Quên encode GIÁ TRỊ. vnp_OrderInfo có dấu cách là hỏng ngay.</a:t>
             </a:r>
@@ -8646,7 +8646,7 @@
                 <a:solidFill>
                   <a:srgbClr val="16181D"/>
                 </a:solidFill>
-                <a:latin typeface="Calibri"/>
+                <a:latin typeface="Arial"/>
               </a:rPr>
               <a:t>Để lọt tham số rỗng vào chuỗi. VNPAY bỏ qua chúng, mình giữ lại là lệch.</a:t>
             </a:r>
@@ -8711,7 +8711,7 @@
                 <a:solidFill>
                   <a:srgbClr val="0A5BA8"/>
                 </a:solidFill>
-                <a:latin typeface="Calibri"/>
+                <a:latin typeface="Arial"/>
               </a:rPr>
               <a:t>TODO 3</a:t>
             </a:r>
@@ -8727,7 +8727,7 @@
                 <a:solidFill>
                   <a:srgbClr val="16181D"/>
                 </a:solidFill>
-                <a:latin typeface="Calibri"/>
+                <a:latin typeface="Arial"/>
               </a:rPr>
               <a:t>Verify chữ ký khi VNPAY gọi về</a:t>
             </a:r>
@@ -8766,7 +8766,7 @@
                 <a:solidFill>
                   <a:srgbClr val="16181D"/>
                 </a:solidFill>
-                <a:latin typeface="Calibri"/>
+                <a:latin typeface="Arial"/>
               </a:rPr>
               <a:t>Dùng lại đúng hàm vừa viết, thêm một việc: bỏ chính chữ ký ra trước khi băm.</a:t>
             </a:r>
@@ -8805,7 +8805,7 @@
                 <a:solidFill>
                   <a:srgbClr val="6B7788"/>
                 </a:solidFill>
-                <a:latin typeface="Consolas"/>
+                <a:latin typeface="Roboto Mono"/>
               </a:rPr>
               <a:t>ShopStart.java</a:t>
             </a:r>
@@ -8821,7 +8821,7 @@
         <p:spPr>
           <a:xfrm>
             <a:off x="566928" y="2273299"/>
-            <a:ext cx="11057839" cy="3234690"/>
+            <a:ext cx="11057839" cy="2671318"/>
           </a:xfrm>
           <a:prstGeom prst="rect">
             <a:avLst/>
@@ -8836,7 +8836,7 @@
           </a:ln>
         </p:spPr>
         <p:txBody>
-          <a:bodyPr wrap="none" lIns="201168" rIns="146304" tIns="128016" bIns="128016">
+          <a:bodyPr wrap="none" lIns="201168" rIns="146304" tIns="100584" bIns="82296">
             <a:spAutoFit/>
           </a:bodyPr>
           <a:lstStyle/>
@@ -8851,7 +8851,7 @@
                 <a:solidFill>
                   <a:srgbClr val="E4ECF5"/>
                 </a:solidFill>
-                <a:latin typeface="Consolas"/>
+                <a:latin typeface="Roboto Mono"/>
               </a:rPr>
               <a:t>static boolean isValidSignature(Map&lt;String, String&gt; params) {</a:t>
             </a:r>
@@ -8867,7 +8867,7 @@
                 <a:solidFill>
                   <a:srgbClr val="E4ECF5"/>
                 </a:solidFill>
-                <a:latin typeface="Consolas"/>
+                <a:latin typeface="Roboto Mono"/>
               </a:rPr>
               <a:t>    String received = params.get("vnp_SecureHash");</a:t>
             </a:r>
@@ -8883,7 +8883,7 @@
                 <a:solidFill>
                   <a:srgbClr val="E4ECF5"/>
                 </a:solidFill>
-                <a:latin typeface="Consolas"/>
+                <a:latin typeface="Roboto Mono"/>
               </a:rPr>
               <a:t>    if (received == null || received.isBlank()) return false;</a:t>
             </a:r>
@@ -8906,7 +8906,7 @@
                 <a:solidFill>
                   <a:srgbClr val="E4ECF5"/>
                 </a:solidFill>
-                <a:latin typeface="Consolas"/>
+                <a:latin typeface="Roboto Mono"/>
               </a:rPr>
               <a:t>    Map&lt;String, String&gt; clone = new TreeMap&lt;&gt;(params);</a:t>
             </a:r>
@@ -8922,7 +8922,7 @@
                 <a:solidFill>
                   <a:srgbClr val="E4ECF5"/>
                 </a:solidFill>
-                <a:latin typeface="Consolas"/>
+                <a:latin typeface="Roboto Mono"/>
               </a:rPr>
               <a:t>    clone.remove("vnp_SecureHash");</a:t>
             </a:r>
@@ -8938,7 +8938,7 @@
                 <a:solidFill>
                   <a:srgbClr val="E4ECF5"/>
                 </a:solidFill>
-                <a:latin typeface="Consolas"/>
+                <a:latin typeface="Roboto Mono"/>
               </a:rPr>
               <a:t>    clone.remove("vnp_SecureHashType");</a:t>
             </a:r>
@@ -8961,7 +8961,7 @@
                 <a:solidFill>
                   <a:srgbClr val="E4ECF5"/>
                 </a:solidFill>
-                <a:latin typeface="Consolas"/>
+                <a:latin typeface="Roboto Mono"/>
               </a:rPr>
               <a:t>    String expected = hmacSHA512(HASH_SECRET, buildQueryString(clone));</a:t>
             </a:r>
@@ -8977,7 +8977,7 @@
                 <a:solidFill>
                   <a:srgbClr val="E4ECF5"/>
                 </a:solidFill>
-                <a:latin typeface="Consolas"/>
+                <a:latin typeface="Roboto Mono"/>
               </a:rPr>
               <a:t>    return constantTimeEquals(expected, received);</a:t>
             </a:r>
@@ -8993,7 +8993,7 @@
                 <a:solidFill>
                   <a:srgbClr val="E4ECF5"/>
                 </a:solidFill>
-                <a:latin typeface="Consolas"/>
+                <a:latin typeface="Roboto Mono"/>
               </a:rPr>
               <a:t>}</a:t>
             </a:r>
@@ -9008,8 +9008,8 @@
         </p:nvSpPr>
         <p:spPr>
           <a:xfrm>
-            <a:off x="566928" y="5626861"/>
-            <a:ext cx="11057839" cy="843534"/>
+            <a:off x="566928" y="5063489"/>
+            <a:ext cx="11057839" cy="733044"/>
           </a:xfrm>
           <a:prstGeom prst="rect">
             <a:avLst/>
@@ -9039,7 +9039,7 @@
                 <a:solidFill>
                   <a:srgbClr val="0A5BA8"/>
                 </a:solidFill>
-                <a:latin typeface="Calibri"/>
+                <a:latin typeface="Arial"/>
               </a:rPr>
               <a:t>Cách debug khi bí</a:t>
             </a:r>
@@ -9055,7 +9055,7 @@
                 <a:solidFill>
                   <a:srgbClr val="16181D"/>
                 </a:solidFill>
-                <a:latin typeface="Calibri"/>
+                <a:latin typeface="Arial"/>
               </a:rPr>
               <a:t>In buildQueryString(clone) ra rồi so từng ký tự với query string trên thanh địa chỉ.</a:t>
             </a:r>
@@ -9120,7 +9120,7 @@
                 <a:solidFill>
                   <a:srgbClr val="0A5BA8"/>
                 </a:solidFill>
-                <a:latin typeface="Calibri"/>
+                <a:latin typeface="Arial"/>
               </a:rPr>
               <a:t>TODO 4</a:t>
             </a:r>
@@ -9136,7 +9136,7 @@
                 <a:solidFill>
                   <a:srgbClr val="16181D"/>
                 </a:solidFill>
-                <a:latin typeface="Calibri"/>
+                <a:latin typeface="Arial"/>
               </a:rPr>
               <a:t>Ráp tham số và tạo URL</a:t>
             </a:r>
@@ -9152,7 +9152,7 @@
         <p:spPr>
           <a:xfrm>
             <a:off x="566928" y="1425447"/>
-            <a:ext cx="11057839" cy="1629918"/>
+            <a:ext cx="11057839" cy="1343914"/>
           </a:xfrm>
           <a:prstGeom prst="rect">
             <a:avLst/>
@@ -9167,7 +9167,7 @@
           </a:ln>
         </p:spPr>
         <p:txBody>
-          <a:bodyPr wrap="none" lIns="201168" rIns="146304" tIns="128016" bIns="128016">
+          <a:bodyPr wrap="none" lIns="201168" rIns="146304" tIns="100584" bIns="82296">
             <a:spAutoFit/>
           </a:bodyPr>
           <a:lstStyle/>
@@ -9182,7 +9182,7 @@
                 <a:solidFill>
                   <a:srgbClr val="E4ECF5"/>
                 </a:solidFill>
-                <a:latin typeface="Consolas"/>
+                <a:latin typeface="Roboto Mono"/>
               </a:rPr>
               <a:t>vnp_Amount       2500000                 nhân 100, số nguyên. 25.000đ -&gt; 2500000</a:t>
             </a:r>
@@ -9198,7 +9198,7 @@
                 <a:solidFill>
                   <a:srgbClr val="E4ECF5"/>
                 </a:solidFill>
-                <a:latin typeface="Consolas"/>
+                <a:latin typeface="Roboto Mono"/>
               </a:rPr>
               <a:t>vnp_TxnRef       20260920125606777443    duy nhất trong 24h theo TmnCode</a:t>
             </a:r>
@@ -9214,7 +9214,7 @@
                 <a:solidFill>
                   <a:srgbClr val="E4ECF5"/>
                 </a:solidFill>
-                <a:latin typeface="Consolas"/>
+                <a:latin typeface="Roboto Mono"/>
               </a:rPr>
               <a:t>vnp_CreateDate   20260920125606          giờ GMT+7, không phải giờ máy chủ</a:t>
             </a:r>
@@ -9230,7 +9230,7 @@
                 <a:solidFill>
                   <a:srgbClr val="E4ECF5"/>
                 </a:solidFill>
-                <a:latin typeface="Consolas"/>
+                <a:latin typeface="Roboto Mono"/>
               </a:rPr>
               <a:t>vnp_ReturnUrl    https://....ngrok...    phải khớp URL đã khai</a:t>
             </a:r>
@@ -9246,7 +9246,7 @@
                 <a:solidFill>
                   <a:srgbClr val="E4ECF5"/>
                 </a:solidFill>
-                <a:latin typeface="Consolas"/>
+                <a:latin typeface="Roboto Mono"/>
               </a:rPr>
               <a:t>vnp_BankCode     NCB                     bỏ trống thì VNPAY hiện trang chọn</a:t>
             </a:r>
@@ -9261,7 +9261,7 @@
         </p:nvSpPr>
         <p:spPr>
           <a:xfrm>
-            <a:off x="566928" y="3174237"/>
+            <a:off x="566928" y="2888233"/>
             <a:ext cx="11057839" cy="219456"/>
           </a:xfrm>
           <a:prstGeom prst="rect">
@@ -9285,7 +9285,7 @@
                 <a:solidFill>
                   <a:srgbClr val="6B7788"/>
                 </a:solidFill>
-                <a:latin typeface="Consolas"/>
+                <a:latin typeface="Roboto Mono"/>
               </a:rPr>
               <a:t>ShopStart.java</a:t>
             </a:r>
@@ -9300,8 +9300,8 @@
         </p:nvSpPr>
         <p:spPr>
           <a:xfrm>
-            <a:off x="566928" y="3430269"/>
-            <a:ext cx="11057839" cy="1897380"/>
+            <a:off x="566928" y="3144265"/>
+            <a:ext cx="11057839" cy="1565148"/>
           </a:xfrm>
           <a:prstGeom prst="rect">
             <a:avLst/>
@@ -9316,7 +9316,7 @@
           </a:ln>
         </p:spPr>
         <p:txBody>
-          <a:bodyPr wrap="none" lIns="201168" rIns="146304" tIns="128016" bIns="128016">
+          <a:bodyPr wrap="none" lIns="201168" rIns="146304" tIns="100584" bIns="82296">
             <a:spAutoFit/>
           </a:bodyPr>
           <a:lstStyle/>
@@ -9331,7 +9331,7 @@
                 <a:solidFill>
                   <a:srgbClr val="E4ECF5"/>
                 </a:solidFill>
-                <a:latin typeface="Consolas"/>
+                <a:latin typeface="Roboto Mono"/>
               </a:rPr>
               <a:t>p.put("vnp_Amount", String.valueOf(amount * 100));</a:t>
             </a:r>
@@ -9347,7 +9347,7 @@
                 <a:solidFill>
                   <a:srgbClr val="E4ECF5"/>
                 </a:solidFill>
-                <a:latin typeface="Consolas"/>
+                <a:latin typeface="Roboto Mono"/>
               </a:rPr>
               <a:t>p.put("vnp_CreateDate", now.format(VNP_TIME));</a:t>
             </a:r>
@@ -9363,7 +9363,7 @@
                 <a:solidFill>
                   <a:srgbClr val="E4ECF5"/>
                 </a:solidFill>
-                <a:latin typeface="Consolas"/>
+                <a:latin typeface="Roboto Mono"/>
               </a:rPr>
               <a:t>p.put("vnp_ExpireDate", now.plusMinutes(15).format(VNP_TIME));</a:t>
             </a:r>
@@ -9386,7 +9386,7 @@
                 <a:solidFill>
                   <a:srgbClr val="E4ECF5"/>
                 </a:solidFill>
-                <a:latin typeface="Consolas"/>
+                <a:latin typeface="Roboto Mono"/>
               </a:rPr>
               <a:t>String query = buildQueryString(p);</a:t>
             </a:r>
@@ -9402,7 +9402,7 @@
                 <a:solidFill>
                   <a:srgbClr val="E4ECF5"/>
                 </a:solidFill>
-                <a:latin typeface="Consolas"/>
+                <a:latin typeface="Roboto Mono"/>
               </a:rPr>
               <a:t>String url = PAY_URL + "?" + query + "&amp;vnp_SecureHash=" + hmacSHA512(HASH_SECRET, query);</a:t>
             </a:r>
@@ -9417,8 +9417,8 @@
         </p:nvSpPr>
         <p:spPr>
           <a:xfrm>
-            <a:off x="566928" y="5446521"/>
-            <a:ext cx="11057839" cy="1100709"/>
+            <a:off x="566928" y="4828285"/>
+            <a:ext cx="11057839" cy="980694"/>
           </a:xfrm>
           <a:prstGeom prst="rect">
             <a:avLst/>
@@ -9448,7 +9448,7 @@
                 <a:solidFill>
                   <a:srgbClr val="C42B22"/>
                 </a:solidFill>
-                <a:latin typeface="Calibri"/>
+                <a:latin typeface="Arial"/>
               </a:rPr>
               <a:t>Cái bẫy nằm ngay trong code mẫu của chính VNPAY</a:t>
             </a:r>
@@ -9464,7 +9464,7 @@
                 <a:solidFill>
                   <a:srgbClr val="16181D"/>
                 </a:solidFill>
-                <a:latin typeface="Calibri"/>
+                <a:latin typeface="Arial"/>
               </a:rPr>
               <a:t>Họ dùng Etc/GMT+7, mà theo POSIX nó là UTC trừ 7, lệch 14 tiếng.</a:t>
             </a:r>
@@ -9480,7 +9480,7 @@
                 <a:solidFill>
                   <a:srgbClr val="16181D"/>
                 </a:solidFill>
-                <a:latin typeface="Calibri"/>
+                <a:latin typeface="Arial"/>
               </a:rPr>
               <a:t>Giao dịch hết hạn ngay lúc vừa tạo. Mình dùng ZoneId.of("Asia/Ho_Chi_Minh").</a:t>
             </a:r>

--- a/VNPAY-seminar.pptx
+++ b/VNPAY-seminar.pptx
@@ -123,6 +123,1806 @@
     </a:lvl9pPr>
   </p:defaultTextStyle>
 </p:presentation>
+</file>
+
+<file path=ppt/notesMasters/notesMaster1.xml><?xml version="1.0" encoding="utf-8"?>
+<p:notesMaster xmlns:a="http://schemas.openxmlformats.org/drawingml/2006/main" xmlns:p="http://schemas.openxmlformats.org/presentationml/2006/main" xmlns:r="http://schemas.openxmlformats.org/officeDocument/2006/relationships">
+  <p:cSld>
+    <p:bg>
+      <p:bgRef idx="1001">
+        <a:schemeClr val="bg1"/>
+      </p:bgRef>
+    </p:bg>
+    <p:spTree>
+      <p:nvGrpSpPr>
+        <p:cNvPr id="1" name=""/>
+        <p:cNvGrpSpPr/>
+        <p:nvPr/>
+      </p:nvGrpSpPr>
+      <p:grpSpPr>
+        <a:xfrm>
+          <a:off x="0" y="0"/>
+          <a:ext cx="0" cy="0"/>
+          <a:chOff x="0" y="0"/>
+          <a:chExt cx="0" cy="0"/>
+        </a:xfrm>
+      </p:grpSpPr>
+      <p:sp>
+        <p:nvSpPr>
+          <p:cNvPr id="2" name="Header Placeholder 1"/>
+          <p:cNvSpPr>
+            <a:spLocks noGrp="1"/>
+          </p:cNvSpPr>
+          <p:nvPr>
+            <p:ph type="hdr" sz="quarter"/>
+          </p:nvPr>
+        </p:nvSpPr>
+        <p:spPr>
+          <a:xfrm>
+            <a:off x="0" y="0"/>
+            <a:ext cx="2971800" cy="457200"/>
+          </a:xfrm>
+          <a:prstGeom prst="rect">
+            <a:avLst/>
+          </a:prstGeom>
+        </p:spPr>
+        <p:txBody>
+          <a:bodyPr vert="horz" lIns="91440" tIns="45720" rIns="91440" bIns="45720" rtlCol="0"/>
+          <a:lstStyle>
+            <a:lvl1pPr algn="l">
+              <a:defRPr sz="1200"/>
+            </a:lvl1pPr>
+          </a:lstStyle>
+          <a:p>
+            <a:endParaRPr lang="en-US"/>
+          </a:p>
+        </p:txBody>
+      </p:sp>
+      <p:sp>
+        <p:nvSpPr>
+          <p:cNvPr id="3" name="Date Placeholder 2"/>
+          <p:cNvSpPr>
+            <a:spLocks noGrp="1"/>
+          </p:cNvSpPr>
+          <p:nvPr>
+            <p:ph type="dt" idx="1"/>
+          </p:nvPr>
+        </p:nvSpPr>
+        <p:spPr>
+          <a:xfrm>
+            <a:off x="3884613" y="0"/>
+            <a:ext cx="2971800" cy="457200"/>
+          </a:xfrm>
+          <a:prstGeom prst="rect">
+            <a:avLst/>
+          </a:prstGeom>
+        </p:spPr>
+        <p:txBody>
+          <a:bodyPr vert="horz" lIns="91440" tIns="45720" rIns="91440" bIns="45720" rtlCol="0"/>
+          <a:lstStyle>
+            <a:lvl1pPr algn="r">
+              <a:defRPr sz="1200"/>
+            </a:lvl1pPr>
+          </a:lstStyle>
+          <a:p>
+            <a:fld id="{0F89C1C7-3DCD-1040-A9CF-14679D8B5DDD}" type="datetimeFigureOut">
+              <a:rPr lang="en-US" smtClean="0"/>
+              <a:t>10/17/16</a:t>
+            </a:fld>
+            <a:endParaRPr lang="en-US"/>
+          </a:p>
+        </p:txBody>
+      </p:sp>
+      <p:sp>
+        <p:nvSpPr>
+          <p:cNvPr id="4" name="Slide Image Placeholder 3"/>
+          <p:cNvSpPr>
+            <a:spLocks noGrp="1" noRot="1" noChangeAspect="1"/>
+          </p:cNvSpPr>
+          <p:nvPr>
+            <p:ph type="sldImg" idx="2"/>
+          </p:nvPr>
+        </p:nvSpPr>
+        <p:spPr>
+          <a:xfrm>
+            <a:off x="1143000" y="685800"/>
+            <a:ext cx="4572000" cy="3429000"/>
+          </a:xfrm>
+          <a:prstGeom prst="rect">
+            <a:avLst/>
+          </a:prstGeom>
+          <a:noFill/>
+          <a:ln w="12700">
+            <a:solidFill>
+              <a:prstClr val="black"/>
+            </a:solidFill>
+          </a:ln>
+        </p:spPr>
+        <p:txBody>
+          <a:bodyPr vert="horz" lIns="91440" tIns="45720" rIns="91440" bIns="45720" rtlCol="0" anchor="ctr"/>
+          <a:lstStyle/>
+          <a:p>
+            <a:endParaRPr lang="en-US"/>
+          </a:p>
+        </p:txBody>
+      </p:sp>
+      <p:sp>
+        <p:nvSpPr>
+          <p:cNvPr id="5" name="Notes Placeholder 4"/>
+          <p:cNvSpPr>
+            <a:spLocks noGrp="1"/>
+          </p:cNvSpPr>
+          <p:nvPr>
+            <p:ph type="body" sz="quarter" idx="3"/>
+          </p:nvPr>
+        </p:nvSpPr>
+        <p:spPr>
+          <a:xfrm>
+            <a:off x="685800" y="4343400"/>
+            <a:ext cx="5486400" cy="4114800"/>
+          </a:xfrm>
+          <a:prstGeom prst="rect">
+            <a:avLst/>
+          </a:prstGeom>
+        </p:spPr>
+        <p:txBody>
+          <a:bodyPr vert="horz" lIns="91440" tIns="45720" rIns="91440" bIns="45720" rtlCol="0"/>
+          <a:lstStyle/>
+          <a:p>
+            <a:pPr lvl="0"/>
+            <a:r>
+              <a:rPr lang="en-US" smtClean="0"/>
+              <a:t>Click to edit Master text styles</a:t>
+            </a:r>
+          </a:p>
+          <a:p>
+            <a:pPr lvl="1"/>
+            <a:r>
+              <a:rPr lang="en-US" smtClean="0"/>
+              <a:t>Second level</a:t>
+            </a:r>
+          </a:p>
+          <a:p>
+            <a:pPr lvl="2"/>
+            <a:r>
+              <a:rPr lang="en-US" smtClean="0"/>
+              <a:t>Third level</a:t>
+            </a:r>
+          </a:p>
+          <a:p>
+            <a:pPr lvl="3"/>
+            <a:r>
+              <a:rPr lang="en-US" smtClean="0"/>
+              <a:t>Fourth level</a:t>
+            </a:r>
+          </a:p>
+          <a:p>
+            <a:pPr lvl="4"/>
+            <a:r>
+              <a:rPr lang="en-US" smtClean="0"/>
+              <a:t>Fifth level</a:t>
+            </a:r>
+            <a:endParaRPr lang="en-US"/>
+          </a:p>
+        </p:txBody>
+      </p:sp>
+      <p:sp>
+        <p:nvSpPr>
+          <p:cNvPr id="6" name="Footer Placeholder 5"/>
+          <p:cNvSpPr>
+            <a:spLocks noGrp="1"/>
+          </p:cNvSpPr>
+          <p:nvPr>
+            <p:ph type="ftr" sz="quarter" idx="4"/>
+          </p:nvPr>
+        </p:nvSpPr>
+        <p:spPr>
+          <a:xfrm>
+            <a:off x="0" y="8685213"/>
+            <a:ext cx="2971800" cy="457200"/>
+          </a:xfrm>
+          <a:prstGeom prst="rect">
+            <a:avLst/>
+          </a:prstGeom>
+        </p:spPr>
+        <p:txBody>
+          <a:bodyPr vert="horz" lIns="91440" tIns="45720" rIns="91440" bIns="45720" rtlCol="0" anchor="b"/>
+          <a:lstStyle>
+            <a:lvl1pPr algn="l">
+              <a:defRPr sz="1200"/>
+            </a:lvl1pPr>
+          </a:lstStyle>
+          <a:p>
+            <a:endParaRPr lang="en-US"/>
+          </a:p>
+        </p:txBody>
+      </p:sp>
+      <p:sp>
+        <p:nvSpPr>
+          <p:cNvPr id="7" name="Slide Number Placeholder 6"/>
+          <p:cNvSpPr>
+            <a:spLocks noGrp="1"/>
+          </p:cNvSpPr>
+          <p:nvPr>
+            <p:ph type="sldNum" sz="quarter" idx="5"/>
+          </p:nvPr>
+        </p:nvSpPr>
+        <p:spPr>
+          <a:xfrm>
+            <a:off x="3884613" y="8685213"/>
+            <a:ext cx="2971800" cy="457200"/>
+          </a:xfrm>
+          <a:prstGeom prst="rect">
+            <a:avLst/>
+          </a:prstGeom>
+        </p:spPr>
+        <p:txBody>
+          <a:bodyPr vert="horz" lIns="91440" tIns="45720" rIns="91440" bIns="45720" rtlCol="0" anchor="b"/>
+          <a:lstStyle>
+            <a:lvl1pPr algn="r">
+              <a:defRPr sz="1200"/>
+            </a:lvl1pPr>
+          </a:lstStyle>
+          <a:p>
+            <a:fld id="{BB5E49A5-4136-284D-997B-48E1D791AD67}" type="slidenum">
+              <a:rPr lang="en-US" smtClean="0"/>
+              <a:t>‹#›</a:t>
+            </a:fld>
+            <a:endParaRPr lang="en-US"/>
+          </a:p>
+        </p:txBody>
+      </p:sp>
+    </p:spTree>
+    <p:extLst>
+      <p:ext uri="{BB962C8B-B14F-4D97-AF65-F5344CB8AC3E}">
+        <p14:creationId xmlns:p14="http://schemas.microsoft.com/office/powerpoint/2010/main" val="2623252185"/>
+      </p:ext>
+    </p:extLst>
+  </p:cSld>
+  <p:clrMap bg1="lt1" tx1="dk1" bg2="lt2" tx2="dk2" accent1="accent1" accent2="accent2" accent3="accent3" accent4="accent4" accent5="accent5" accent6="accent6" hlink="hlink" folHlink="folHlink"/>
+  <p:notesStyle>
+    <a:lvl1pPr marL="0" algn="l" defTabSz="457200" rtl="0" eaLnBrk="1" latinLnBrk="0" hangingPunct="1">
+      <a:defRPr sz="1200" kern="1200">
+        <a:solidFill>
+          <a:schemeClr val="tx1"/>
+        </a:solidFill>
+        <a:latin typeface="+mn-lt"/>
+        <a:ea typeface="+mn-ea"/>
+        <a:cs typeface="+mn-cs"/>
+      </a:defRPr>
+    </a:lvl1pPr>
+    <a:lvl2pPr marL="457200" algn="l" defTabSz="457200" rtl="0" eaLnBrk="1" latinLnBrk="0" hangingPunct="1">
+      <a:defRPr sz="1200" kern="1200">
+        <a:solidFill>
+          <a:schemeClr val="tx1"/>
+        </a:solidFill>
+        <a:latin typeface="+mn-lt"/>
+        <a:ea typeface="+mn-ea"/>
+        <a:cs typeface="+mn-cs"/>
+      </a:defRPr>
+    </a:lvl2pPr>
+    <a:lvl3pPr marL="914400" algn="l" defTabSz="457200" rtl="0" eaLnBrk="1" latinLnBrk="0" hangingPunct="1">
+      <a:defRPr sz="1200" kern="1200">
+        <a:solidFill>
+          <a:schemeClr val="tx1"/>
+        </a:solidFill>
+        <a:latin typeface="+mn-lt"/>
+        <a:ea typeface="+mn-ea"/>
+        <a:cs typeface="+mn-cs"/>
+      </a:defRPr>
+    </a:lvl3pPr>
+    <a:lvl4pPr marL="1371600" algn="l" defTabSz="457200" rtl="0" eaLnBrk="1" latinLnBrk="0" hangingPunct="1">
+      <a:defRPr sz="1200" kern="1200">
+        <a:solidFill>
+          <a:schemeClr val="tx1"/>
+        </a:solidFill>
+        <a:latin typeface="+mn-lt"/>
+        <a:ea typeface="+mn-ea"/>
+        <a:cs typeface="+mn-cs"/>
+      </a:defRPr>
+    </a:lvl4pPr>
+    <a:lvl5pPr marL="1828800" algn="l" defTabSz="457200" rtl="0" eaLnBrk="1" latinLnBrk="0" hangingPunct="1">
+      <a:defRPr sz="1200" kern="1200">
+        <a:solidFill>
+          <a:schemeClr val="tx1"/>
+        </a:solidFill>
+        <a:latin typeface="+mn-lt"/>
+        <a:ea typeface="+mn-ea"/>
+        <a:cs typeface="+mn-cs"/>
+      </a:defRPr>
+    </a:lvl5pPr>
+    <a:lvl6pPr marL="2286000" algn="l" defTabSz="457200" rtl="0" eaLnBrk="1" latinLnBrk="0" hangingPunct="1">
+      <a:defRPr sz="1200" kern="1200">
+        <a:solidFill>
+          <a:schemeClr val="tx1"/>
+        </a:solidFill>
+        <a:latin typeface="+mn-lt"/>
+        <a:ea typeface="+mn-ea"/>
+        <a:cs typeface="+mn-cs"/>
+      </a:defRPr>
+    </a:lvl6pPr>
+    <a:lvl7pPr marL="2743200" algn="l" defTabSz="457200" rtl="0" eaLnBrk="1" latinLnBrk="0" hangingPunct="1">
+      <a:defRPr sz="1200" kern="1200">
+        <a:solidFill>
+          <a:schemeClr val="tx1"/>
+        </a:solidFill>
+        <a:latin typeface="+mn-lt"/>
+        <a:ea typeface="+mn-ea"/>
+        <a:cs typeface="+mn-cs"/>
+      </a:defRPr>
+    </a:lvl7pPr>
+    <a:lvl8pPr marL="3200400" algn="l" defTabSz="457200" rtl="0" eaLnBrk="1" latinLnBrk="0" hangingPunct="1">
+      <a:defRPr sz="1200" kern="1200">
+        <a:solidFill>
+          <a:schemeClr val="tx1"/>
+        </a:solidFill>
+        <a:latin typeface="+mn-lt"/>
+        <a:ea typeface="+mn-ea"/>
+        <a:cs typeface="+mn-cs"/>
+      </a:defRPr>
+    </a:lvl8pPr>
+    <a:lvl9pPr marL="3657600" algn="l" defTabSz="457200" rtl="0" eaLnBrk="1" latinLnBrk="0" hangingPunct="1">
+      <a:defRPr sz="1200" kern="1200">
+        <a:solidFill>
+          <a:schemeClr val="tx1"/>
+        </a:solidFill>
+        <a:latin typeface="+mn-lt"/>
+        <a:ea typeface="+mn-ea"/>
+        <a:cs typeface="+mn-cs"/>
+      </a:defRPr>
+    </a:lvl9pPr>
+  </p:notesStyle>
+</p:notesMaster>
+</file>
+
+<file path=ppt/notesSlides/notesSlide1.xml><?xml version="1.0" encoding="utf-8"?>
+<p:notes xmlns:a="http://schemas.openxmlformats.org/drawingml/2006/main" xmlns:p="http://schemas.openxmlformats.org/presentationml/2006/main" xmlns:r="http://schemas.openxmlformats.org/officeDocument/2006/relationships">
+  <p:cSld>
+    <p:spTree>
+      <p:nvGrpSpPr>
+        <p:cNvPr id="1" name=""/>
+        <p:cNvGrpSpPr/>
+        <p:nvPr/>
+      </p:nvGrpSpPr>
+      <p:grpSpPr>
+        <a:xfrm>
+          <a:off x="0" y="0"/>
+          <a:ext cx="0" cy="0"/>
+          <a:chOff x="0" y="0"/>
+          <a:chExt cx="0" cy="0"/>
+        </a:xfrm>
+      </p:grpSpPr>
+      <p:sp>
+        <p:nvSpPr>
+          <p:cNvPr id="2" name="Slide Image Placeholder 1"/>
+          <p:cNvSpPr>
+            <a:spLocks noGrp="1"/>
+          </p:cNvSpPr>
+          <p:nvPr>
+            <p:ph type="sldImg" idx="2"/>
+          </p:nvPr>
+        </p:nvSpPr>
+        <p:spPr/>
+      </p:sp>
+      <p:sp>
+        <p:nvSpPr>
+          <p:cNvPr id="3" name="Notes Placeholder 2"/>
+          <p:cNvSpPr>
+            <a:spLocks noGrp="1"/>
+          </p:cNvSpPr>
+          <p:nvPr>
+            <p:ph type="body" idx="3" sz="quarter"/>
+          </p:nvPr>
+        </p:nvSpPr>
+        <p:spPr/>
+        <p:txBody>
+          <a:bodyPr/>
+          <a:lstStyle/>
+          <a:p>
+            <a:r>
+              <a:t>Hỏi xem ai đã tải file và chạy thử chưa. Ai chưa có thì lấy trong thư mục Drive.</a:t>
+            </a:r>
+          </a:p>
+          <a:p>
+            <a:r>
+              <a:t>Nhắc: cần JDK 17 trở lên, không cần Maven.</a:t>
+            </a:r>
+          </a:p>
+        </p:txBody>
+      </p:sp>
+      <p:sp>
+        <p:nvSpPr>
+          <p:cNvPr id="4" name="Slide Number Placeholder 3"/>
+          <p:cNvSpPr>
+            <a:spLocks noGrp="1"/>
+          </p:cNvSpPr>
+          <p:nvPr>
+            <p:ph type="sldNum" idx="5" sz="quarter"/>
+          </p:nvPr>
+        </p:nvSpPr>
+        <p:spPr/>
+      </p:sp>
+    </p:spTree>
+  </p:cSld>
+  <p:clrMapOvr>
+    <a:masterClrMapping/>
+  </p:clrMapOvr>
+</p:notes>
+</file>
+
+<file path=ppt/notesSlides/notesSlide10.xml><?xml version="1.0" encoding="utf-8"?>
+<p:notes xmlns:a="http://schemas.openxmlformats.org/drawingml/2006/main" xmlns:p="http://schemas.openxmlformats.org/presentationml/2006/main" xmlns:r="http://schemas.openxmlformats.org/officeDocument/2006/relationships">
+  <p:cSld>
+    <p:spTree>
+      <p:nvGrpSpPr>
+        <p:cNvPr id="1" name=""/>
+        <p:cNvGrpSpPr/>
+        <p:nvPr/>
+      </p:nvGrpSpPr>
+      <p:grpSpPr>
+        <a:xfrm>
+          <a:off x="0" y="0"/>
+          <a:ext cx="0" cy="0"/>
+          <a:chOff x="0" y="0"/>
+          <a:chExt cx="0" cy="0"/>
+        </a:xfrm>
+      </p:grpSpPr>
+      <p:sp>
+        <p:nvSpPr>
+          <p:cNvPr id="2" name="Slide Image Placeholder 1"/>
+          <p:cNvSpPr>
+            <a:spLocks noGrp="1"/>
+          </p:cNvSpPr>
+          <p:nvPr>
+            <p:ph type="sldImg" idx="2"/>
+          </p:nvPr>
+        </p:nvSpPr>
+        <p:spPr/>
+      </p:sp>
+      <p:sp>
+        <p:nvSpPr>
+          <p:cNvPr id="3" name="Notes Placeholder 2"/>
+          <p:cNvSpPr>
+            <a:spLocks noGrp="1"/>
+          </p:cNvSpPr>
+          <p:nvPr>
+            <p:ph type="body" idx="3" sz="quarter"/>
+          </p:nvPr>
+        </p:nvSpPr>
+        <p:spPr/>
+        <p:txBody>
+          <a:bodyPr/>
+          <a:lstStyle/>
+          <a:p>
+            <a:r>
+              <a:t>Cho lớp 3 phút tự chạy. Đi quanh lớp xem ai kẹt.</a:t>
+            </a:r>
+          </a:p>
+          <a:p>
+            <a:r>
+              <a:t>Quá nửa lớp không sang được trang VNPAY thì gửi luôn bản làm xong vào group rồi đi tiếp.</a:t>
+            </a:r>
+          </a:p>
+        </p:txBody>
+      </p:sp>
+      <p:sp>
+        <p:nvSpPr>
+          <p:cNvPr id="4" name="Slide Number Placeholder 3"/>
+          <p:cNvSpPr>
+            <a:spLocks noGrp="1"/>
+          </p:cNvSpPr>
+          <p:nvPr>
+            <p:ph type="sldNum" idx="5" sz="quarter"/>
+          </p:nvPr>
+        </p:nvSpPr>
+        <p:spPr/>
+      </p:sp>
+    </p:spTree>
+  </p:cSld>
+  <p:clrMapOvr>
+    <a:masterClrMapping/>
+  </p:clrMapOvr>
+</p:notes>
+</file>
+
+<file path=ppt/notesSlides/notesSlide11.xml><?xml version="1.0" encoding="utf-8"?>
+<p:notes xmlns:a="http://schemas.openxmlformats.org/drawingml/2006/main" xmlns:p="http://schemas.openxmlformats.org/presentationml/2006/main" xmlns:r="http://schemas.openxmlformats.org/officeDocument/2006/relationships">
+  <p:cSld>
+    <p:spTree>
+      <p:nvGrpSpPr>
+        <p:cNvPr id="1" name=""/>
+        <p:cNvGrpSpPr/>
+        <p:nvPr/>
+      </p:nvGrpSpPr>
+      <p:grpSpPr>
+        <a:xfrm>
+          <a:off x="0" y="0"/>
+          <a:ext cx="0" cy="0"/>
+          <a:chOff x="0" y="0"/>
+          <a:chExt cx="0" cy="0"/>
+        </a:xfrm>
+      </p:grpSpPr>
+      <p:sp>
+        <p:nvSpPr>
+          <p:cNvPr id="2" name="Slide Image Placeholder 1"/>
+          <p:cNvSpPr>
+            <a:spLocks noGrp="1"/>
+          </p:cNvSpPr>
+          <p:nvPr>
+            <p:ph type="sldImg" idx="2"/>
+          </p:nvPr>
+        </p:nvSpPr>
+        <p:spPr/>
+      </p:sp>
+      <p:sp>
+        <p:nvSpPr>
+          <p:cNvPr id="3" name="Notes Placeholder 2"/>
+          <p:cNvSpPr>
+            <a:spLocks noGrp="1"/>
+          </p:cNvSpPr>
+          <p:nvPr>
+            <p:ph type="body" idx="3" sz="quarter"/>
+          </p:nvPr>
+        </p:nvSpPr>
+        <p:spPr/>
+        <p:txBody>
+          <a:bodyPr/>
+          <a:lstStyle/>
+          <a:p>
+            <a:r>
+              <a:t>Bảo cả lớp mở ngrok ngay lúc này, vì địa chỉ đổi mỗi lần chạy lại.</a:t>
+            </a:r>
+          </a:p>
+          <a:p>
+            <a:r>
+              <a:t>Ai chưa gắn authtoken thì giờ mới lòi ra, xử lý luôn.</a:t>
+            </a:r>
+          </a:p>
+        </p:txBody>
+      </p:sp>
+      <p:sp>
+        <p:nvSpPr>
+          <p:cNvPr id="4" name="Slide Number Placeholder 3"/>
+          <p:cNvSpPr>
+            <a:spLocks noGrp="1"/>
+          </p:cNvSpPr>
+          <p:nvPr>
+            <p:ph type="sldNum" idx="5" sz="quarter"/>
+          </p:nvPr>
+        </p:nvSpPr>
+        <p:spPr/>
+      </p:sp>
+    </p:spTree>
+  </p:cSld>
+  <p:clrMapOvr>
+    <a:masterClrMapping/>
+  </p:clrMapOvr>
+</p:notes>
+</file>
+
+<file path=ppt/notesSlides/notesSlide12.xml><?xml version="1.0" encoding="utf-8"?>
+<p:notes xmlns:a="http://schemas.openxmlformats.org/drawingml/2006/main" xmlns:p="http://schemas.openxmlformats.org/presentationml/2006/main" xmlns:r="http://schemas.openxmlformats.org/officeDocument/2006/relationships">
+  <p:cSld>
+    <p:spTree>
+      <p:nvGrpSpPr>
+        <p:cNvPr id="1" name=""/>
+        <p:cNvGrpSpPr/>
+        <p:nvPr/>
+      </p:nvGrpSpPr>
+      <p:grpSpPr>
+        <a:xfrm>
+          <a:off x="0" y="0"/>
+          <a:ext cx="0" cy="0"/>
+          <a:chOff x="0" y="0"/>
+          <a:chExt cx="0" cy="0"/>
+        </a:xfrm>
+      </p:grpSpPr>
+      <p:sp>
+        <p:nvSpPr>
+          <p:cNvPr id="2" name="Slide Image Placeholder 1"/>
+          <p:cNvSpPr>
+            <a:spLocks noGrp="1"/>
+          </p:cNvSpPr>
+          <p:nvPr>
+            <p:ph type="sldImg" idx="2"/>
+          </p:nvPr>
+        </p:nvSpPr>
+        <p:spPr/>
+      </p:sp>
+      <p:sp>
+        <p:nvSpPr>
+          <p:cNvPr id="3" name="Notes Placeholder 2"/>
+          <p:cNvSpPr>
+            <a:spLocks noGrp="1"/>
+          </p:cNvSpPr>
+          <p:nvPr>
+            <p:ph type="body" idx="3" sz="quarter"/>
+          </p:nvPr>
+        </p:nvSpPr>
+        <p:spPr/>
+        <p:txBody>
+          <a:bodyPr/>
+          <a:lstStyle/>
+          <a:p>
+            <a:r>
+              <a:t>Nhấn hai chữ idempotent. Hỏi lớp: nếu VNPAY gọi lại lần hai mà mình cộng tiền tiếp thì sao?</a:t>
+            </a:r>
+          </a:p>
+          <a:p>
+            <a:r>
+              <a:t>Mã trả về nên đọc to từng cái: 97, 01, 04, 02, 00.</a:t>
+            </a:r>
+          </a:p>
+        </p:txBody>
+      </p:sp>
+      <p:sp>
+        <p:nvSpPr>
+          <p:cNvPr id="4" name="Slide Number Placeholder 3"/>
+          <p:cNvSpPr>
+            <a:spLocks noGrp="1"/>
+          </p:cNvSpPr>
+          <p:nvPr>
+            <p:ph type="sldNum" idx="5" sz="quarter"/>
+          </p:nvPr>
+        </p:nvSpPr>
+        <p:spPr/>
+      </p:sp>
+    </p:spTree>
+  </p:cSld>
+  <p:clrMapOvr>
+    <a:masterClrMapping/>
+  </p:clrMapOvr>
+</p:notes>
+</file>
+
+<file path=ppt/notesSlides/notesSlide13.xml><?xml version="1.0" encoding="utf-8"?>
+<p:notes xmlns:a="http://schemas.openxmlformats.org/drawingml/2006/main" xmlns:p="http://schemas.openxmlformats.org/presentationml/2006/main" xmlns:r="http://schemas.openxmlformats.org/officeDocument/2006/relationships">
+  <p:cSld>
+    <p:spTree>
+      <p:nvGrpSpPr>
+        <p:cNvPr id="1" name=""/>
+        <p:cNvGrpSpPr/>
+        <p:nvPr/>
+      </p:nvGrpSpPr>
+      <p:grpSpPr>
+        <a:xfrm>
+          <a:off x="0" y="0"/>
+          <a:ext cx="0" cy="0"/>
+          <a:chOff x="0" y="0"/>
+          <a:chExt cx="0" cy="0"/>
+        </a:xfrm>
+      </p:grpSpPr>
+      <p:sp>
+        <p:nvSpPr>
+          <p:cNvPr id="2" name="Slide Image Placeholder 1"/>
+          <p:cNvSpPr>
+            <a:spLocks noGrp="1"/>
+          </p:cNvSpPr>
+          <p:nvPr>
+            <p:ph type="sldImg" idx="2"/>
+          </p:nvPr>
+        </p:nvSpPr>
+        <p:spPr/>
+      </p:sp>
+      <p:sp>
+        <p:nvSpPr>
+          <p:cNvPr id="3" name="Notes Placeholder 2"/>
+          <p:cNvSpPr>
+            <a:spLocks noGrp="1"/>
+          </p:cNvSpPr>
+          <p:nvPr>
+            <p:ph type="body" idx="3" sz="quarter"/>
+          </p:nvPr>
+        </p:nvSpPr>
+        <p:spPr/>
+        <p:txBody>
+          <a:bodyPr/>
+          <a:lstStyle/>
+          <a:p>
+            <a:r>
+              <a:t>Chỉ vào chỗ không có dòng nào đổi trạng thái đơn. Đó mới là ý chính của slide.</a:t>
+            </a:r>
+          </a:p>
+        </p:txBody>
+      </p:sp>
+      <p:sp>
+        <p:nvSpPr>
+          <p:cNvPr id="4" name="Slide Number Placeholder 3"/>
+          <p:cNvSpPr>
+            <a:spLocks noGrp="1"/>
+          </p:cNvSpPr>
+          <p:nvPr>
+            <p:ph type="sldNum" idx="5" sz="quarter"/>
+          </p:nvPr>
+        </p:nvSpPr>
+        <p:spPr/>
+      </p:sp>
+    </p:spTree>
+  </p:cSld>
+  <p:clrMapOvr>
+    <a:masterClrMapping/>
+  </p:clrMapOvr>
+</p:notes>
+</file>
+
+<file path=ppt/notesSlides/notesSlide14.xml><?xml version="1.0" encoding="utf-8"?>
+<p:notes xmlns:a="http://schemas.openxmlformats.org/drawingml/2006/main" xmlns:p="http://schemas.openxmlformats.org/presentationml/2006/main" xmlns:r="http://schemas.openxmlformats.org/officeDocument/2006/relationships">
+  <p:cSld>
+    <p:spTree>
+      <p:nvGrpSpPr>
+        <p:cNvPr id="1" name=""/>
+        <p:cNvGrpSpPr/>
+        <p:nvPr/>
+      </p:nvGrpSpPr>
+      <p:grpSpPr>
+        <a:xfrm>
+          <a:off x="0" y="0"/>
+          <a:ext cx="0" cy="0"/>
+          <a:chOff x="0" y="0"/>
+          <a:chExt cx="0" cy="0"/>
+        </a:xfrm>
+      </p:grpSpPr>
+      <p:sp>
+        <p:nvSpPr>
+          <p:cNvPr id="2" name="Slide Image Placeholder 1"/>
+          <p:cNvSpPr>
+            <a:spLocks noGrp="1"/>
+          </p:cNvSpPr>
+          <p:nvPr>
+            <p:ph type="sldImg" idx="2"/>
+          </p:nvPr>
+        </p:nvSpPr>
+        <p:spPr/>
+      </p:sp>
+      <p:sp>
+        <p:nvSpPr>
+          <p:cNvPr id="3" name="Notes Placeholder 2"/>
+          <p:cNvSpPr>
+            <a:spLocks noGrp="1"/>
+          </p:cNvSpPr>
+          <p:nvPr>
+            <p:ph type="body" idx="3" sz="quarter"/>
+          </p:nvPr>
+        </p:nvSpPr>
+        <p:spPr/>
+        <p:txBody>
+          <a:bodyPr/>
+          <a:lstStyle/>
+          <a:p>
+            <a:r>
+              <a:t>Kể thật chuyện portal sandbox hỏng lúc mình dựng bài. Phần này lớp nhớ lâu nhất.</a:t>
+            </a:r>
+          </a:p>
+          <a:p>
+            <a:r>
+              <a:t>Nhắc: hash của querydr nối bằng dấu gạch đứng, không sort alphabet. Copy nhầm hàm ký là fail.</a:t>
+            </a:r>
+          </a:p>
+        </p:txBody>
+      </p:sp>
+      <p:sp>
+        <p:nvSpPr>
+          <p:cNvPr id="4" name="Slide Number Placeholder 3"/>
+          <p:cNvSpPr>
+            <a:spLocks noGrp="1"/>
+          </p:cNvSpPr>
+          <p:nvPr>
+            <p:ph type="sldNum" idx="5" sz="quarter"/>
+          </p:nvPr>
+        </p:nvSpPr>
+        <p:spPr/>
+      </p:sp>
+    </p:spTree>
+  </p:cSld>
+  <p:clrMapOvr>
+    <a:masterClrMapping/>
+  </p:clrMapOvr>
+</p:notes>
+</file>
+
+<file path=ppt/notesSlides/notesSlide15.xml><?xml version="1.0" encoding="utf-8"?>
+<p:notes xmlns:a="http://schemas.openxmlformats.org/drawingml/2006/main" xmlns:p="http://schemas.openxmlformats.org/presentationml/2006/main" xmlns:r="http://schemas.openxmlformats.org/officeDocument/2006/relationships">
+  <p:cSld>
+    <p:spTree>
+      <p:nvGrpSpPr>
+        <p:cNvPr id="1" name=""/>
+        <p:cNvGrpSpPr/>
+        <p:nvPr/>
+      </p:nvGrpSpPr>
+      <p:grpSpPr>
+        <a:xfrm>
+          <a:off x="0" y="0"/>
+          <a:ext cx="0" cy="0"/>
+          <a:chOff x="0" y="0"/>
+          <a:chExt cx="0" cy="0"/>
+        </a:xfrm>
+      </p:grpSpPr>
+      <p:sp>
+        <p:nvSpPr>
+          <p:cNvPr id="2" name="Slide Image Placeholder 1"/>
+          <p:cNvSpPr>
+            <a:spLocks noGrp="1"/>
+          </p:cNvSpPr>
+          <p:nvPr>
+            <p:ph type="sldImg" idx="2"/>
+          </p:nvPr>
+        </p:nvSpPr>
+        <p:spPr/>
+      </p:sp>
+      <p:sp>
+        <p:nvSpPr>
+          <p:cNvPr id="3" name="Notes Placeholder 2"/>
+          <p:cNvSpPr>
+            <a:spLocks noGrp="1"/>
+          </p:cNvSpPr>
+          <p:nvPr>
+            <p:ph type="body" idx="3" sz="quarter"/>
+          </p:nvPr>
+        </p:nvSpPr>
+        <p:spPr/>
+        <p:txBody>
+          <a:bodyPr/>
+          <a:lstStyle/>
+          <a:p>
+            <a:r>
+              <a:t>Mở sẵn cửa sổ terminal trước khi chiếu slide này để chỉ vào dòng log thật.</a:t>
+            </a:r>
+          </a:p>
+          <a:p>
+            <a:r>
+              <a:t>Mạng trục trặc thì chạy demo-local.sh, diễn được cả ba ca mà không cần internet.</a:t>
+            </a:r>
+          </a:p>
+        </p:txBody>
+      </p:sp>
+      <p:sp>
+        <p:nvSpPr>
+          <p:cNvPr id="4" name="Slide Number Placeholder 3"/>
+          <p:cNvSpPr>
+            <a:spLocks noGrp="1"/>
+          </p:cNvSpPr>
+          <p:nvPr>
+            <p:ph type="sldNum" idx="5" sz="quarter"/>
+          </p:nvPr>
+        </p:nvSpPr>
+        <p:spPr/>
+      </p:sp>
+    </p:spTree>
+  </p:cSld>
+  <p:clrMapOvr>
+    <a:masterClrMapping/>
+  </p:clrMapOvr>
+</p:notes>
+</file>
+
+<file path=ppt/notesSlides/notesSlide16.xml><?xml version="1.0" encoding="utf-8"?>
+<p:notes xmlns:a="http://schemas.openxmlformats.org/drawingml/2006/main" xmlns:p="http://schemas.openxmlformats.org/presentationml/2006/main" xmlns:r="http://schemas.openxmlformats.org/officeDocument/2006/relationships">
+  <p:cSld>
+    <p:spTree>
+      <p:nvGrpSpPr>
+        <p:cNvPr id="1" name=""/>
+        <p:cNvGrpSpPr/>
+        <p:nvPr/>
+      </p:nvGrpSpPr>
+      <p:grpSpPr>
+        <a:xfrm>
+          <a:off x="0" y="0"/>
+          <a:ext cx="0" cy="0"/>
+          <a:chOff x="0" y="0"/>
+          <a:chExt cx="0" cy="0"/>
+        </a:xfrm>
+      </p:grpSpPr>
+      <p:sp>
+        <p:nvSpPr>
+          <p:cNvPr id="2" name="Slide Image Placeholder 1"/>
+          <p:cNvSpPr>
+            <a:spLocks noGrp="1"/>
+          </p:cNvSpPr>
+          <p:nvPr>
+            <p:ph type="sldImg" idx="2"/>
+          </p:nvPr>
+        </p:nvSpPr>
+        <p:spPr/>
+      </p:sp>
+      <p:sp>
+        <p:nvSpPr>
+          <p:cNvPr id="3" name="Notes Placeholder 2"/>
+          <p:cNvSpPr>
+            <a:spLocks noGrp="1"/>
+          </p:cNvSpPr>
+          <p:nvPr>
+            <p:ph type="body" idx="3" sz="quarter"/>
+          </p:nvPr>
+        </p:nvSpPr>
+        <p:spPr/>
+        <p:txBody>
+          <a:bodyPr/>
+          <a:lstStyle/>
+          <a:p>
+            <a:r>
+              <a:t>Phần này nói nhanh, chủ yếu để lớp biết đường mang về đồ án.</a:t>
+            </a:r>
+          </a:p>
+        </p:txBody>
+      </p:sp>
+      <p:sp>
+        <p:nvSpPr>
+          <p:cNvPr id="4" name="Slide Number Placeholder 3"/>
+          <p:cNvSpPr>
+            <a:spLocks noGrp="1"/>
+          </p:cNvSpPr>
+          <p:nvPr>
+            <p:ph type="sldNum" idx="5" sz="quarter"/>
+          </p:nvPr>
+        </p:nvSpPr>
+        <p:spPr/>
+      </p:sp>
+    </p:spTree>
+  </p:cSld>
+  <p:clrMapOvr>
+    <a:masterClrMapping/>
+  </p:clrMapOvr>
+</p:notes>
+</file>
+
+<file path=ppt/notesSlides/notesSlide17.xml><?xml version="1.0" encoding="utf-8"?>
+<p:notes xmlns:a="http://schemas.openxmlformats.org/drawingml/2006/main" xmlns:p="http://schemas.openxmlformats.org/presentationml/2006/main" xmlns:r="http://schemas.openxmlformats.org/officeDocument/2006/relationships">
+  <p:cSld>
+    <p:spTree>
+      <p:nvGrpSpPr>
+        <p:cNvPr id="1" name=""/>
+        <p:cNvGrpSpPr/>
+        <p:nvPr/>
+      </p:nvGrpSpPr>
+      <p:grpSpPr>
+        <a:xfrm>
+          <a:off x="0" y="0"/>
+          <a:ext cx="0" cy="0"/>
+          <a:chOff x="0" y="0"/>
+          <a:chExt cx="0" cy="0"/>
+        </a:xfrm>
+      </p:grpSpPr>
+      <p:sp>
+        <p:nvSpPr>
+          <p:cNvPr id="2" name="Slide Image Placeholder 1"/>
+          <p:cNvSpPr>
+            <a:spLocks noGrp="1"/>
+          </p:cNvSpPr>
+          <p:nvPr>
+            <p:ph type="sldImg" idx="2"/>
+          </p:nvPr>
+        </p:nvSpPr>
+        <p:spPr/>
+      </p:sp>
+      <p:sp>
+        <p:nvSpPr>
+          <p:cNvPr id="3" name="Notes Placeholder 2"/>
+          <p:cNvSpPr>
+            <a:spLocks noGrp="1"/>
+          </p:cNvSpPr>
+          <p:nvPr>
+            <p:ph type="body" idx="3" sz="quarter"/>
+          </p:nvPr>
+        </p:nvSpPr>
+        <p:spPr/>
+        <p:txBody>
+          <a:bodyPr/>
+          <a:lstStyle/>
+          <a:p>
+            <a:r>
+              <a:t>Đọc lướt sáu dòng, dừng lại ở dòng so số tiền và dòng idempotent.</a:t>
+            </a:r>
+          </a:p>
+        </p:txBody>
+      </p:sp>
+      <p:sp>
+        <p:nvSpPr>
+          <p:cNvPr id="4" name="Slide Number Placeholder 3"/>
+          <p:cNvSpPr>
+            <a:spLocks noGrp="1"/>
+          </p:cNvSpPr>
+          <p:nvPr>
+            <p:ph type="sldNum" idx="5" sz="quarter"/>
+          </p:nvPr>
+        </p:nvSpPr>
+        <p:spPr/>
+      </p:sp>
+    </p:spTree>
+  </p:cSld>
+  <p:clrMapOvr>
+    <a:masterClrMapping/>
+  </p:clrMapOvr>
+</p:notes>
+</file>
+
+<file path=ppt/notesSlides/notesSlide18.xml><?xml version="1.0" encoding="utf-8"?>
+<p:notes xmlns:a="http://schemas.openxmlformats.org/drawingml/2006/main" xmlns:p="http://schemas.openxmlformats.org/presentationml/2006/main" xmlns:r="http://schemas.openxmlformats.org/officeDocument/2006/relationships">
+  <p:cSld>
+    <p:spTree>
+      <p:nvGrpSpPr>
+        <p:cNvPr id="1" name=""/>
+        <p:cNvGrpSpPr/>
+        <p:nvPr/>
+      </p:nvGrpSpPr>
+      <p:grpSpPr>
+        <a:xfrm>
+          <a:off x="0" y="0"/>
+          <a:ext cx="0" cy="0"/>
+          <a:chOff x="0" y="0"/>
+          <a:chExt cx="0" cy="0"/>
+        </a:xfrm>
+      </p:grpSpPr>
+      <p:sp>
+        <p:nvSpPr>
+          <p:cNvPr id="2" name="Slide Image Placeholder 1"/>
+          <p:cNvSpPr>
+            <a:spLocks noGrp="1"/>
+          </p:cNvSpPr>
+          <p:nvPr>
+            <p:ph type="sldImg" idx="2"/>
+          </p:nvPr>
+        </p:nvSpPr>
+        <p:spPr/>
+      </p:sp>
+      <p:sp>
+        <p:nvSpPr>
+          <p:cNvPr id="3" name="Notes Placeholder 2"/>
+          <p:cNvSpPr>
+            <a:spLocks noGrp="1"/>
+          </p:cNvSpPr>
+          <p:nvPr>
+            <p:ph type="body" idx="3" sz="quarter"/>
+          </p:nvPr>
+        </p:nvSpPr>
+        <p:spPr/>
+        <p:txBody>
+          <a:bodyPr/>
+          <a:lstStyle/>
+          <a:p>
+            <a:r>
+              <a:t>Bốn câu hay bị hỏi, chuẩn bị sẵn:</a:t>
+            </a:r>
+          </a:p>
+          <a:p/>
+          <a:p>
+            <a:r>
+              <a:t>1. IPN không về thì đơn treo mãi à?</a:t>
+            </a:r>
+          </a:p>
+          <a:p>
+            <a:r>
+              <a:t>   Không. Job quét đơn PENDING quá hạn rồi gọi querydr để chốt. Bài này đã phải dùng đường đó.</a:t>
+            </a:r>
+          </a:p>
+          <a:p/>
+          <a:p>
+            <a:r>
+              <a:t>2. Sao phải cài ngrok, không có cách nào khác?</a:t>
+            </a:r>
+          </a:p>
+          <a:p>
+            <a:r>
+              <a:t>   Cần một địa chỉ công khai để VNPAY gọi vào. Deploy lên server thật cũng được nhưng chậm hơn.</a:t>
+            </a:r>
+          </a:p>
+          <a:p/>
+          <a:p>
+            <a:r>
+              <a:t>3. Báo sai chữ ký mà không hiểu vì sao?</a:t>
+            </a:r>
+          </a:p>
+          <a:p>
+            <a:r>
+              <a:t>   In hashData ra rồi so từng ký tự. Gần như luôn là quên encode, hoặc quên bỏ vnp_SecureHash.</a:t>
+            </a:r>
+          </a:p>
+          <a:p/>
+          <a:p>
+            <a:r>
+              <a:t>4. Chưa có thẻ, chưa có mạng thì test kiểu gì?</a:t>
+            </a:r>
+          </a:p>
+          <a:p>
+            <a:r>
+              <a:t>   Phần ký và verify có unit test chạy offline hoàn toàn.</a:t>
+            </a:r>
+          </a:p>
+        </p:txBody>
+      </p:sp>
+      <p:sp>
+        <p:nvSpPr>
+          <p:cNvPr id="4" name="Slide Number Placeholder 3"/>
+          <p:cNvSpPr>
+            <a:spLocks noGrp="1"/>
+          </p:cNvSpPr>
+          <p:nvPr>
+            <p:ph type="sldNum" idx="5" sz="quarter"/>
+          </p:nvPr>
+        </p:nvSpPr>
+        <p:spPr/>
+      </p:sp>
+    </p:spTree>
+  </p:cSld>
+  <p:clrMapOvr>
+    <a:masterClrMapping/>
+  </p:clrMapOvr>
+</p:notes>
+</file>
+
+<file path=ppt/notesSlides/notesSlide19.xml><?xml version="1.0" encoding="utf-8"?>
+<p:notes xmlns:a="http://schemas.openxmlformats.org/drawingml/2006/main" xmlns:p="http://schemas.openxmlformats.org/presentationml/2006/main" xmlns:r="http://schemas.openxmlformats.org/officeDocument/2006/relationships">
+  <p:cSld>
+    <p:spTree>
+      <p:nvGrpSpPr>
+        <p:cNvPr id="1" name=""/>
+        <p:cNvGrpSpPr/>
+        <p:nvPr/>
+      </p:nvGrpSpPr>
+      <p:grpSpPr>
+        <a:xfrm>
+          <a:off x="0" y="0"/>
+          <a:ext cx="0" cy="0"/>
+          <a:chOff x="0" y="0"/>
+          <a:chExt cx="0" cy="0"/>
+        </a:xfrm>
+      </p:grpSpPr>
+      <p:sp>
+        <p:nvSpPr>
+          <p:cNvPr id="2" name="Slide Image Placeholder 1"/>
+          <p:cNvSpPr>
+            <a:spLocks noGrp="1"/>
+          </p:cNvSpPr>
+          <p:nvPr>
+            <p:ph type="sldImg" idx="2"/>
+          </p:nvPr>
+        </p:nvSpPr>
+        <p:spPr/>
+      </p:sp>
+      <p:sp>
+        <p:nvSpPr>
+          <p:cNvPr id="3" name="Notes Placeholder 2"/>
+          <p:cNvSpPr>
+            <a:spLocks noGrp="1"/>
+          </p:cNvSpPr>
+          <p:nvPr>
+            <p:ph type="body" idx="3" sz="quarter"/>
+          </p:nvPr>
+        </p:nvSpPr>
+        <p:spPr/>
+        <p:txBody>
+          <a:bodyPr/>
+          <a:lstStyle/>
+          <a:p>
+            <a:r>
+              <a:t>Nhắc lớp là bản làm xong sẽ nằm trong thư mục Drive ngay sau buổi.</a:t>
+            </a:r>
+          </a:p>
+          <a:p>
+            <a:r>
+              <a:t>Cảm ơn và kết thúc.</a:t>
+            </a:r>
+          </a:p>
+        </p:txBody>
+      </p:sp>
+      <p:sp>
+        <p:nvSpPr>
+          <p:cNvPr id="4" name="Slide Number Placeholder 3"/>
+          <p:cNvSpPr>
+            <a:spLocks noGrp="1"/>
+          </p:cNvSpPr>
+          <p:nvPr>
+            <p:ph type="sldNum" idx="5" sz="quarter"/>
+          </p:nvPr>
+        </p:nvSpPr>
+        <p:spPr/>
+      </p:sp>
+    </p:spTree>
+  </p:cSld>
+  <p:clrMapOvr>
+    <a:masterClrMapping/>
+  </p:clrMapOvr>
+</p:notes>
+</file>
+
+<file path=ppt/notesSlides/notesSlide2.xml><?xml version="1.0" encoding="utf-8"?>
+<p:notes xmlns:a="http://schemas.openxmlformats.org/drawingml/2006/main" xmlns:p="http://schemas.openxmlformats.org/presentationml/2006/main" xmlns:r="http://schemas.openxmlformats.org/officeDocument/2006/relationships">
+  <p:cSld>
+    <p:spTree>
+      <p:nvGrpSpPr>
+        <p:cNvPr id="1" name=""/>
+        <p:cNvGrpSpPr/>
+        <p:nvPr/>
+      </p:nvGrpSpPr>
+      <p:grpSpPr>
+        <a:xfrm>
+          <a:off x="0" y="0"/>
+          <a:ext cx="0" cy="0"/>
+          <a:chOff x="0" y="0"/>
+          <a:chExt cx="0" cy="0"/>
+        </a:xfrm>
+      </p:grpSpPr>
+      <p:sp>
+        <p:nvSpPr>
+          <p:cNvPr id="2" name="Slide Image Placeholder 1"/>
+          <p:cNvSpPr>
+            <a:spLocks noGrp="1"/>
+          </p:cNvSpPr>
+          <p:nvPr>
+            <p:ph type="sldImg" idx="2"/>
+          </p:nvPr>
+        </p:nvSpPr>
+        <p:spPr/>
+      </p:sp>
+      <p:sp>
+        <p:nvSpPr>
+          <p:cNvPr id="3" name="Notes Placeholder 2"/>
+          <p:cNvSpPr>
+            <a:spLocks noGrp="1"/>
+          </p:cNvSpPr>
+          <p:nvPr>
+            <p:ph type="body" idx="3" sz="quarter"/>
+          </p:nvPr>
+        </p:nvSpPr>
+        <p:spPr/>
+        <p:txBody>
+          <a:bodyPr/>
+          <a:lstStyle/>
+          <a:p>
+            <a:r>
+              <a:t>Nhấn một câu thôi: VNPAY không có SDK, chỉ là redirect cộng một chữ ký.</a:t>
+            </a:r>
+          </a:p>
+          <a:p>
+            <a:r>
+              <a:t>Nếu lớp hỏi PCI-DSS là gì thì nói ngắn: bộ chuẩn bảo mật cho ai chạm vào dữ liệu thẻ, tự lưu số thẻ là phải tuân thủ, rất tốn kém.</a:t>
+            </a:r>
+          </a:p>
+        </p:txBody>
+      </p:sp>
+      <p:sp>
+        <p:nvSpPr>
+          <p:cNvPr id="4" name="Slide Number Placeholder 3"/>
+          <p:cNvSpPr>
+            <a:spLocks noGrp="1"/>
+          </p:cNvSpPr>
+          <p:nvPr>
+            <p:ph type="sldNum" idx="5" sz="quarter"/>
+          </p:nvPr>
+        </p:nvSpPr>
+        <p:spPr/>
+      </p:sp>
+    </p:spTree>
+  </p:cSld>
+  <p:clrMapOvr>
+    <a:masterClrMapping/>
+  </p:clrMapOvr>
+</p:notes>
+</file>
+
+<file path=ppt/notesSlides/notesSlide3.xml><?xml version="1.0" encoding="utf-8"?>
+<p:notes xmlns:a="http://schemas.openxmlformats.org/drawingml/2006/main" xmlns:p="http://schemas.openxmlformats.org/presentationml/2006/main" xmlns:r="http://schemas.openxmlformats.org/officeDocument/2006/relationships">
+  <p:cSld>
+    <p:spTree>
+      <p:nvGrpSpPr>
+        <p:cNvPr id="1" name=""/>
+        <p:cNvGrpSpPr/>
+        <p:nvPr/>
+      </p:nvGrpSpPr>
+      <p:grpSpPr>
+        <a:xfrm>
+          <a:off x="0" y="0"/>
+          <a:ext cx="0" cy="0"/>
+          <a:chOff x="0" y="0"/>
+          <a:chExt cx="0" cy="0"/>
+        </a:xfrm>
+      </p:grpSpPr>
+      <p:sp>
+        <p:nvSpPr>
+          <p:cNvPr id="2" name="Slide Image Placeholder 1"/>
+          <p:cNvSpPr>
+            <a:spLocks noGrp="1"/>
+          </p:cNvSpPr>
+          <p:nvPr>
+            <p:ph type="sldImg" idx="2"/>
+          </p:nvPr>
+        </p:nvSpPr>
+        <p:spPr/>
+      </p:sp>
+      <p:sp>
+        <p:nvSpPr>
+          <p:cNvPr id="3" name="Notes Placeholder 2"/>
+          <p:cNvSpPr>
+            <a:spLocks noGrp="1"/>
+          </p:cNvSpPr>
+          <p:nvPr>
+            <p:ph type="body" idx="3" sz="quarter"/>
+          </p:nvPr>
+        </p:nvSpPr>
+        <p:spPr/>
+        <p:txBody>
+          <a:bodyPr/>
+          <a:lstStyle/>
+          <a:p>
+            <a:r>
+              <a:t>Ném câu hỏi này cho lớp trước khi sang slide sau:</a:t>
+            </a:r>
+          </a:p>
+          <a:p>
+            <a:r>
+              <a:t>  Sao không cộng tiền luôn ở ReturnURL cho nhanh?</a:t>
+            </a:r>
+          </a:p>
+          <a:p/>
+          <a:p>
+            <a:r>
+              <a:t>Câu trả lời: đó là URL trên trình duyệt của khách, sửa vnp_ResponseCode=00 là mua hàng miễn phí. Thêm nữa, khách tắt tab ngay sau khi trả tiền thì ReturnURL không bao giờ về, mình mất đơn đã thu tiền. IPN là kênh server gọi server và có retry.</a:t>
+            </a:r>
+          </a:p>
+        </p:txBody>
+      </p:sp>
+      <p:sp>
+        <p:nvSpPr>
+          <p:cNvPr id="4" name="Slide Number Placeholder 3"/>
+          <p:cNvSpPr>
+            <a:spLocks noGrp="1"/>
+          </p:cNvSpPr>
+          <p:nvPr>
+            <p:ph type="sldNum" idx="5" sz="quarter"/>
+          </p:nvPr>
+        </p:nvSpPr>
+        <p:spPr/>
+      </p:sp>
+    </p:spTree>
+  </p:cSld>
+  <p:clrMapOvr>
+    <a:masterClrMapping/>
+  </p:clrMapOvr>
+</p:notes>
+</file>
+
+<file path=ppt/notesSlides/notesSlide4.xml><?xml version="1.0" encoding="utf-8"?>
+<p:notes xmlns:a="http://schemas.openxmlformats.org/drawingml/2006/main" xmlns:p="http://schemas.openxmlformats.org/presentationml/2006/main" xmlns:r="http://schemas.openxmlformats.org/officeDocument/2006/relationships">
+  <p:cSld>
+    <p:spTree>
+      <p:nvGrpSpPr>
+        <p:cNvPr id="1" name=""/>
+        <p:cNvGrpSpPr/>
+        <p:nvPr/>
+      </p:nvGrpSpPr>
+      <p:grpSpPr>
+        <a:xfrm>
+          <a:off x="0" y="0"/>
+          <a:ext cx="0" cy="0"/>
+          <a:chOff x="0" y="0"/>
+          <a:chExt cx="0" cy="0"/>
+        </a:xfrm>
+      </p:grpSpPr>
+      <p:sp>
+        <p:nvSpPr>
+          <p:cNvPr id="2" name="Slide Image Placeholder 1"/>
+          <p:cNvSpPr>
+            <a:spLocks noGrp="1"/>
+          </p:cNvSpPr>
+          <p:nvPr>
+            <p:ph type="sldImg" idx="2"/>
+          </p:nvPr>
+        </p:nvSpPr>
+        <p:spPr/>
+      </p:sp>
+      <p:sp>
+        <p:nvSpPr>
+          <p:cNvPr id="3" name="Notes Placeholder 2"/>
+          <p:cNvSpPr>
+            <a:spLocks noGrp="1"/>
+          </p:cNvSpPr>
+          <p:nvPr>
+            <p:ph type="body" idx="3" sz="quarter"/>
+          </p:nvPr>
+        </p:nvSpPr>
+        <p:spPr/>
+        <p:txBody>
+          <a:bodyPr/>
+          <a:lstStyle/>
+          <a:p>
+            <a:r>
+              <a:t>Nói rõ nhịp: mỗi TODO vài phút, ai gõ không kịp cứ xem, cuối buổi có bản làm xong.</a:t>
+            </a:r>
+          </a:p>
+          <a:p>
+            <a:r>
+              <a:t>Bảo cả lớp mở file ra ngay bây giờ, tìm chữ TODO 1.</a:t>
+            </a:r>
+          </a:p>
+        </p:txBody>
+      </p:sp>
+      <p:sp>
+        <p:nvSpPr>
+          <p:cNvPr id="4" name="Slide Number Placeholder 3"/>
+          <p:cNvSpPr>
+            <a:spLocks noGrp="1"/>
+          </p:cNvSpPr>
+          <p:nvPr>
+            <p:ph type="sldNum" idx="5" sz="quarter"/>
+          </p:nvPr>
+        </p:nvSpPr>
+        <p:spPr/>
+      </p:sp>
+    </p:spTree>
+  </p:cSld>
+  <p:clrMapOvr>
+    <a:masterClrMapping/>
+  </p:clrMapOvr>
+</p:notes>
+</file>
+
+<file path=ppt/notesSlides/notesSlide5.xml><?xml version="1.0" encoding="utf-8"?>
+<p:notes xmlns:a="http://schemas.openxmlformats.org/drawingml/2006/main" xmlns:p="http://schemas.openxmlformats.org/presentationml/2006/main" xmlns:r="http://schemas.openxmlformats.org/officeDocument/2006/relationships">
+  <p:cSld>
+    <p:spTree>
+      <p:nvGrpSpPr>
+        <p:cNvPr id="1" name=""/>
+        <p:cNvGrpSpPr/>
+        <p:nvPr/>
+      </p:nvGrpSpPr>
+      <p:grpSpPr>
+        <a:xfrm>
+          <a:off x="0" y="0"/>
+          <a:ext cx="0" cy="0"/>
+          <a:chOff x="0" y="0"/>
+          <a:chExt cx="0" cy="0"/>
+        </a:xfrm>
+      </p:grpSpPr>
+      <p:sp>
+        <p:nvSpPr>
+          <p:cNvPr id="2" name="Slide Image Placeholder 1"/>
+          <p:cNvSpPr>
+            <a:spLocks noGrp="1"/>
+          </p:cNvSpPr>
+          <p:nvPr>
+            <p:ph type="sldImg" idx="2"/>
+          </p:nvPr>
+        </p:nvSpPr>
+        <p:spPr/>
+      </p:sp>
+      <p:sp>
+        <p:nvSpPr>
+          <p:cNvPr id="3" name="Notes Placeholder 2"/>
+          <p:cNvSpPr>
+            <a:spLocks noGrp="1"/>
+          </p:cNvSpPr>
+          <p:nvPr>
+            <p:ph type="body" idx="3" sz="quarter"/>
+          </p:nvPr>
+        </p:nvSpPr>
+        <p:spPr/>
+        <p:txBody>
+          <a:bodyPr/>
+          <a:lstStyle/>
+          <a:p>
+            <a:r>
+              <a:t>Hỏi lớp đã có TmnCode và HashSecret trong email chưa. Ai chưa có thì ngồi xem cùng bạn bên cạnh.</a:t>
+            </a:r>
+          </a:p>
+        </p:txBody>
+      </p:sp>
+      <p:sp>
+        <p:nvSpPr>
+          <p:cNvPr id="4" name="Slide Number Placeholder 3"/>
+          <p:cNvSpPr>
+            <a:spLocks noGrp="1"/>
+          </p:cNvSpPr>
+          <p:nvPr>
+            <p:ph type="sldNum" idx="5" sz="quarter"/>
+          </p:nvPr>
+        </p:nvSpPr>
+        <p:spPr/>
+      </p:sp>
+    </p:spTree>
+  </p:cSld>
+  <p:clrMapOvr>
+    <a:masterClrMapping/>
+  </p:clrMapOvr>
+</p:notes>
+</file>
+
+<file path=ppt/notesSlides/notesSlide6.xml><?xml version="1.0" encoding="utf-8"?>
+<p:notes xmlns:a="http://schemas.openxmlformats.org/drawingml/2006/main" xmlns:p="http://schemas.openxmlformats.org/presentationml/2006/main" xmlns:r="http://schemas.openxmlformats.org/officeDocument/2006/relationships">
+  <p:cSld>
+    <p:spTree>
+      <p:nvGrpSpPr>
+        <p:cNvPr id="1" name=""/>
+        <p:cNvGrpSpPr/>
+        <p:nvPr/>
+      </p:nvGrpSpPr>
+      <p:grpSpPr>
+        <a:xfrm>
+          <a:off x="0" y="0"/>
+          <a:ext cx="0" cy="0"/>
+          <a:chOff x="0" y="0"/>
+          <a:chExt cx="0" cy="0"/>
+        </a:xfrm>
+      </p:grpSpPr>
+      <p:sp>
+        <p:nvSpPr>
+          <p:cNvPr id="2" name="Slide Image Placeholder 1"/>
+          <p:cNvSpPr>
+            <a:spLocks noGrp="1"/>
+          </p:cNvSpPr>
+          <p:nvPr>
+            <p:ph type="sldImg" idx="2"/>
+          </p:nvPr>
+        </p:nvSpPr>
+        <p:spPr/>
+      </p:sp>
+      <p:sp>
+        <p:nvSpPr>
+          <p:cNvPr id="3" name="Notes Placeholder 2"/>
+          <p:cNvSpPr>
+            <a:spLocks noGrp="1"/>
+          </p:cNvSpPr>
+          <p:nvPr>
+            <p:ph type="body" idx="3" sz="quarter"/>
+          </p:nvPr>
+        </p:nvSpPr>
+        <p:spPr/>
+        <p:txBody>
+          <a:bodyPr/>
+          <a:lstStyle/>
+          <a:p>
+            <a:r>
+              <a:t>Đây là phần dừng lâu nhất. Đọc chậm ba bước rồi mới chiếu code.</a:t>
+            </a:r>
+          </a:p>
+          <a:p>
+            <a:r>
+              <a:t>Nếu ai hỏi vì sao phải hex chữ thường: vì VNPAY so chuỗi, hoa thường khác nhau.</a:t>
+            </a:r>
+          </a:p>
+        </p:txBody>
+      </p:sp>
+      <p:sp>
+        <p:nvSpPr>
+          <p:cNvPr id="4" name="Slide Number Placeholder 3"/>
+          <p:cNvSpPr>
+            <a:spLocks noGrp="1"/>
+          </p:cNvSpPr>
+          <p:nvPr>
+            <p:ph type="sldNum" idx="5" sz="quarter"/>
+          </p:nvPr>
+        </p:nvSpPr>
+        <p:spPr/>
+      </p:sp>
+    </p:spTree>
+  </p:cSld>
+  <p:clrMapOvr>
+    <a:masterClrMapping/>
+  </p:clrMapOvr>
+</p:notes>
+</file>
+
+<file path=ppt/notesSlides/notesSlide7.xml><?xml version="1.0" encoding="utf-8"?>
+<p:notes xmlns:a="http://schemas.openxmlformats.org/drawingml/2006/main" xmlns:p="http://schemas.openxmlformats.org/presentationml/2006/main" xmlns:r="http://schemas.openxmlformats.org/officeDocument/2006/relationships">
+  <p:cSld>
+    <p:spTree>
+      <p:nvGrpSpPr>
+        <p:cNvPr id="1" name=""/>
+        <p:cNvGrpSpPr/>
+        <p:nvPr/>
+      </p:nvGrpSpPr>
+      <p:grpSpPr>
+        <a:xfrm>
+          <a:off x="0" y="0"/>
+          <a:ext cx="0" cy="0"/>
+          <a:chOff x="0" y="0"/>
+          <a:chExt cx="0" cy="0"/>
+        </a:xfrm>
+      </p:grpSpPr>
+      <p:sp>
+        <p:nvSpPr>
+          <p:cNvPr id="2" name="Slide Image Placeholder 1"/>
+          <p:cNvSpPr>
+            <a:spLocks noGrp="1"/>
+          </p:cNvSpPr>
+          <p:nvPr>
+            <p:ph type="sldImg" idx="2"/>
+          </p:nvPr>
+        </p:nvSpPr>
+        <p:spPr/>
+      </p:sp>
+      <p:sp>
+        <p:nvSpPr>
+          <p:cNvPr id="3" name="Notes Placeholder 2"/>
+          <p:cNvSpPr>
+            <a:spLocks noGrp="1"/>
+          </p:cNvSpPr>
+          <p:nvPr>
+            <p:ph type="body" idx="3" sz="quarter"/>
+          </p:nvPr>
+        </p:nvSpPr>
+        <p:spPr/>
+        <p:txBody>
+          <a:bodyPr/>
+          <a:lstStyle/>
+          <a:p>
+            <a:r>
+              <a:t>Chỉ tay vào hai dòng URLEncoder. Nhấn: encode phần giá trị, không phải tên tham số.</a:t>
+            </a:r>
+          </a:p>
+          <a:p>
+            <a:r>
+              <a:t>Hỏi lớp: nội dung đơn hàng có dấu cách thì chuyện gì xảy ra nếu quên encode?</a:t>
+            </a:r>
+          </a:p>
+        </p:txBody>
+      </p:sp>
+      <p:sp>
+        <p:nvSpPr>
+          <p:cNvPr id="4" name="Slide Number Placeholder 3"/>
+          <p:cNvSpPr>
+            <a:spLocks noGrp="1"/>
+          </p:cNvSpPr>
+          <p:nvPr>
+            <p:ph type="sldNum" idx="5" sz="quarter"/>
+          </p:nvPr>
+        </p:nvSpPr>
+        <p:spPr/>
+      </p:sp>
+    </p:spTree>
+  </p:cSld>
+  <p:clrMapOvr>
+    <a:masterClrMapping/>
+  </p:clrMapOvr>
+</p:notes>
+</file>
+
+<file path=ppt/notesSlides/notesSlide8.xml><?xml version="1.0" encoding="utf-8"?>
+<p:notes xmlns:a="http://schemas.openxmlformats.org/drawingml/2006/main" xmlns:p="http://schemas.openxmlformats.org/presentationml/2006/main" xmlns:r="http://schemas.openxmlformats.org/officeDocument/2006/relationships">
+  <p:cSld>
+    <p:spTree>
+      <p:nvGrpSpPr>
+        <p:cNvPr id="1" name=""/>
+        <p:cNvGrpSpPr/>
+        <p:nvPr/>
+      </p:nvGrpSpPr>
+      <p:grpSpPr>
+        <a:xfrm>
+          <a:off x="0" y="0"/>
+          <a:ext cx="0" cy="0"/>
+          <a:chOff x="0" y="0"/>
+          <a:chExt cx="0" cy="0"/>
+        </a:xfrm>
+      </p:grpSpPr>
+      <p:sp>
+        <p:nvSpPr>
+          <p:cNvPr id="2" name="Slide Image Placeholder 1"/>
+          <p:cNvSpPr>
+            <a:spLocks noGrp="1"/>
+          </p:cNvSpPr>
+          <p:nvPr>
+            <p:ph type="sldImg" idx="2"/>
+          </p:nvPr>
+        </p:nvSpPr>
+        <p:spPr/>
+      </p:sp>
+      <p:sp>
+        <p:nvSpPr>
+          <p:cNvPr id="3" name="Notes Placeholder 2"/>
+          <p:cNvSpPr>
+            <a:spLocks noGrp="1"/>
+          </p:cNvSpPr>
+          <p:nvPr>
+            <p:ph type="body" idx="3" sz="quarter"/>
+          </p:nvPr>
+        </p:nvSpPr>
+        <p:spPr/>
+        <p:txBody>
+          <a:bodyPr/>
+          <a:lstStyle/>
+          <a:p>
+            <a:r>
+              <a:t>Nhấn chỗ remove vnp_SecureHash. Nhiều người quên và ngồi tìm bug cả buổi.</a:t>
+            </a:r>
+          </a:p>
+          <a:p>
+            <a:r>
+              <a:t>Nói thêm: servlet đã decode sẵn nên lúc verify phải encode lại.</a:t>
+            </a:r>
+          </a:p>
+        </p:txBody>
+      </p:sp>
+      <p:sp>
+        <p:nvSpPr>
+          <p:cNvPr id="4" name="Slide Number Placeholder 3"/>
+          <p:cNvSpPr>
+            <a:spLocks noGrp="1"/>
+          </p:cNvSpPr>
+          <p:nvPr>
+            <p:ph type="sldNum" idx="5" sz="quarter"/>
+          </p:nvPr>
+        </p:nvSpPr>
+        <p:spPr/>
+      </p:sp>
+    </p:spTree>
+  </p:cSld>
+  <p:clrMapOvr>
+    <a:masterClrMapping/>
+  </p:clrMapOvr>
+</p:notes>
+</file>
+
+<file path=ppt/notesSlides/notesSlide9.xml><?xml version="1.0" encoding="utf-8"?>
+<p:notes xmlns:a="http://schemas.openxmlformats.org/drawingml/2006/main" xmlns:p="http://schemas.openxmlformats.org/presentationml/2006/main" xmlns:r="http://schemas.openxmlformats.org/officeDocument/2006/relationships">
+  <p:cSld>
+    <p:spTree>
+      <p:nvGrpSpPr>
+        <p:cNvPr id="1" name=""/>
+        <p:cNvGrpSpPr/>
+        <p:nvPr/>
+      </p:nvGrpSpPr>
+      <p:grpSpPr>
+        <a:xfrm>
+          <a:off x="0" y="0"/>
+          <a:ext cx="0" cy="0"/>
+          <a:chOff x="0" y="0"/>
+          <a:chExt cx="0" cy="0"/>
+        </a:xfrm>
+      </p:grpSpPr>
+      <p:sp>
+        <p:nvSpPr>
+          <p:cNvPr id="2" name="Slide Image Placeholder 1"/>
+          <p:cNvSpPr>
+            <a:spLocks noGrp="1"/>
+          </p:cNvSpPr>
+          <p:nvPr>
+            <p:ph type="sldImg" idx="2"/>
+          </p:nvPr>
+        </p:nvSpPr>
+        <p:spPr/>
+      </p:sp>
+      <p:sp>
+        <p:nvSpPr>
+          <p:cNvPr id="3" name="Notes Placeholder 2"/>
+          <p:cNvSpPr>
+            <a:spLocks noGrp="1"/>
+          </p:cNvSpPr>
+          <p:nvPr>
+            <p:ph type="body" idx="3" sz="quarter"/>
+          </p:nvPr>
+        </p:nvSpPr>
+        <p:spPr/>
+        <p:txBody>
+          <a:bodyPr/>
+          <a:lstStyle/>
+          <a:p>
+            <a:r>
+              <a:t>Nhắc lại con số 100. Viết lên bảng: 25.000đ thành 2500000.</a:t>
+            </a:r>
+          </a:p>
+          <a:p>
+            <a:r>
+              <a:t>Chuyện Etc/GMT+7 nên kể như một câu chuyện, vì nó nằm trong code mẫu của chính VNPAY.</a:t>
+            </a:r>
+          </a:p>
+        </p:txBody>
+      </p:sp>
+      <p:sp>
+        <p:nvSpPr>
+          <p:cNvPr id="4" name="Slide Number Placeholder 3"/>
+          <p:cNvSpPr>
+            <a:spLocks noGrp="1"/>
+          </p:cNvSpPr>
+          <p:nvPr>
+            <p:ph type="sldNum" idx="5" sz="quarter"/>
+          </p:nvPr>
+        </p:nvSpPr>
+        <p:spPr/>
+      </p:sp>
+    </p:spTree>
+  </p:cSld>
+  <p:clrMapOvr>
+    <a:masterClrMapping/>
+  </p:clrMapOvr>
+</p:notes>
 </file>
 
 <file path=ppt/slideLayouts/slideLayout1.xml><?xml version="1.0" encoding="utf-8"?>
@@ -3136,7 +4936,7 @@
           </a:bodyPr>
           <a:lstStyle/>
           <a:p>
-            <a:pPr>
+            <a:pPr algn="l">
               <a:lnSpc>
                 <a:spcPct val="118000"/>
               </a:lnSpc>
@@ -3155,7 +4955,7 @@
             </a:r>
           </a:p>
           <a:p>
-            <a:pPr>
+            <a:pPr algn="l">
               <a:lnSpc>
                 <a:spcPct val="118000"/>
               </a:lnSpc>
@@ -3174,7 +4974,7 @@
             </a:r>
           </a:p>
           <a:p>
-            <a:pPr>
+            <a:pPr algn="l">
               <a:lnSpc>
                 <a:spcPct val="118000"/>
               </a:lnSpc>
@@ -3210,7 +5010,7 @@
         </p:blipFill>
         <p:spPr>
           <a:xfrm>
-            <a:off x="4348141" y="3931920"/>
+            <a:off x="4348141" y="3703320"/>
             <a:ext cx="3495413" cy="2286000"/>
           </a:xfrm>
           <a:prstGeom prst="rect">
@@ -3226,7 +5026,7 @@
         </p:nvSpPr>
         <p:spPr>
           <a:xfrm>
-            <a:off x="658368" y="6309360"/>
+            <a:off x="658368" y="6080760"/>
             <a:ext cx="10874959" cy="274320"/>
           </a:xfrm>
           <a:prstGeom prst="rect">
@@ -3240,7 +5040,7 @@
           </a:bodyPr>
           <a:lstStyle/>
           <a:p>
-            <a:pPr>
+            <a:pPr algn="l">
               <a:lnSpc>
                 <a:spcPct val="118000"/>
               </a:lnSpc>
@@ -3308,7 +5108,7 @@
           </a:bodyPr>
           <a:lstStyle/>
           <a:p>
-            <a:pPr>
+            <a:pPr algn="l">
               <a:lnSpc>
                 <a:spcPct val="118000"/>
               </a:lnSpc>
@@ -3327,7 +5127,7 @@
             </a:r>
           </a:p>
           <a:p>
-            <a:pPr>
+            <a:pPr algn="l">
               <a:lnSpc>
                 <a:spcPct val="118000"/>
               </a:lnSpc>
@@ -3356,7 +5156,7 @@
         <p:spPr>
           <a:xfrm>
             <a:off x="658368" y="1719072"/>
-            <a:ext cx="10874959" cy="1125220"/>
+            <a:ext cx="10874959" cy="1176020"/>
           </a:xfrm>
           <a:prstGeom prst="roundRect">
             <a:avLst>
@@ -3386,12 +5186,12 @@
           </a:fontRef>
         </p:style>
         <p:txBody>
-          <a:bodyPr rtlCol="0" anchor="ctr" wrap="none" lIns="237744" tIns="118872" rIns="146304" bIns="91440"/>
-          <a:lstStyle/>
-          <a:p>
-            <a:pPr algn="ctr">
-              <a:lnSpc>
-                <a:spcPct val="134000"/>
+          <a:bodyPr rtlCol="0" anchor="t" wrap="none" lIns="237744" tIns="118872" rIns="146304" bIns="91440"/>
+          <a:lstStyle/>
+          <a:p>
+            <a:pPr algn="l">
+              <a:lnSpc>
+                <a:spcPts val="1775"/>
               </a:lnSpc>
               <a:spcAft>
                 <a:spcPts val="0"/>
@@ -3408,9 +5208,9 @@
             </a:r>
           </a:p>
           <a:p>
-            <a:pPr>
-              <a:lnSpc>
-                <a:spcPct val="134000"/>
+            <a:pPr algn="l">
+              <a:lnSpc>
+                <a:spcPts val="1775"/>
               </a:lnSpc>
               <a:spcAft>
                 <a:spcPts val="0"/>
@@ -3427,9 +5227,9 @@
             </a:r>
           </a:p>
           <a:p>
-            <a:pPr>
-              <a:lnSpc>
-                <a:spcPct val="134000"/>
+            <a:pPr algn="l">
+              <a:lnSpc>
+                <a:spcPts val="1775"/>
               </a:lnSpc>
               <a:spcAft>
                 <a:spcPts val="0"/>
@@ -3437,9 +5237,9 @@
             </a:pPr>
           </a:p>
           <a:p>
-            <a:pPr>
-              <a:lnSpc>
-                <a:spcPct val="134000"/>
+            <a:pPr algn="l">
+              <a:lnSpc>
+                <a:spcPts val="1775"/>
               </a:lnSpc>
               <a:spcAft>
                 <a:spcPts val="0"/>
@@ -3465,8 +5265,8 @@
         </p:nvSpPr>
         <p:spPr>
           <a:xfrm>
-            <a:off x="658368" y="3027172"/>
-            <a:ext cx="3490874" cy="1673352"/>
+            <a:off x="658368" y="3077972"/>
+            <a:ext cx="3490874" cy="1191006"/>
           </a:xfrm>
           <a:prstGeom prst="roundRect">
             <a:avLst>
@@ -3513,8 +5313,8 @@
         </p:nvSpPr>
         <p:spPr>
           <a:xfrm>
-            <a:off x="859536" y="3173476"/>
-            <a:ext cx="3088538" cy="1399032"/>
+            <a:off x="859536" y="3224276"/>
+            <a:ext cx="3088538" cy="916686"/>
           </a:xfrm>
           <a:prstGeom prst="rect">
             <a:avLst/>
@@ -3527,7 +5327,7 @@
           </a:bodyPr>
           <a:lstStyle/>
           <a:p>
-            <a:pPr>
+            <a:pPr algn="l">
               <a:lnSpc>
                 <a:spcPct val="118000"/>
               </a:lnSpc>
@@ -3546,7 +5346,7 @@
             </a:r>
           </a:p>
           <a:p>
-            <a:pPr>
+            <a:pPr algn="l">
               <a:lnSpc>
                 <a:spcPct val="118000"/>
               </a:lnSpc>
@@ -3574,8 +5374,8 @@
         </p:nvSpPr>
         <p:spPr>
           <a:xfrm>
-            <a:off x="4350410" y="3027172"/>
-            <a:ext cx="3490874" cy="1673352"/>
+            <a:off x="4350410" y="3077972"/>
+            <a:ext cx="3490874" cy="1191006"/>
           </a:xfrm>
           <a:prstGeom prst="roundRect">
             <a:avLst>
@@ -3622,8 +5422,8 @@
         </p:nvSpPr>
         <p:spPr>
           <a:xfrm>
-            <a:off x="4551578" y="3173476"/>
-            <a:ext cx="3088538" cy="1399032"/>
+            <a:off x="4551578" y="3224276"/>
+            <a:ext cx="3088538" cy="916686"/>
           </a:xfrm>
           <a:prstGeom prst="rect">
             <a:avLst/>
@@ -3636,7 +5436,7 @@
           </a:bodyPr>
           <a:lstStyle/>
           <a:p>
-            <a:pPr>
+            <a:pPr algn="l">
               <a:lnSpc>
                 <a:spcPct val="118000"/>
               </a:lnSpc>
@@ -3655,7 +5455,7 @@
             </a:r>
           </a:p>
           <a:p>
-            <a:pPr>
+            <a:pPr algn="l">
               <a:lnSpc>
                 <a:spcPct val="118000"/>
               </a:lnSpc>
@@ -3683,8 +5483,8 @@
         </p:nvSpPr>
         <p:spPr>
           <a:xfrm>
-            <a:off x="8042452" y="3027172"/>
-            <a:ext cx="3490874" cy="1673352"/>
+            <a:off x="8042452" y="3077972"/>
+            <a:ext cx="3490874" cy="1191006"/>
           </a:xfrm>
           <a:prstGeom prst="roundRect">
             <a:avLst>
@@ -3731,8 +5531,8 @@
         </p:nvSpPr>
         <p:spPr>
           <a:xfrm>
-            <a:off x="8243620" y="3173476"/>
-            <a:ext cx="3088538" cy="1399032"/>
+            <a:off x="8243620" y="3224276"/>
+            <a:ext cx="3088538" cy="916686"/>
           </a:xfrm>
           <a:prstGeom prst="rect">
             <a:avLst/>
@@ -3745,7 +5545,7 @@
           </a:bodyPr>
           <a:lstStyle/>
           <a:p>
-            <a:pPr>
+            <a:pPr algn="l">
               <a:lnSpc>
                 <a:spcPct val="118000"/>
               </a:lnSpc>
@@ -3764,7 +5564,7 @@
             </a:r>
           </a:p>
           <a:p>
-            <a:pPr>
+            <a:pPr algn="l">
               <a:lnSpc>
                 <a:spcPct val="118000"/>
               </a:lnSpc>
@@ -3792,7 +5592,7 @@
         </p:nvSpPr>
         <p:spPr>
           <a:xfrm>
-            <a:off x="658368" y="4883404"/>
+            <a:off x="658368" y="4451858"/>
             <a:ext cx="10874959" cy="1600200"/>
           </a:xfrm>
           <a:prstGeom prst="roundRect">
@@ -3897,7 +5697,7 @@
           </a:bodyPr>
           <a:lstStyle/>
           <a:p>
-            <a:pPr>
+            <a:pPr algn="l">
               <a:lnSpc>
                 <a:spcPct val="118000"/>
               </a:lnSpc>
@@ -3916,7 +5716,7 @@
             </a:r>
           </a:p>
           <a:p>
-            <a:pPr>
+            <a:pPr algn="l">
               <a:lnSpc>
                 <a:spcPct val="118000"/>
               </a:lnSpc>
@@ -3958,7 +5758,7 @@
           </a:bodyPr>
           <a:lstStyle/>
           <a:p>
-            <a:pPr>
+            <a:pPr algn="l">
               <a:lnSpc>
                 <a:spcPct val="118000"/>
               </a:lnSpc>
@@ -3987,7 +5787,7 @@
         <p:spPr>
           <a:xfrm>
             <a:off x="658368" y="2259139"/>
-            <a:ext cx="10874959" cy="912495"/>
+            <a:ext cx="10874959" cy="950595"/>
           </a:xfrm>
           <a:prstGeom prst="roundRect">
             <a:avLst>
@@ -4017,12 +5817,12 @@
           </a:fontRef>
         </p:style>
         <p:txBody>
-          <a:bodyPr rtlCol="0" anchor="ctr" wrap="none" lIns="237744" tIns="118872" rIns="146304" bIns="91440"/>
-          <a:lstStyle/>
-          <a:p>
-            <a:pPr algn="ctr">
-              <a:lnSpc>
-                <a:spcPct val="134000"/>
+          <a:bodyPr rtlCol="0" anchor="t" wrap="none" lIns="237744" tIns="118872" rIns="146304" bIns="91440"/>
+          <a:lstStyle/>
+          <a:p>
+            <a:pPr algn="l">
+              <a:lnSpc>
+                <a:spcPts val="1775"/>
               </a:lnSpc>
               <a:spcAft>
                 <a:spcPts val="0"/>
@@ -4039,9 +5839,9 @@
             </a:r>
           </a:p>
           <a:p>
-            <a:pPr>
-              <a:lnSpc>
-                <a:spcPct val="134000"/>
+            <a:pPr algn="l">
+              <a:lnSpc>
+                <a:spcPts val="1775"/>
               </a:lnSpc>
               <a:spcAft>
                 <a:spcPts val="0"/>
@@ -4049,9 +5849,9 @@
             </a:pPr>
           </a:p>
           <a:p>
-            <a:pPr>
-              <a:lnSpc>
-                <a:spcPct val="134000"/>
+            <a:pPr algn="l">
+              <a:lnSpc>
+                <a:spcPts val="1775"/>
               </a:lnSpc>
               <a:spcAft>
                 <a:spcPts val="0"/>
@@ -4078,7 +5878,7 @@
           <p:nvPr/>
         </p:nvGraphicFramePr>
         <p:xfrm>
-          <a:off x="658368" y="3354514"/>
+          <a:off x="658368" y="3392614"/>
           <a:ext cx="10874958" cy="1078992"/>
         </p:xfrm>
         <a:graphic>
@@ -4097,7 +5897,7 @@
                     <a:bodyPr wrap="square"/>
                     <a:lstStyle/>
                     <a:p>
-                      <a:pPr>
+                      <a:pPr algn="l">
                         <a:lnSpc>
                           <a:spcPct val="118000"/>
                         </a:lnSpc>
@@ -4127,7 +5927,7 @@
                     <a:bodyPr wrap="square"/>
                     <a:lstStyle/>
                     <a:p>
-                      <a:pPr>
+                      <a:pPr algn="l">
                         <a:lnSpc>
                           <a:spcPct val="118000"/>
                         </a:lnSpc>
@@ -4159,7 +5959,7 @@
                     <a:bodyPr wrap="square"/>
                     <a:lstStyle/>
                     <a:p>
-                      <a:pPr>
+                      <a:pPr algn="l">
                         <a:lnSpc>
                           <a:spcPct val="118000"/>
                         </a:lnSpc>
@@ -4189,7 +5989,7 @@
                     <a:bodyPr wrap="square"/>
                     <a:lstStyle/>
                     <a:p>
-                      <a:pPr>
+                      <a:pPr algn="l">
                         <a:lnSpc>
                           <a:spcPct val="118000"/>
                         </a:lnSpc>
@@ -4221,7 +6021,7 @@
                     <a:bodyPr wrap="square"/>
                     <a:lstStyle/>
                     <a:p>
-                      <a:pPr>
+                      <a:pPr algn="l">
                         <a:lnSpc>
                           <a:spcPct val="118000"/>
                         </a:lnSpc>
@@ -4251,7 +6051,7 @@
                     <a:bodyPr wrap="square"/>
                     <a:lstStyle/>
                     <a:p>
-                      <a:pPr>
+                      <a:pPr algn="l">
                         <a:lnSpc>
                           <a:spcPct val="118000"/>
                         </a:lnSpc>
@@ -4289,8 +6089,8 @@
         </p:nvSpPr>
         <p:spPr>
           <a:xfrm>
-            <a:off x="658368" y="4616386"/>
-            <a:ext cx="10874959" cy="798385"/>
+            <a:off x="658368" y="4654486"/>
+            <a:ext cx="10874959" cy="998980"/>
           </a:xfrm>
           <a:prstGeom prst="roundRect">
             <a:avLst>
@@ -4337,8 +6137,8 @@
         </p:nvSpPr>
         <p:spPr>
           <a:xfrm>
-            <a:off x="658368" y="4671250"/>
-            <a:ext cx="40640" cy="688657"/>
+            <a:off x="658368" y="4709350"/>
+            <a:ext cx="40640" cy="889252"/>
           </a:xfrm>
           <a:prstGeom prst="rect">
             <a:avLst/>
@@ -4381,8 +6181,8 @@
         </p:nvSpPr>
         <p:spPr>
           <a:xfrm>
-            <a:off x="896112" y="4735258"/>
-            <a:ext cx="10417759" cy="560641"/>
+            <a:off x="896112" y="4773358"/>
+            <a:ext cx="10417759" cy="761236"/>
           </a:xfrm>
           <a:prstGeom prst="rect">
             <a:avLst/>
@@ -4395,7 +6195,7 @@
           </a:bodyPr>
           <a:lstStyle/>
           <a:p>
-            <a:pPr>
+            <a:pPr algn="l">
               <a:lnSpc>
                 <a:spcPct val="118000"/>
               </a:lnSpc>
@@ -4414,7 +6214,7 @@
             </a:r>
           </a:p>
           <a:p>
-            <a:pPr>
+            <a:pPr algn="l">
               <a:lnSpc>
                 <a:spcPct val="118000"/>
               </a:lnSpc>
@@ -4482,7 +6282,7 @@
           </a:bodyPr>
           <a:lstStyle/>
           <a:p>
-            <a:pPr>
+            <a:pPr algn="l">
               <a:lnSpc>
                 <a:spcPct val="118000"/>
               </a:lnSpc>
@@ -4501,7 +6301,7 @@
             </a:r>
           </a:p>
           <a:p>
-            <a:pPr>
+            <a:pPr algn="l">
               <a:lnSpc>
                 <a:spcPct val="118000"/>
               </a:lnSpc>
@@ -4543,7 +6343,7 @@
           </a:bodyPr>
           <a:lstStyle/>
           <a:p>
-            <a:pPr>
+            <a:pPr algn="l">
               <a:lnSpc>
                 <a:spcPct val="118000"/>
               </a:lnSpc>
@@ -4585,7 +6385,7 @@
           </a:bodyPr>
           <a:lstStyle/>
           <a:p>
-            <a:pPr>
+            <a:pPr algn="l">
               <a:lnSpc>
                 <a:spcPct val="118000"/>
               </a:lnSpc>
@@ -4614,7 +6414,7 @@
         <p:spPr>
           <a:xfrm>
             <a:off x="658368" y="2496883"/>
-            <a:ext cx="10874959" cy="3745992"/>
+            <a:ext cx="10874959" cy="3953256"/>
           </a:xfrm>
           <a:prstGeom prst="roundRect">
             <a:avLst>
@@ -4644,12 +6444,12 @@
           </a:fontRef>
         </p:style>
         <p:txBody>
-          <a:bodyPr rtlCol="0" anchor="ctr" wrap="none" lIns="237744" tIns="118872" rIns="146304" bIns="91440"/>
-          <a:lstStyle/>
-          <a:p>
-            <a:pPr algn="ctr">
-              <a:lnSpc>
-                <a:spcPct val="134000"/>
+          <a:bodyPr rtlCol="0" anchor="t" wrap="none" lIns="237744" tIns="118872" rIns="146304" bIns="91440"/>
+          <a:lstStyle/>
+          <a:p>
+            <a:pPr algn="l">
+              <a:lnSpc>
+                <a:spcPts val="1704"/>
               </a:lnSpc>
               <a:spcAft>
                 <a:spcPts val="0"/>
@@ -4666,9 +6466,9 @@
             </a:r>
           </a:p>
           <a:p>
-            <a:pPr>
-              <a:lnSpc>
-                <a:spcPct val="134000"/>
+            <a:pPr algn="l">
+              <a:lnSpc>
+                <a:spcPts val="1704"/>
               </a:lnSpc>
               <a:spcAft>
                 <a:spcPts val="0"/>
@@ -4685,9 +6485,9 @@
             </a:r>
           </a:p>
           <a:p>
-            <a:pPr>
-              <a:lnSpc>
-                <a:spcPct val="134000"/>
+            <a:pPr algn="l">
+              <a:lnSpc>
+                <a:spcPts val="1704"/>
               </a:lnSpc>
               <a:spcAft>
                 <a:spcPts val="0"/>
@@ -4695,9 +6495,9 @@
             </a:pPr>
           </a:p>
           <a:p>
-            <a:pPr>
-              <a:lnSpc>
-                <a:spcPct val="134000"/>
+            <a:pPr algn="l">
+              <a:lnSpc>
+                <a:spcPts val="1704"/>
               </a:lnSpc>
               <a:spcAft>
                 <a:spcPts val="0"/>
@@ -4714,9 +6514,9 @@
             </a:r>
           </a:p>
           <a:p>
-            <a:pPr>
-              <a:lnSpc>
-                <a:spcPct val="134000"/>
+            <a:pPr algn="l">
+              <a:lnSpc>
+                <a:spcPts val="1704"/>
               </a:lnSpc>
               <a:spcAft>
                 <a:spcPts val="0"/>
@@ -4733,9 +6533,9 @@
             </a:r>
           </a:p>
           <a:p>
-            <a:pPr>
-              <a:lnSpc>
-                <a:spcPct val="134000"/>
+            <a:pPr algn="l">
+              <a:lnSpc>
+                <a:spcPts val="1704"/>
               </a:lnSpc>
               <a:spcAft>
                 <a:spcPts val="0"/>
@@ -4743,9 +6543,9 @@
             </a:pPr>
           </a:p>
           <a:p>
-            <a:pPr>
-              <a:lnSpc>
-                <a:spcPct val="134000"/>
+            <a:pPr algn="l">
+              <a:lnSpc>
+                <a:spcPts val="1704"/>
               </a:lnSpc>
               <a:spcAft>
                 <a:spcPts val="0"/>
@@ -4762,9 +6562,9 @@
             </a:r>
           </a:p>
           <a:p>
-            <a:pPr>
-              <a:lnSpc>
-                <a:spcPct val="134000"/>
+            <a:pPr algn="l">
+              <a:lnSpc>
+                <a:spcPts val="1704"/>
               </a:lnSpc>
               <a:spcAft>
                 <a:spcPts val="0"/>
@@ -4781,9 +6581,9 @@
             </a:r>
           </a:p>
           <a:p>
-            <a:pPr>
-              <a:lnSpc>
-                <a:spcPct val="134000"/>
+            <a:pPr algn="l">
+              <a:lnSpc>
+                <a:spcPts val="1704"/>
               </a:lnSpc>
               <a:spcAft>
                 <a:spcPts val="0"/>
@@ -4800,9 +6600,9 @@
             </a:r>
           </a:p>
           <a:p>
-            <a:pPr>
-              <a:lnSpc>
-                <a:spcPct val="134000"/>
+            <a:pPr algn="l">
+              <a:lnSpc>
+                <a:spcPts val="1704"/>
               </a:lnSpc>
               <a:spcAft>
                 <a:spcPts val="0"/>
@@ -4819,9 +6619,9 @@
             </a:r>
           </a:p>
           <a:p>
-            <a:pPr>
-              <a:lnSpc>
-                <a:spcPct val="134000"/>
+            <a:pPr algn="l">
+              <a:lnSpc>
+                <a:spcPts val="1704"/>
               </a:lnSpc>
               <a:spcAft>
                 <a:spcPts val="0"/>
@@ -4838,9 +6638,9 @@
             </a:r>
           </a:p>
           <a:p>
-            <a:pPr>
-              <a:lnSpc>
-                <a:spcPct val="134000"/>
+            <a:pPr algn="l">
+              <a:lnSpc>
+                <a:spcPts val="1704"/>
               </a:lnSpc>
               <a:spcAft>
                 <a:spcPts val="0"/>
@@ -4848,9 +6648,9 @@
             </a:pPr>
           </a:p>
           <a:p>
-            <a:pPr>
-              <a:lnSpc>
-                <a:spcPct val="134000"/>
+            <a:pPr algn="l">
+              <a:lnSpc>
+                <a:spcPts val="1704"/>
               </a:lnSpc>
               <a:spcAft>
                 <a:spcPts val="0"/>
@@ -4867,9 +6667,9 @@
             </a:r>
           </a:p>
           <a:p>
-            <a:pPr>
-              <a:lnSpc>
-                <a:spcPct val="134000"/>
+            <a:pPr algn="l">
+              <a:lnSpc>
+                <a:spcPts val="1704"/>
               </a:lnSpc>
               <a:spcAft>
                 <a:spcPts val="0"/>
@@ -4886,9 +6686,9 @@
             </a:r>
           </a:p>
           <a:p>
-            <a:pPr>
-              <a:lnSpc>
-                <a:spcPct val="134000"/>
+            <a:pPr algn="l">
+              <a:lnSpc>
+                <a:spcPts val="1704"/>
               </a:lnSpc>
               <a:spcAft>
                 <a:spcPts val="0"/>
@@ -4905,9 +6705,9 @@
             </a:r>
           </a:p>
           <a:p>
-            <a:pPr>
-              <a:lnSpc>
-                <a:spcPct val="134000"/>
+            <a:pPr algn="l">
+              <a:lnSpc>
+                <a:spcPts val="1704"/>
               </a:lnSpc>
               <a:spcAft>
                 <a:spcPts val="0"/>
@@ -4924,9 +6724,9 @@
             </a:r>
           </a:p>
           <a:p>
-            <a:pPr>
-              <a:lnSpc>
-                <a:spcPct val="134000"/>
+            <a:pPr algn="l">
+              <a:lnSpc>
+                <a:spcPts val="1704"/>
               </a:lnSpc>
               <a:spcAft>
                 <a:spcPts val="0"/>
@@ -4992,7 +6792,7 @@
           </a:bodyPr>
           <a:lstStyle/>
           <a:p>
-            <a:pPr>
+            <a:pPr algn="l">
               <a:lnSpc>
                 <a:spcPct val="118000"/>
               </a:lnSpc>
@@ -5011,7 +6811,7 @@
             </a:r>
           </a:p>
           <a:p>
-            <a:pPr>
+            <a:pPr algn="l">
               <a:lnSpc>
                 <a:spcPct val="118000"/>
               </a:lnSpc>
@@ -5053,7 +6853,7 @@
           </a:bodyPr>
           <a:lstStyle/>
           <a:p>
-            <a:pPr>
+            <a:pPr algn="l">
               <a:lnSpc>
                 <a:spcPct val="118000"/>
               </a:lnSpc>
@@ -5082,7 +6882,7 @@
         <p:spPr>
           <a:xfrm>
             <a:off x="658368" y="1956816"/>
-            <a:ext cx="10874959" cy="1550670"/>
+            <a:ext cx="10874959" cy="1626870"/>
           </a:xfrm>
           <a:prstGeom prst="roundRect">
             <a:avLst>
@@ -5112,12 +6912,12 @@
           </a:fontRef>
         </p:style>
         <p:txBody>
-          <a:bodyPr rtlCol="0" anchor="ctr" wrap="none" lIns="237744" tIns="118872" rIns="146304" bIns="91440"/>
-          <a:lstStyle/>
-          <a:p>
-            <a:pPr algn="ctr">
-              <a:lnSpc>
-                <a:spcPct val="134000"/>
+          <a:bodyPr rtlCol="0" anchor="t" wrap="none" lIns="237744" tIns="118872" rIns="146304" bIns="91440"/>
+          <a:lstStyle/>
+          <a:p>
+            <a:pPr algn="l">
+              <a:lnSpc>
+                <a:spcPts val="1775"/>
               </a:lnSpc>
               <a:spcAft>
                 <a:spcPts val="0"/>
@@ -5134,9 +6934,9 @@
             </a:r>
           </a:p>
           <a:p>
-            <a:pPr>
-              <a:lnSpc>
-                <a:spcPct val="134000"/>
+            <a:pPr algn="l">
+              <a:lnSpc>
+                <a:spcPts val="1775"/>
               </a:lnSpc>
               <a:spcAft>
                 <a:spcPts val="0"/>
@@ -5153,9 +6953,9 @@
             </a:r>
           </a:p>
           <a:p>
-            <a:pPr>
-              <a:lnSpc>
-                <a:spcPct val="134000"/>
+            <a:pPr algn="l">
+              <a:lnSpc>
+                <a:spcPts val="1775"/>
               </a:lnSpc>
               <a:spcAft>
                 <a:spcPts val="0"/>
@@ -5172,9 +6972,9 @@
             </a:r>
           </a:p>
           <a:p>
-            <a:pPr>
-              <a:lnSpc>
-                <a:spcPct val="134000"/>
+            <a:pPr algn="l">
+              <a:lnSpc>
+                <a:spcPts val="1775"/>
               </a:lnSpc>
               <a:spcAft>
                 <a:spcPts val="0"/>
@@ -5182,9 +6982,9 @@
             </a:pPr>
           </a:p>
           <a:p>
-            <a:pPr>
-              <a:lnSpc>
-                <a:spcPct val="134000"/>
+            <a:pPr algn="l">
+              <a:lnSpc>
+                <a:spcPts val="1775"/>
               </a:lnSpc>
               <a:spcAft>
                 <a:spcPts val="0"/>
@@ -5201,9 +7001,9 @@
             </a:r>
           </a:p>
           <a:p>
-            <a:pPr>
-              <a:lnSpc>
-                <a:spcPct val="134000"/>
+            <a:pPr algn="l">
+              <a:lnSpc>
+                <a:spcPts val="1775"/>
               </a:lnSpc>
               <a:spcAft>
                 <a:spcPts val="0"/>
@@ -5229,7 +7029,7 @@
         </p:nvSpPr>
         <p:spPr>
           <a:xfrm>
-            <a:off x="658368" y="3690366"/>
+            <a:off x="658368" y="3766566"/>
             <a:ext cx="10874959" cy="219456"/>
           </a:xfrm>
           <a:prstGeom prst="rect">
@@ -5243,7 +7043,7 @@
           </a:bodyPr>
           <a:lstStyle/>
           <a:p>
-            <a:pPr>
+            <a:pPr algn="l">
               <a:lnSpc>
                 <a:spcPct val="118000"/>
               </a:lnSpc>
@@ -5271,8 +7071,8 @@
         </p:nvSpPr>
         <p:spPr>
           <a:xfrm>
-            <a:off x="658368" y="3928110"/>
-            <a:ext cx="10874959" cy="1125220"/>
+            <a:off x="658368" y="4004310"/>
+            <a:ext cx="10874959" cy="1176020"/>
           </a:xfrm>
           <a:prstGeom prst="roundRect">
             <a:avLst>
@@ -5302,12 +7102,12 @@
           </a:fontRef>
         </p:style>
         <p:txBody>
-          <a:bodyPr rtlCol="0" anchor="ctr" wrap="none" lIns="237744" tIns="118872" rIns="146304" bIns="91440"/>
-          <a:lstStyle/>
-          <a:p>
-            <a:pPr algn="ctr">
-              <a:lnSpc>
-                <a:spcPct val="134000"/>
+          <a:bodyPr rtlCol="0" anchor="t" wrap="none" lIns="237744" tIns="118872" rIns="146304" bIns="91440"/>
+          <a:lstStyle/>
+          <a:p>
+            <a:pPr algn="l">
+              <a:lnSpc>
+                <a:spcPts val="1775"/>
               </a:lnSpc>
               <a:spcAft>
                 <a:spcPts val="0"/>
@@ -5324,9 +7124,9 @@
             </a:r>
           </a:p>
           <a:p>
-            <a:pPr>
-              <a:lnSpc>
-                <a:spcPct val="134000"/>
+            <a:pPr algn="l">
+              <a:lnSpc>
+                <a:spcPts val="1775"/>
               </a:lnSpc>
               <a:spcAft>
                 <a:spcPts val="0"/>
@@ -5343,9 +7143,9 @@
             </a:r>
           </a:p>
           <a:p>
-            <a:pPr>
-              <a:lnSpc>
-                <a:spcPct val="134000"/>
+            <a:pPr algn="l">
+              <a:lnSpc>
+                <a:spcPts val="1775"/>
               </a:lnSpc>
               <a:spcAft>
                 <a:spcPts val="0"/>
@@ -5362,9 +7162,9 @@
             </a:r>
           </a:p>
           <a:p>
-            <a:pPr>
-              <a:lnSpc>
-                <a:spcPct val="134000"/>
+            <a:pPr algn="l">
+              <a:lnSpc>
+                <a:spcPts val="1775"/>
               </a:lnSpc>
               <a:spcAft>
                 <a:spcPts val="0"/>
@@ -5390,8 +7190,8 @@
         </p:nvSpPr>
         <p:spPr>
           <a:xfrm>
-            <a:off x="658368" y="5236210"/>
-            <a:ext cx="10874959" cy="798385"/>
+            <a:off x="658368" y="5363210"/>
+            <a:ext cx="10874959" cy="755522"/>
           </a:xfrm>
           <a:prstGeom prst="roundRect">
             <a:avLst>
@@ -5438,8 +7238,8 @@
         </p:nvSpPr>
         <p:spPr>
           <a:xfrm>
-            <a:off x="658368" y="5291074"/>
-            <a:ext cx="40640" cy="688657"/>
+            <a:off x="658368" y="5418074"/>
+            <a:ext cx="40640" cy="645794"/>
           </a:xfrm>
           <a:prstGeom prst="rect">
             <a:avLst/>
@@ -5482,8 +7282,8 @@
         </p:nvSpPr>
         <p:spPr>
           <a:xfrm>
-            <a:off x="896112" y="5355082"/>
-            <a:ext cx="10417759" cy="560641"/>
+            <a:off x="896112" y="5482082"/>
+            <a:ext cx="10417759" cy="517778"/>
           </a:xfrm>
           <a:prstGeom prst="rect">
             <a:avLst/>
@@ -5496,7 +7296,7 @@
           </a:bodyPr>
           <a:lstStyle/>
           <a:p>
-            <a:pPr>
+            <a:pPr algn="l">
               <a:lnSpc>
                 <a:spcPct val="118000"/>
               </a:lnSpc>
@@ -5515,7 +7315,7 @@
             </a:r>
           </a:p>
           <a:p>
-            <a:pPr>
+            <a:pPr algn="l">
               <a:lnSpc>
                 <a:spcPct val="118000"/>
               </a:lnSpc>
@@ -5583,7 +7383,7 @@
           </a:bodyPr>
           <a:lstStyle/>
           <a:p>
-            <a:pPr>
+            <a:pPr algn="l">
               <a:lnSpc>
                 <a:spcPct val="118000"/>
               </a:lnSpc>
@@ -5602,7 +7402,7 @@
             </a:r>
           </a:p>
           <a:p>
-            <a:pPr>
+            <a:pPr algn="l">
               <a:lnSpc>
                 <a:spcPct val="118000"/>
               </a:lnSpc>
@@ -5631,7 +7431,7 @@
         <p:spPr>
           <a:xfrm>
             <a:off x="658368" y="1719072"/>
-            <a:ext cx="10874959" cy="1029842"/>
+            <a:ext cx="10874959" cy="998980"/>
           </a:xfrm>
           <a:prstGeom prst="roundRect">
             <a:avLst>
@@ -5679,7 +7479,7 @@
         <p:spPr>
           <a:xfrm>
             <a:off x="658368" y="1773936"/>
-            <a:ext cx="40640" cy="920114"/>
+            <a:ext cx="40640" cy="889252"/>
           </a:xfrm>
           <a:prstGeom prst="rect">
             <a:avLst/>
@@ -5723,7 +7523,7 @@
         <p:spPr>
           <a:xfrm>
             <a:off x="896112" y="1837944"/>
-            <a:ext cx="10417759" cy="792098"/>
+            <a:ext cx="10417759" cy="761236"/>
           </a:xfrm>
           <a:prstGeom prst="rect">
             <a:avLst/>
@@ -5736,7 +7536,7 @@
           </a:bodyPr>
           <a:lstStyle/>
           <a:p>
-            <a:pPr>
+            <a:pPr algn="l">
               <a:lnSpc>
                 <a:spcPct val="118000"/>
               </a:lnSpc>
@@ -5755,7 +7555,7 @@
             </a:r>
           </a:p>
           <a:p>
-            <a:pPr>
+            <a:pPr algn="l">
               <a:lnSpc>
                 <a:spcPct val="118000"/>
               </a:lnSpc>
@@ -5783,8 +7583,8 @@
         </p:nvSpPr>
         <p:spPr>
           <a:xfrm>
-            <a:off x="658368" y="2931794"/>
-            <a:ext cx="10874959" cy="357187"/>
+            <a:off x="658368" y="2900932"/>
+            <a:ext cx="10874959" cy="622934"/>
           </a:xfrm>
           <a:prstGeom prst="rect">
             <a:avLst/>
@@ -5797,7 +7597,7 @@
           </a:bodyPr>
           <a:lstStyle/>
           <a:p>
-            <a:pPr>
+            <a:pPr algn="l">
               <a:lnSpc>
                 <a:spcPct val="118000"/>
               </a:lnSpc>
@@ -5825,8 +7625,8 @@
         </p:nvSpPr>
         <p:spPr>
           <a:xfrm>
-            <a:off x="658368" y="3471861"/>
-            <a:ext cx="10874959" cy="1125220"/>
+            <a:off x="658368" y="3706746"/>
+            <a:ext cx="10874959" cy="1176020"/>
           </a:xfrm>
           <a:prstGeom prst="roundRect">
             <a:avLst>
@@ -5856,12 +7656,12 @@
           </a:fontRef>
         </p:style>
         <p:txBody>
-          <a:bodyPr rtlCol="0" anchor="ctr" wrap="none" lIns="237744" tIns="118872" rIns="146304" bIns="91440"/>
-          <a:lstStyle/>
-          <a:p>
-            <a:pPr algn="ctr">
-              <a:lnSpc>
-                <a:spcPct val="134000"/>
+          <a:bodyPr rtlCol="0" anchor="t" wrap="none" lIns="237744" tIns="118872" rIns="146304" bIns="91440"/>
+          <a:lstStyle/>
+          <a:p>
+            <a:pPr algn="l">
+              <a:lnSpc>
+                <a:spcPts val="1775"/>
               </a:lnSpc>
               <a:spcAft>
                 <a:spcPts val="0"/>
@@ -5878,9 +7678,9 @@
             </a:r>
           </a:p>
           <a:p>
-            <a:pPr>
-              <a:lnSpc>
-                <a:spcPct val="134000"/>
+            <a:pPr algn="l">
+              <a:lnSpc>
+                <a:spcPts val="1775"/>
               </a:lnSpc>
               <a:spcAft>
                 <a:spcPts val="0"/>
@@ -5897,9 +7697,9 @@
             </a:r>
           </a:p>
           <a:p>
-            <a:pPr>
-              <a:lnSpc>
-                <a:spcPct val="134000"/>
+            <a:pPr algn="l">
+              <a:lnSpc>
+                <a:spcPts val="1775"/>
               </a:lnSpc>
               <a:spcAft>
                 <a:spcPts val="0"/>
@@ -5916,9 +7716,9 @@
             </a:r>
           </a:p>
           <a:p>
-            <a:pPr>
-              <a:lnSpc>
-                <a:spcPct val="134000"/>
+            <a:pPr algn="l">
+              <a:lnSpc>
+                <a:spcPts val="1775"/>
               </a:lnSpc>
               <a:spcAft>
                 <a:spcPts val="0"/>
@@ -5984,7 +7784,7 @@
           </a:bodyPr>
           <a:lstStyle/>
           <a:p>
-            <a:pPr>
+            <a:pPr algn="l">
               <a:lnSpc>
                 <a:spcPct val="118000"/>
               </a:lnSpc>
@@ -6003,7 +7803,7 @@
             </a:r>
           </a:p>
           <a:p>
-            <a:pPr>
+            <a:pPr algn="l">
               <a:lnSpc>
                 <a:spcPct val="118000"/>
               </a:lnSpc>
@@ -6093,7 +7893,7 @@
           </a:bodyPr>
           <a:lstStyle/>
           <a:p>
-            <a:pPr>
+            <a:pPr algn="l">
               <a:lnSpc>
                 <a:spcPct val="118000"/>
               </a:lnSpc>
@@ -6112,7 +7912,7 @@
             </a:r>
           </a:p>
           <a:p>
-            <a:pPr>
+            <a:pPr algn="l">
               <a:lnSpc>
                 <a:spcPct val="118000"/>
               </a:lnSpc>
@@ -6202,7 +8002,7 @@
           </a:bodyPr>
           <a:lstStyle/>
           <a:p>
-            <a:pPr>
+            <a:pPr algn="l">
               <a:lnSpc>
                 <a:spcPct val="118000"/>
               </a:lnSpc>
@@ -6221,7 +8021,7 @@
             </a:r>
           </a:p>
           <a:p>
-            <a:pPr>
+            <a:pPr algn="l">
               <a:lnSpc>
                 <a:spcPct val="118000"/>
               </a:lnSpc>
@@ -6311,7 +8111,7 @@
           </a:bodyPr>
           <a:lstStyle/>
           <a:p>
-            <a:pPr>
+            <a:pPr algn="l">
               <a:lnSpc>
                 <a:spcPct val="118000"/>
               </a:lnSpc>
@@ -6330,7 +8130,7 @@
             </a:r>
           </a:p>
           <a:p>
-            <a:pPr>
+            <a:pPr algn="l">
               <a:lnSpc>
                 <a:spcPct val="118000"/>
               </a:lnSpc>
@@ -6420,7 +8220,7 @@
           </a:bodyPr>
           <a:lstStyle/>
           <a:p>
-            <a:pPr>
+            <a:pPr algn="l">
               <a:lnSpc>
                 <a:spcPct val="118000"/>
               </a:lnSpc>
@@ -6439,7 +8239,7 @@
             </a:r>
           </a:p>
           <a:p>
-            <a:pPr>
+            <a:pPr algn="l">
               <a:lnSpc>
                 <a:spcPct val="118000"/>
               </a:lnSpc>
@@ -6492,7 +8292,7 @@
         <p:spPr>
           <a:xfrm>
             <a:off x="658368" y="5221224"/>
-            <a:ext cx="10874959" cy="470027"/>
+            <a:ext cx="10874959" cy="481710"/>
           </a:xfrm>
           <a:prstGeom prst="roundRect">
             <a:avLst>
@@ -6522,12 +8322,12 @@
           </a:fontRef>
         </p:style>
         <p:txBody>
-          <a:bodyPr rtlCol="0" anchor="ctr" wrap="none" lIns="237744" tIns="118872" rIns="146304" bIns="91440"/>
-          <a:lstStyle/>
-          <a:p>
-            <a:pPr algn="ctr">
-              <a:lnSpc>
-                <a:spcPct val="134000"/>
+          <a:bodyPr rtlCol="0" anchor="t" wrap="none" lIns="237744" tIns="118872" rIns="146304" bIns="91440"/>
+          <a:lstStyle/>
+          <a:p>
+            <a:pPr algn="l">
+              <a:lnSpc>
+                <a:spcPts val="1632"/>
               </a:lnSpc>
               <a:spcAft>
                 <a:spcPts val="0"/>
@@ -6593,7 +8393,7 @@
           </a:bodyPr>
           <a:lstStyle/>
           <a:p>
-            <a:pPr>
+            <a:pPr algn="l">
               <a:lnSpc>
                 <a:spcPct val="118000"/>
               </a:lnSpc>
@@ -6612,7 +8412,7 @@
             </a:r>
           </a:p>
           <a:p>
-            <a:pPr>
+            <a:pPr algn="l">
               <a:lnSpc>
                 <a:spcPct val="118000"/>
               </a:lnSpc>
@@ -6641,7 +8441,7 @@
         <p:spPr>
           <a:xfrm>
             <a:off x="658368" y="1719072"/>
-            <a:ext cx="5336895" cy="1673352"/>
+            <a:ext cx="5336895" cy="1191006"/>
           </a:xfrm>
           <a:prstGeom prst="roundRect">
             <a:avLst>
@@ -6689,7 +8489,7 @@
         <p:spPr>
           <a:xfrm>
             <a:off x="859536" y="1865376"/>
-            <a:ext cx="4934559" cy="1399032"/>
+            <a:ext cx="4934559" cy="916686"/>
           </a:xfrm>
           <a:prstGeom prst="rect">
             <a:avLst/>
@@ -6702,7 +8502,7 @@
           </a:bodyPr>
           <a:lstStyle/>
           <a:p>
-            <a:pPr>
+            <a:pPr algn="l">
               <a:lnSpc>
                 <a:spcPct val="118000"/>
               </a:lnSpc>
@@ -6721,7 +8521,7 @@
             </a:r>
           </a:p>
           <a:p>
-            <a:pPr>
+            <a:pPr algn="l">
               <a:lnSpc>
                 <a:spcPct val="118000"/>
               </a:lnSpc>
@@ -6750,7 +8550,7 @@
         <p:spPr>
           <a:xfrm>
             <a:off x="6196431" y="1719072"/>
-            <a:ext cx="5336895" cy="1673352"/>
+            <a:ext cx="5336895" cy="1191006"/>
           </a:xfrm>
           <a:prstGeom prst="roundRect">
             <a:avLst>
@@ -6798,7 +8598,7 @@
         <p:spPr>
           <a:xfrm>
             <a:off x="6397599" y="1865376"/>
-            <a:ext cx="4934559" cy="1399032"/>
+            <a:ext cx="4934559" cy="916686"/>
           </a:xfrm>
           <a:prstGeom prst="rect">
             <a:avLst/>
@@ -6811,7 +8611,7 @@
           </a:bodyPr>
           <a:lstStyle/>
           <a:p>
-            <a:pPr>
+            <a:pPr algn="l">
               <a:lnSpc>
                 <a:spcPct val="118000"/>
               </a:lnSpc>
@@ -6830,7 +8630,7 @@
             </a:r>
           </a:p>
           <a:p>
-            <a:pPr>
+            <a:pPr algn="l">
               <a:lnSpc>
                 <a:spcPct val="118000"/>
               </a:lnSpc>
@@ -6858,8 +8658,8 @@
         </p:nvSpPr>
         <p:spPr>
           <a:xfrm>
-            <a:off x="658368" y="3575304"/>
-            <a:ext cx="5336895" cy="1673352"/>
+            <a:off x="658368" y="3092958"/>
+            <a:ext cx="5336895" cy="1448181"/>
           </a:xfrm>
           <a:prstGeom prst="roundRect">
             <a:avLst>
@@ -6906,8 +8706,8 @@
         </p:nvSpPr>
         <p:spPr>
           <a:xfrm>
-            <a:off x="859536" y="3721608"/>
-            <a:ext cx="4934559" cy="1399032"/>
+            <a:off x="859536" y="3239262"/>
+            <a:ext cx="4934559" cy="1173861"/>
           </a:xfrm>
           <a:prstGeom prst="rect">
             <a:avLst/>
@@ -6920,7 +8720,7 @@
           </a:bodyPr>
           <a:lstStyle/>
           <a:p>
-            <a:pPr>
+            <a:pPr algn="l">
               <a:lnSpc>
                 <a:spcPct val="118000"/>
               </a:lnSpc>
@@ -6939,7 +8739,7 @@
             </a:r>
           </a:p>
           <a:p>
-            <a:pPr>
+            <a:pPr algn="l">
               <a:lnSpc>
                 <a:spcPct val="118000"/>
               </a:lnSpc>
@@ -6967,8 +8767,8 @@
         </p:nvSpPr>
         <p:spPr>
           <a:xfrm>
-            <a:off x="6196431" y="3575304"/>
-            <a:ext cx="5336895" cy="1673352"/>
+            <a:off x="6196431" y="3092958"/>
+            <a:ext cx="5336895" cy="1448181"/>
           </a:xfrm>
           <a:prstGeom prst="roundRect">
             <a:avLst>
@@ -7015,8 +8815,8 @@
         </p:nvSpPr>
         <p:spPr>
           <a:xfrm>
-            <a:off x="6397599" y="3721608"/>
-            <a:ext cx="4934559" cy="1399032"/>
+            <a:off x="6397599" y="3239262"/>
+            <a:ext cx="4934559" cy="1173861"/>
           </a:xfrm>
           <a:prstGeom prst="rect">
             <a:avLst/>
@@ -7029,7 +8829,7 @@
           </a:bodyPr>
           <a:lstStyle/>
           <a:p>
-            <a:pPr>
+            <a:pPr algn="l">
               <a:lnSpc>
                 <a:spcPct val="118000"/>
               </a:lnSpc>
@@ -7048,7 +8848,7 @@
             </a:r>
           </a:p>
           <a:p>
-            <a:pPr>
+            <a:pPr algn="l">
               <a:lnSpc>
                 <a:spcPct val="118000"/>
               </a:lnSpc>
@@ -7076,7 +8876,7 @@
         </p:nvSpPr>
         <p:spPr>
           <a:xfrm>
-            <a:off x="658368" y="5431536"/>
+            <a:off x="658368" y="4724019"/>
             <a:ext cx="10874959" cy="571500"/>
           </a:xfrm>
           <a:prstGeom prst="rect">
@@ -7090,7 +8890,7 @@
           </a:bodyPr>
           <a:lstStyle/>
           <a:p>
-            <a:pPr>
+            <a:pPr algn="l">
               <a:lnSpc>
                 <a:spcPct val="118000"/>
               </a:lnSpc>
@@ -7158,7 +8958,7 @@
           </a:bodyPr>
           <a:lstStyle/>
           <a:p>
-            <a:pPr>
+            <a:pPr algn="l">
               <a:lnSpc>
                 <a:spcPct val="118000"/>
               </a:lnSpc>
@@ -7177,7 +8977,7 @@
             </a:r>
           </a:p>
           <a:p>
-            <a:pPr>
+            <a:pPr algn="l">
               <a:lnSpc>
                 <a:spcPct val="118000"/>
               </a:lnSpc>
@@ -7225,7 +9025,7 @@
                     <a:bodyPr wrap="square"/>
                     <a:lstStyle/>
                     <a:p>
-                      <a:pPr>
+                      <a:pPr algn="l">
                         <a:lnSpc>
                           <a:spcPct val="118000"/>
                         </a:lnSpc>
@@ -7255,7 +9055,7 @@
                     <a:bodyPr wrap="square"/>
                     <a:lstStyle/>
                     <a:p>
-                      <a:pPr>
+                      <a:pPr algn="l">
                         <a:lnSpc>
                           <a:spcPct val="118000"/>
                         </a:lnSpc>
@@ -7287,7 +9087,7 @@
                     <a:bodyPr wrap="square"/>
                     <a:lstStyle/>
                     <a:p>
-                      <a:pPr>
+                      <a:pPr algn="l">
                         <a:lnSpc>
                           <a:spcPct val="118000"/>
                         </a:lnSpc>
@@ -7317,7 +9117,7 @@
                     <a:bodyPr wrap="square"/>
                     <a:lstStyle/>
                     <a:p>
-                      <a:pPr>
+                      <a:pPr algn="l">
                         <a:lnSpc>
                           <a:spcPct val="118000"/>
                         </a:lnSpc>
@@ -7349,7 +9149,7 @@
                     <a:bodyPr wrap="square"/>
                     <a:lstStyle/>
                     <a:p>
-                      <a:pPr>
+                      <a:pPr algn="l">
                         <a:lnSpc>
                           <a:spcPct val="118000"/>
                         </a:lnSpc>
@@ -7379,7 +9179,7 @@
                     <a:bodyPr wrap="square"/>
                     <a:lstStyle/>
                     <a:p>
-                      <a:pPr>
+                      <a:pPr algn="l">
                         <a:lnSpc>
                           <a:spcPct val="118000"/>
                         </a:lnSpc>
@@ -7411,7 +9211,7 @@
                     <a:bodyPr wrap="square"/>
                     <a:lstStyle/>
                     <a:p>
-                      <a:pPr>
+                      <a:pPr algn="l">
                         <a:lnSpc>
                           <a:spcPct val="118000"/>
                         </a:lnSpc>
@@ -7441,7 +9241,7 @@
                     <a:bodyPr wrap="square"/>
                     <a:lstStyle/>
                     <a:p>
-                      <a:pPr>
+                      <a:pPr algn="l">
                         <a:lnSpc>
                           <a:spcPct val="118000"/>
                         </a:lnSpc>
@@ -7473,7 +9273,7 @@
                     <a:bodyPr wrap="square"/>
                     <a:lstStyle/>
                     <a:p>
-                      <a:pPr>
+                      <a:pPr algn="l">
                         <a:lnSpc>
                           <a:spcPct val="118000"/>
                         </a:lnSpc>
@@ -7503,7 +9303,7 @@
                     <a:bodyPr wrap="square"/>
                     <a:lstStyle/>
                     <a:p>
-                      <a:pPr>
+                      <a:pPr algn="l">
                         <a:lnSpc>
                           <a:spcPct val="118000"/>
                         </a:lnSpc>
@@ -7535,7 +9335,7 @@
                     <a:bodyPr wrap="square"/>
                     <a:lstStyle/>
                     <a:p>
-                      <a:pPr>
+                      <a:pPr algn="l">
                         <a:lnSpc>
                           <a:spcPct val="118000"/>
                         </a:lnSpc>
@@ -7565,7 +9365,7 @@
                     <a:bodyPr wrap="square"/>
                     <a:lstStyle/>
                     <a:p>
-                      <a:pPr>
+                      <a:pPr algn="l">
                         <a:lnSpc>
                           <a:spcPct val="118000"/>
                         </a:lnSpc>
@@ -7597,7 +9397,7 @@
                     <a:bodyPr wrap="square"/>
                     <a:lstStyle/>
                     <a:p>
-                      <a:pPr>
+                      <a:pPr algn="l">
                         <a:lnSpc>
                           <a:spcPct val="118000"/>
                         </a:lnSpc>
@@ -7627,7 +9427,7 @@
                     <a:bodyPr wrap="square"/>
                     <a:lstStyle/>
                     <a:p>
-                      <a:pPr>
+                      <a:pPr algn="l">
                         <a:lnSpc>
                           <a:spcPct val="118000"/>
                         </a:lnSpc>
@@ -7679,7 +9479,7 @@
           </a:bodyPr>
           <a:lstStyle/>
           <a:p>
-            <a:pPr>
+            <a:pPr algn="l">
               <a:lnSpc>
                 <a:spcPct val="118000"/>
               </a:lnSpc>
@@ -7733,8 +9533,8 @@
         </p:nvSpPr>
         <p:spPr>
           <a:xfrm>
-            <a:off x="658368" y="457200"/>
-            <a:ext cx="10874959" cy="1078992"/>
+            <a:off x="658368" y="2468880"/>
+            <a:ext cx="10874959" cy="1828800"/>
           </a:xfrm>
           <a:prstGeom prst="rect">
             <a:avLst/>
@@ -7747,16 +9547,16 @@
           </a:bodyPr>
           <a:lstStyle/>
           <a:p>
-            <a:pPr>
+            <a:pPr algn="l">
               <a:lnSpc>
                 <a:spcPct val="118000"/>
               </a:lnSpc>
               <a:spcAft>
-                <a:spcPts val="500"/>
-              </a:spcAft>
-            </a:pPr>
-            <a:r>
-              <a:rPr sz="1150" b="1">
+                <a:spcPts val="1200"/>
+              </a:spcAft>
+            </a:pPr>
+            <a:r>
+              <a:rPr sz="1200" b="1">
                 <a:solidFill>
                   <a:srgbClr val="0066FF"/>
                 </a:solidFill>
@@ -7766,7 +9566,7 @@
             </a:r>
           </a:p>
           <a:p>
-            <a:pPr>
+            <a:pPr algn="l">
               <a:lnSpc>
                 <a:spcPct val="118000"/>
               </a:lnSpc>
@@ -7775,353 +9575,17 @@
               </a:spcAft>
             </a:pPr>
             <a:r>
-              <a:rPr sz="3000" b="1">
+              <a:rPr sz="4000" b="1">
                 <a:solidFill>
                   <a:srgbClr val="111111"/>
                 </a:solidFill>
                 <a:latin typeface="Be Vietnam Pro"/>
               </a:rPr>
-              <a:t>Bốn câu chắc chắn bị hỏi</a:t>
-            </a:r>
-          </a:p>
-        </p:txBody>
-      </p:sp>
-      <p:graphicFrame>
-        <p:nvGraphicFramePr>
-          <p:cNvPr id="3" name="Table 2"/>
-          <p:cNvGraphicFramePr>
-            <a:graphicFrameLocks noGrp="1"/>
-          </p:cNvGraphicFramePr>
-          <p:nvPr/>
-        </p:nvGraphicFramePr>
-        <p:xfrm>
-          <a:off x="658368" y="1719072"/>
-          <a:ext cx="10874958" cy="1773936"/>
-        </p:xfrm>
-        <a:graphic>
-          <a:graphicData uri="http://schemas.openxmlformats.org/drawingml/2006/table">
-            <a:tbl>
-              <a:tblPr firstRow="1" bandRow="1">
-                <a:tableStyleId>{5C22544A-7EE6-4342-B048-85BDC9FD1C3A}</a:tableStyleId>
-              </a:tblPr>
-              <a:tblGrid>
-                <a:gridCol w="4272305"/>
-                <a:gridCol w="6602653"/>
-              </a:tblGrid>
-              <a:tr h="384048">
-                <a:tc>
-                  <a:txBody>
-                    <a:bodyPr wrap="square"/>
-                    <a:lstStyle/>
-                    <a:p>
-                      <a:pPr>
-                        <a:lnSpc>
-                          <a:spcPct val="118000"/>
-                        </a:lnSpc>
-                        <a:spcAft>
-                          <a:spcPts val="0"/>
-                        </a:spcAft>
-                      </a:pPr>
-                      <a:r>
-                        <a:rPr sz="1200" b="1">
-                          <a:solidFill>
-                            <a:srgbClr val="0066FF"/>
-                          </a:solidFill>
-                          <a:latin typeface="Be Vietnam Pro"/>
-                        </a:rPr>
-                        <a:t>Câu hỏi</a:t>
-                      </a:r>
-                    </a:p>
-                  </a:txBody>
-                  <a:tcPr anchor="ctr" marL="128016">
-                    <a:solidFill>
-                      <a:srgbClr val="ECF2FF"/>
-                    </a:solidFill>
-                  </a:tcPr>
-                </a:tc>
-                <a:tc>
-                  <a:txBody>
-                    <a:bodyPr wrap="square"/>
-                    <a:lstStyle/>
-                    <a:p>
-                      <a:pPr>
-                        <a:lnSpc>
-                          <a:spcPct val="118000"/>
-                        </a:lnSpc>
-                        <a:spcAft>
-                          <a:spcPts val="0"/>
-                        </a:spcAft>
-                      </a:pPr>
-                      <a:r>
-                        <a:rPr sz="1200" b="1">
-                          <a:solidFill>
-                            <a:srgbClr val="0066FF"/>
-                          </a:solidFill>
-                          <a:latin typeface="Be Vietnam Pro"/>
-                        </a:rPr>
-                        <a:t>Trả lời</a:t>
-                      </a:r>
-                    </a:p>
-                  </a:txBody>
-                  <a:tcPr anchor="ctr" marL="128016">
-                    <a:solidFill>
-                      <a:srgbClr val="ECF2FF"/>
-                    </a:solidFill>
-                  </a:tcPr>
-                </a:tc>
-              </a:tr>
-              <a:tr h="347472">
-                <a:tc>
-                  <a:txBody>
-                    <a:bodyPr wrap="square"/>
-                    <a:lstStyle/>
-                    <a:p>
-                      <a:pPr>
-                        <a:lnSpc>
-                          <a:spcPct val="118000"/>
-                        </a:lnSpc>
-                        <a:spcAft>
-                          <a:spcPts val="0"/>
-                        </a:spcAft>
-                      </a:pPr>
-                      <a:r>
-                        <a:rPr sz="1250" b="0">
-                          <a:solidFill>
-                            <a:srgbClr val="111111"/>
-                          </a:solidFill>
-                          <a:latin typeface="Be Vietnam Pro"/>
-                        </a:rPr>
-                        <a:t>IPN không về thì đơn treo mãi à?</a:t>
-                      </a:r>
-                    </a:p>
-                  </a:txBody>
-                  <a:tcPr anchor="ctr" marL="128016">
-                    <a:solidFill>
-                      <a:srgbClr val="FFFFFF"/>
-                    </a:solidFill>
-                  </a:tcPr>
-                </a:tc>
-                <a:tc>
-                  <a:txBody>
-                    <a:bodyPr wrap="square"/>
-                    <a:lstStyle/>
-                    <a:p>
-                      <a:pPr>
-                        <a:lnSpc>
-                          <a:spcPct val="118000"/>
-                        </a:lnSpc>
-                        <a:spcAft>
-                          <a:spcPts val="0"/>
-                        </a:spcAft>
-                      </a:pPr>
-                      <a:r>
-                        <a:rPr sz="1250" b="0">
-                          <a:solidFill>
-                            <a:srgbClr val="3F454D"/>
-                          </a:solidFill>
-                          <a:latin typeface="Be Vietnam Pro"/>
-                        </a:rPr>
-                        <a:t>Job quét đơn PENDING quá hạn rồi gọi querydr chốt</a:t>
-                      </a:r>
-                    </a:p>
-                  </a:txBody>
-                  <a:tcPr anchor="ctr" marL="128016">
-                    <a:solidFill>
-                      <a:srgbClr val="FFFFFF"/>
-                    </a:solidFill>
-                  </a:tcPr>
-                </a:tc>
-              </a:tr>
-              <a:tr h="347472">
-                <a:tc>
-                  <a:txBody>
-                    <a:bodyPr wrap="square"/>
-                    <a:lstStyle/>
-                    <a:p>
-                      <a:pPr>
-                        <a:lnSpc>
-                          <a:spcPct val="118000"/>
-                        </a:lnSpc>
-                        <a:spcAft>
-                          <a:spcPts val="0"/>
-                        </a:spcAft>
-                      </a:pPr>
-                      <a:r>
-                        <a:rPr sz="1250" b="0">
-                          <a:solidFill>
-                            <a:srgbClr val="111111"/>
-                          </a:solidFill>
-                          <a:latin typeface="Be Vietnam Pro"/>
-                        </a:rPr>
-                        <a:t>Sao phải cài ngrok?</a:t>
-                      </a:r>
-                    </a:p>
-                  </a:txBody>
-                  <a:tcPr anchor="ctr" marL="128016">
-                    <a:solidFill>
-                      <a:srgbClr val="FFFFFF"/>
-                    </a:solidFill>
-                  </a:tcPr>
-                </a:tc>
-                <a:tc>
-                  <a:txBody>
-                    <a:bodyPr wrap="square"/>
-                    <a:lstStyle/>
-                    <a:p>
-                      <a:pPr>
-                        <a:lnSpc>
-                          <a:spcPct val="118000"/>
-                        </a:lnSpc>
-                        <a:spcAft>
-                          <a:spcPts val="0"/>
-                        </a:spcAft>
-                      </a:pPr>
-                      <a:r>
-                        <a:rPr sz="1250" b="0">
-                          <a:solidFill>
-                            <a:srgbClr val="3F454D"/>
-                          </a:solidFill>
-                          <a:latin typeface="Be Vietnam Pro"/>
-                        </a:rPr>
-                        <a:t>Cần địa chỉ công khai để VNPAY gọi vào, deploy server thật cũng được</a:t>
-                      </a:r>
-                    </a:p>
-                  </a:txBody>
-                  <a:tcPr anchor="ctr" marL="128016">
-                    <a:solidFill>
-                      <a:srgbClr val="FFFFFF"/>
-                    </a:solidFill>
-                  </a:tcPr>
-                </a:tc>
-              </a:tr>
-              <a:tr h="347472">
-                <a:tc>
-                  <a:txBody>
-                    <a:bodyPr wrap="square"/>
-                    <a:lstStyle/>
-                    <a:p>
-                      <a:pPr>
-                        <a:lnSpc>
-                          <a:spcPct val="118000"/>
-                        </a:lnSpc>
-                        <a:spcAft>
-                          <a:spcPts val="0"/>
-                        </a:spcAft>
-                      </a:pPr>
-                      <a:r>
-                        <a:rPr sz="1250" b="0">
-                          <a:solidFill>
-                            <a:srgbClr val="111111"/>
-                          </a:solidFill>
-                          <a:latin typeface="Be Vietnam Pro"/>
-                        </a:rPr>
-                        <a:t>Sai chữ ký mà không hiểu vì sao?</a:t>
-                      </a:r>
-                    </a:p>
-                  </a:txBody>
-                  <a:tcPr anchor="ctr" marL="128016">
-                    <a:solidFill>
-                      <a:srgbClr val="FFFFFF"/>
-                    </a:solidFill>
-                  </a:tcPr>
-                </a:tc>
-                <a:tc>
-                  <a:txBody>
-                    <a:bodyPr wrap="square"/>
-                    <a:lstStyle/>
-                    <a:p>
-                      <a:pPr>
-                        <a:lnSpc>
-                          <a:spcPct val="118000"/>
-                        </a:lnSpc>
-                        <a:spcAft>
-                          <a:spcPts val="0"/>
-                        </a:spcAft>
-                      </a:pPr>
-                      <a:r>
-                        <a:rPr sz="1250" b="0">
-                          <a:solidFill>
-                            <a:srgbClr val="3F454D"/>
-                          </a:solidFill>
-                          <a:latin typeface="Be Vietnam Pro"/>
-                        </a:rPr>
-                        <a:t>In hashData ra so từng ký tự, thường là quên encode</a:t>
-                      </a:r>
-                    </a:p>
-                  </a:txBody>
-                  <a:tcPr anchor="ctr" marL="128016">
-                    <a:solidFill>
-                      <a:srgbClr val="FFFFFF"/>
-                    </a:solidFill>
-                  </a:tcPr>
-                </a:tc>
-              </a:tr>
-              <a:tr h="347472">
-                <a:tc>
-                  <a:txBody>
-                    <a:bodyPr wrap="square"/>
-                    <a:lstStyle/>
-                    <a:p>
-                      <a:pPr>
-                        <a:lnSpc>
-                          <a:spcPct val="118000"/>
-                        </a:lnSpc>
-                        <a:spcAft>
-                          <a:spcPts val="0"/>
-                        </a:spcAft>
-                      </a:pPr>
-                      <a:r>
-                        <a:rPr sz="1250" b="0">
-                          <a:solidFill>
-                            <a:srgbClr val="111111"/>
-                          </a:solidFill>
-                          <a:latin typeface="Be Vietnam Pro"/>
-                        </a:rPr>
-                        <a:t>Chưa có thẻ thì test kiểu gì?</a:t>
-                      </a:r>
-                    </a:p>
-                  </a:txBody>
-                  <a:tcPr anchor="ctr" marL="128016">
-                    <a:solidFill>
-                      <a:srgbClr val="FFFFFF"/>
-                    </a:solidFill>
-                  </a:tcPr>
-                </a:tc>
-                <a:tc>
-                  <a:txBody>
-                    <a:bodyPr wrap="square"/>
-                    <a:lstStyle/>
-                    <a:p>
-                      <a:pPr>
-                        <a:lnSpc>
-                          <a:spcPct val="118000"/>
-                        </a:lnSpc>
-                        <a:spcAft>
-                          <a:spcPts val="0"/>
-                        </a:spcAft>
-                      </a:pPr>
-                      <a:r>
-                        <a:rPr sz="1250" b="0">
-                          <a:solidFill>
-                            <a:srgbClr val="3F454D"/>
-                          </a:solidFill>
-                          <a:latin typeface="Be Vietnam Pro"/>
-                        </a:rPr>
-                        <a:t>Phần ký và verify có unit test chạy offline</a:t>
-                      </a:r>
-                    </a:p>
-                  </a:txBody>
-                  <a:tcPr anchor="ctr" marL="128016">
-                    <a:solidFill>
-                      <a:srgbClr val="FFFFFF"/>
-                    </a:solidFill>
-                  </a:tcPr>
-                </a:tc>
-              </a:tr>
-            </a:tbl>
-          </a:graphicData>
-        </a:graphic>
-      </p:graphicFrame>
+              <a:t>Còn thắc mắc gì không?</a:t>
+            </a:r>
+          </a:p>
+        </p:txBody>
+      </p:sp>
     </p:spTree>
   </p:cSld>
   <p:clrMapOvr>
@@ -8170,7 +9634,7 @@
           </a:bodyPr>
           <a:lstStyle/>
           <a:p>
-            <a:pPr>
+            <a:pPr algn="l">
               <a:lnSpc>
                 <a:spcPct val="118000"/>
               </a:lnSpc>
@@ -8189,7 +9653,7 @@
             </a:r>
           </a:p>
           <a:p>
-            <a:pPr>
+            <a:pPr algn="l">
               <a:lnSpc>
                 <a:spcPct val="118000"/>
               </a:lnSpc>
@@ -8341,7 +9805,7 @@
           </a:bodyPr>
           <a:lstStyle/>
           <a:p>
-            <a:pPr>
+            <a:pPr algn="l">
               <a:lnSpc>
                 <a:spcPct val="118000"/>
               </a:lnSpc>
@@ -8383,7 +9847,7 @@
           </a:bodyPr>
           <a:lstStyle/>
           <a:p>
-            <a:pPr>
+            <a:pPr algn="l">
               <a:lnSpc>
                 <a:spcPct val="118000"/>
               </a:lnSpc>
@@ -8535,7 +9999,7 @@
           </a:bodyPr>
           <a:lstStyle/>
           <a:p>
-            <a:pPr>
+            <a:pPr algn="l">
               <a:lnSpc>
                 <a:spcPct val="118000"/>
               </a:lnSpc>
@@ -8577,7 +10041,7 @@
           </a:bodyPr>
           <a:lstStyle/>
           <a:p>
-            <a:pPr>
+            <a:pPr algn="l">
               <a:lnSpc>
                 <a:spcPct val="118000"/>
               </a:lnSpc>
@@ -8729,7 +10193,7 @@
           </a:bodyPr>
           <a:lstStyle/>
           <a:p>
-            <a:pPr>
+            <a:pPr algn="l">
               <a:lnSpc>
                 <a:spcPct val="118000"/>
               </a:lnSpc>
@@ -8771,7 +10235,7 @@
           </a:bodyPr>
           <a:lstStyle/>
           <a:p>
-            <a:pPr>
+            <a:pPr algn="l">
               <a:lnSpc>
                 <a:spcPct val="118000"/>
               </a:lnSpc>
@@ -8800,7 +10264,7 @@
         <p:spPr>
           <a:xfrm>
             <a:off x="658368" y="4151376"/>
-            <a:ext cx="10874959" cy="798385"/>
+            <a:ext cx="10874959" cy="998980"/>
           </a:xfrm>
           <a:prstGeom prst="roundRect">
             <a:avLst>
@@ -8848,7 +10312,7 @@
         <p:spPr>
           <a:xfrm>
             <a:off x="658368" y="4206240"/>
-            <a:ext cx="40640" cy="688657"/>
+            <a:ext cx="40640" cy="889252"/>
           </a:xfrm>
           <a:prstGeom prst="rect">
             <a:avLst/>
@@ -8892,7 +10356,7 @@
         <p:spPr>
           <a:xfrm>
             <a:off x="896112" y="4270248"/>
-            <a:ext cx="10417759" cy="560641"/>
+            <a:ext cx="10417759" cy="761236"/>
           </a:xfrm>
           <a:prstGeom prst="rect">
             <a:avLst/>
@@ -8905,7 +10369,7 @@
           </a:bodyPr>
           <a:lstStyle/>
           <a:p>
-            <a:pPr>
+            <a:pPr algn="l">
               <a:lnSpc>
                 <a:spcPct val="118000"/>
               </a:lnSpc>
@@ -8924,7 +10388,7 @@
             </a:r>
           </a:p>
           <a:p>
-            <a:pPr>
+            <a:pPr algn="l">
               <a:lnSpc>
                 <a:spcPct val="118000"/>
               </a:lnSpc>
@@ -8992,7 +10456,7 @@
           </a:bodyPr>
           <a:lstStyle/>
           <a:p>
-            <a:pPr>
+            <a:pPr algn="l">
               <a:lnSpc>
                 <a:spcPct val="118000"/>
               </a:lnSpc>
@@ -9011,7 +10475,7 @@
             </a:r>
           </a:p>
           <a:p>
-            <a:pPr>
+            <a:pPr algn="l">
               <a:lnSpc>
                 <a:spcPct val="118000"/>
               </a:lnSpc>
@@ -9040,7 +10504,7 @@
         <p:spPr>
           <a:xfrm>
             <a:off x="658368" y="1719072"/>
-            <a:ext cx="3490874" cy="2873502"/>
+            <a:ext cx="3490874" cy="1705356"/>
           </a:xfrm>
           <a:prstGeom prst="roundRect">
             <a:avLst>
@@ -9088,7 +10552,7 @@
         <p:spPr>
           <a:xfrm>
             <a:off x="859536" y="1865376"/>
-            <a:ext cx="3088538" cy="2599182"/>
+            <a:ext cx="3088538" cy="1431036"/>
           </a:xfrm>
           <a:prstGeom prst="rect">
             <a:avLst/>
@@ -9101,7 +10565,7 @@
           </a:bodyPr>
           <a:lstStyle/>
           <a:p>
-            <a:pPr>
+            <a:pPr algn="l">
               <a:lnSpc>
                 <a:spcPct val="118000"/>
               </a:lnSpc>
@@ -9120,7 +10584,7 @@
             </a:r>
           </a:p>
           <a:p>
-            <a:pPr>
+            <a:pPr algn="l">
               <a:lnSpc>
                 <a:spcPct val="118000"/>
               </a:lnSpc>
@@ -9149,7 +10613,7 @@
         <p:spPr>
           <a:xfrm>
             <a:off x="4350410" y="1719072"/>
-            <a:ext cx="3490874" cy="2873502"/>
+            <a:ext cx="3490874" cy="1705356"/>
           </a:xfrm>
           <a:prstGeom prst="roundRect">
             <a:avLst>
@@ -9197,7 +10661,7 @@
         <p:spPr>
           <a:xfrm>
             <a:off x="4551578" y="1865376"/>
-            <a:ext cx="3088538" cy="2599182"/>
+            <a:ext cx="3088538" cy="1431036"/>
           </a:xfrm>
           <a:prstGeom prst="rect">
             <a:avLst/>
@@ -9210,7 +10674,7 @@
           </a:bodyPr>
           <a:lstStyle/>
           <a:p>
-            <a:pPr>
+            <a:pPr algn="l">
               <a:lnSpc>
                 <a:spcPct val="118000"/>
               </a:lnSpc>
@@ -9229,7 +10693,7 @@
             </a:r>
           </a:p>
           <a:p>
-            <a:pPr>
+            <a:pPr algn="l">
               <a:lnSpc>
                 <a:spcPct val="118000"/>
               </a:lnSpc>
@@ -9258,7 +10722,7 @@
         <p:spPr>
           <a:xfrm>
             <a:off x="8042452" y="1719072"/>
-            <a:ext cx="3490874" cy="2873502"/>
+            <a:ext cx="3490874" cy="1705356"/>
           </a:xfrm>
           <a:prstGeom prst="roundRect">
             <a:avLst>
@@ -9306,7 +10770,7 @@
         <p:spPr>
           <a:xfrm>
             <a:off x="8243620" y="1865376"/>
-            <a:ext cx="3088538" cy="2599182"/>
+            <a:ext cx="3088538" cy="1431036"/>
           </a:xfrm>
           <a:prstGeom prst="rect">
             <a:avLst/>
@@ -9319,7 +10783,7 @@
           </a:bodyPr>
           <a:lstStyle/>
           <a:p>
-            <a:pPr>
+            <a:pPr algn="l">
               <a:lnSpc>
                 <a:spcPct val="118000"/>
               </a:lnSpc>
@@ -9338,7 +10802,7 @@
             </a:r>
           </a:p>
           <a:p>
-            <a:pPr>
+            <a:pPr algn="l">
               <a:lnSpc>
                 <a:spcPct val="118000"/>
               </a:lnSpc>
@@ -9366,8 +10830,8 @@
         </p:nvSpPr>
         <p:spPr>
           <a:xfrm>
-            <a:off x="658368" y="4775454"/>
-            <a:ext cx="10874959" cy="798385"/>
+            <a:off x="658368" y="3607308"/>
+            <a:ext cx="10874959" cy="755522"/>
           </a:xfrm>
           <a:prstGeom prst="roundRect">
             <a:avLst>
@@ -9414,8 +10878,8 @@
         </p:nvSpPr>
         <p:spPr>
           <a:xfrm>
-            <a:off x="658368" y="4830318"/>
-            <a:ext cx="40640" cy="688657"/>
+            <a:off x="658368" y="3662172"/>
+            <a:ext cx="40640" cy="645794"/>
           </a:xfrm>
           <a:prstGeom prst="rect">
             <a:avLst/>
@@ -9458,8 +10922,8 @@
         </p:nvSpPr>
         <p:spPr>
           <a:xfrm>
-            <a:off x="896112" y="4894326"/>
-            <a:ext cx="10417759" cy="560641"/>
+            <a:off x="896112" y="3726180"/>
+            <a:ext cx="10417759" cy="517778"/>
           </a:xfrm>
           <a:prstGeom prst="rect">
             <a:avLst/>
@@ -9472,7 +10936,7 @@
           </a:bodyPr>
           <a:lstStyle/>
           <a:p>
-            <a:pPr>
+            <a:pPr algn="l">
               <a:lnSpc>
                 <a:spcPct val="118000"/>
               </a:lnSpc>
@@ -9491,7 +10955,7 @@
             </a:r>
           </a:p>
           <a:p>
-            <a:pPr>
+            <a:pPr algn="l">
               <a:lnSpc>
                 <a:spcPct val="118000"/>
               </a:lnSpc>
@@ -9559,7 +11023,7 @@
           </a:bodyPr>
           <a:lstStyle/>
           <a:p>
-            <a:pPr>
+            <a:pPr algn="l">
               <a:lnSpc>
                 <a:spcPct val="118000"/>
               </a:lnSpc>
@@ -9578,7 +11042,7 @@
             </a:r>
           </a:p>
           <a:p>
-            <a:pPr>
+            <a:pPr algn="l">
               <a:lnSpc>
                 <a:spcPct val="118000"/>
               </a:lnSpc>
@@ -9730,7 +11194,7 @@
           </a:bodyPr>
           <a:lstStyle/>
           <a:p>
-            <a:pPr>
+            <a:pPr algn="l">
               <a:lnSpc>
                 <a:spcPct val="118000"/>
               </a:lnSpc>
@@ -9772,7 +11236,7 @@
           </a:bodyPr>
           <a:lstStyle/>
           <a:p>
-            <a:pPr>
+            <a:pPr algn="l">
               <a:lnSpc>
                 <a:spcPct val="118000"/>
               </a:lnSpc>
@@ -9924,7 +11388,7 @@
           </a:bodyPr>
           <a:lstStyle/>
           <a:p>
-            <a:pPr>
+            <a:pPr algn="l">
               <a:lnSpc>
                 <a:spcPct val="118000"/>
               </a:lnSpc>
@@ -9966,7 +11430,7 @@
           </a:bodyPr>
           <a:lstStyle/>
           <a:p>
-            <a:pPr>
+            <a:pPr algn="l">
               <a:lnSpc>
                 <a:spcPct val="118000"/>
               </a:lnSpc>
@@ -10180,7 +11644,7 @@
           </a:bodyPr>
           <a:lstStyle/>
           <a:p>
-            <a:pPr>
+            <a:pPr algn="l">
               <a:lnSpc>
                 <a:spcPct val="118000"/>
               </a:lnSpc>
@@ -10222,7 +11686,7 @@
           </a:bodyPr>
           <a:lstStyle/>
           <a:p>
-            <a:pPr>
+            <a:pPr algn="l">
               <a:lnSpc>
                 <a:spcPct val="118000"/>
               </a:lnSpc>
@@ -10436,7 +11900,7 @@
           </a:bodyPr>
           <a:lstStyle/>
           <a:p>
-            <a:pPr>
+            <a:pPr algn="l">
               <a:lnSpc>
                 <a:spcPct val="118000"/>
               </a:lnSpc>
@@ -10478,7 +11942,7 @@
           </a:bodyPr>
           <a:lstStyle/>
           <a:p>
-            <a:pPr>
+            <a:pPr algn="l">
               <a:lnSpc>
                 <a:spcPct val="118000"/>
               </a:lnSpc>
@@ -10562,106 +12026,14 @@
       </p:sp>
       <p:sp>
         <p:nvSpPr>
-          <p:cNvPr id="22" name="Rounded Rectangle 21"/>
-          <p:cNvSpPr/>
-          <p:nvPr/>
-        </p:nvSpPr>
-        <p:spPr>
-          <a:xfrm>
-            <a:off x="658368" y="4901184"/>
-            <a:ext cx="10874959" cy="1029842"/>
-          </a:xfrm>
-          <a:prstGeom prst="roundRect">
-            <a:avLst>
-              <a:gd name="adj" fmla="val 3500"/>
-            </a:avLst>
-          </a:prstGeom>
-          <a:solidFill>
-            <a:srgbClr val="FFFFFF"/>
-          </a:solidFill>
-          <a:ln w="12700">
-            <a:solidFill>
-              <a:srgbClr val="E3E6EA"/>
-            </a:solidFill>
-          </a:ln>
-          <a:effectLst/>
-        </p:spPr>
-        <p:style>
-          <a:lnRef idx="1">
-            <a:schemeClr val="accent1"/>
-          </a:lnRef>
-          <a:fillRef idx="3">
-            <a:schemeClr val="accent1"/>
-          </a:fillRef>
-          <a:effectRef idx="2">
-            <a:schemeClr val="accent1"/>
-          </a:effectRef>
-          <a:fontRef idx="minor">
-            <a:schemeClr val="lt1"/>
-          </a:fontRef>
-        </p:style>
-        <p:txBody>
-          <a:bodyPr rtlCol="0" anchor="ctr"/>
-          <a:lstStyle/>
-          <a:p>
-            <a:pPr algn="ctr"/>
-          </a:p>
-        </p:txBody>
-      </p:sp>
-      <p:sp>
-        <p:nvSpPr>
-          <p:cNvPr id="23" name="Rectangle 22"/>
-          <p:cNvSpPr/>
-          <p:nvPr/>
-        </p:nvSpPr>
-        <p:spPr>
-          <a:xfrm>
-            <a:off x="658368" y="4956048"/>
-            <a:ext cx="40640" cy="920114"/>
-          </a:xfrm>
-          <a:prstGeom prst="rect">
-            <a:avLst/>
-          </a:prstGeom>
-          <a:solidFill>
-            <a:srgbClr val="C42B22"/>
-          </a:solidFill>
-          <a:ln>
-            <a:noFill/>
-          </a:ln>
-          <a:effectLst/>
-        </p:spPr>
-        <p:style>
-          <a:lnRef idx="1">
-            <a:schemeClr val="accent1"/>
-          </a:lnRef>
-          <a:fillRef idx="3">
-            <a:schemeClr val="accent1"/>
-          </a:fillRef>
-          <a:effectRef idx="2">
-            <a:schemeClr val="accent1"/>
-          </a:effectRef>
-          <a:fontRef idx="minor">
-            <a:schemeClr val="lt1"/>
-          </a:fontRef>
-        </p:style>
-        <p:txBody>
-          <a:bodyPr rtlCol="0" anchor="ctr"/>
-          <a:lstStyle/>
-          <a:p>
-            <a:pPr algn="ctr"/>
-          </a:p>
-        </p:txBody>
-      </p:sp>
-      <p:sp>
-        <p:nvSpPr>
-          <p:cNvPr id="24" name="TextBox 23"/>
+          <p:cNvPr id="22" name="TextBox 21"/>
           <p:cNvSpPr txBox="1"/>
           <p:nvPr/>
         </p:nvSpPr>
         <p:spPr>
           <a:xfrm>
-            <a:off x="896112" y="5020056"/>
-            <a:ext cx="10417759" cy="792098"/>
+            <a:off x="658368" y="4901184"/>
+            <a:ext cx="10874959" cy="571500"/>
           </a:xfrm>
           <a:prstGeom prst="rect">
             <a:avLst/>
@@ -10674,7 +12046,7 @@
           </a:bodyPr>
           <a:lstStyle/>
           <a:p>
-            <a:pPr>
+            <a:pPr algn="l">
               <a:lnSpc>
                 <a:spcPct val="118000"/>
               </a:lnSpc>
@@ -10683,32 +12055,13 @@
               </a:spcAft>
             </a:pPr>
             <a:r>
-              <a:rPr sz="1400" b="1">
-                <a:solidFill>
-                  <a:srgbClr val="C42B22"/>
+              <a:rPr sz="1400" b="0">
+                <a:solidFill>
+                  <a:srgbClr val="3F454D"/>
                 </a:solidFill>
                 <a:latin typeface="Be Vietnam Pro"/>
               </a:rPr>
-              <a:t>Hỏi cả lớp trước khi sang slide sau</a:t>
-            </a:r>
-          </a:p>
-          <a:p>
-            <a:pPr>
-              <a:lnSpc>
-                <a:spcPct val="118000"/>
-              </a:lnSpc>
-              <a:spcAft>
-                <a:spcPts val="0"/>
-              </a:spcAft>
-            </a:pPr>
-            <a:r>
-              <a:rPr sz="1350" b="0">
-                <a:solidFill>
-                  <a:srgbClr val="3F454D"/>
-                </a:solidFill>
-                <a:latin typeface="Be Vietnam Pro"/>
-              </a:rPr>
-              <a:t>Sao không cộng tiền luôn ở ReturnURL cho nhanh? Vì đó là URL trên trình duyệt của khách. Sửa vnp_ResponseCode=00 là mua hàng miễn phí. Khách tắt tab sau khi trả tiền thì ReturnURL không bao giờ về, mình mất đơn đã thu tiền.</a:t>
+              <a:t>Đường 2 và 4 là server gọi server, có chữ ký nên tin được. Đường 3 chạy qua trình duyệt của khách nên chỉ dùng để vẽ màn hình.</a:t>
             </a:r>
           </a:p>
         </p:txBody>
@@ -10761,7 +12114,7 @@
           </a:bodyPr>
           <a:lstStyle/>
           <a:p>
-            <a:pPr>
+            <a:pPr algn="l">
               <a:lnSpc>
                 <a:spcPct val="118000"/>
               </a:lnSpc>
@@ -10780,7 +12133,7 @@
             </a:r>
           </a:p>
           <a:p>
-            <a:pPr>
+            <a:pPr algn="l">
               <a:lnSpc>
                 <a:spcPct val="118000"/>
               </a:lnSpc>
@@ -10829,7 +12182,7 @@
                     <a:bodyPr wrap="square"/>
                     <a:lstStyle/>
                     <a:p>
-                      <a:pPr>
+                      <a:pPr algn="l">
                         <a:lnSpc>
                           <a:spcPct val="118000"/>
                         </a:lnSpc>
@@ -10859,7 +12212,7 @@
                     <a:bodyPr wrap="square"/>
                     <a:lstStyle/>
                     <a:p>
-                      <a:pPr>
+                      <a:pPr algn="l">
                         <a:lnSpc>
                           <a:spcPct val="118000"/>
                         </a:lnSpc>
@@ -10889,7 +12242,7 @@
                     <a:bodyPr wrap="square"/>
                     <a:lstStyle/>
                     <a:p>
-                      <a:pPr>
+                      <a:pPr algn="l">
                         <a:lnSpc>
                           <a:spcPct val="118000"/>
                         </a:lnSpc>
@@ -10921,7 +12274,7 @@
                     <a:bodyPr wrap="square"/>
                     <a:lstStyle/>
                     <a:p>
-                      <a:pPr>
+                      <a:pPr algn="l">
                         <a:lnSpc>
                           <a:spcPct val="118000"/>
                         </a:lnSpc>
@@ -10951,7 +12304,7 @@
                     <a:bodyPr wrap="square"/>
                     <a:lstStyle/>
                     <a:p>
-                      <a:pPr>
+                      <a:pPr algn="l">
                         <a:lnSpc>
                           <a:spcPct val="118000"/>
                         </a:lnSpc>
@@ -10981,7 +12334,7 @@
                     <a:bodyPr wrap="square"/>
                     <a:lstStyle/>
                     <a:p>
-                      <a:pPr>
+                      <a:pPr algn="l">
                         <a:lnSpc>
                           <a:spcPct val="118000"/>
                         </a:lnSpc>
@@ -11013,7 +12366,7 @@
                     <a:bodyPr wrap="square"/>
                     <a:lstStyle/>
                     <a:p>
-                      <a:pPr>
+                      <a:pPr algn="l">
                         <a:lnSpc>
                           <a:spcPct val="118000"/>
                         </a:lnSpc>
@@ -11043,7 +12396,7 @@
                     <a:bodyPr wrap="square"/>
                     <a:lstStyle/>
                     <a:p>
-                      <a:pPr>
+                      <a:pPr algn="l">
                         <a:lnSpc>
                           <a:spcPct val="118000"/>
                         </a:lnSpc>
@@ -11073,7 +12426,7 @@
                     <a:bodyPr wrap="square"/>
                     <a:lstStyle/>
                     <a:p>
-                      <a:pPr>
+                      <a:pPr algn="l">
                         <a:lnSpc>
                           <a:spcPct val="118000"/>
                         </a:lnSpc>
@@ -11105,7 +12458,7 @@
                     <a:bodyPr wrap="square"/>
                     <a:lstStyle/>
                     <a:p>
-                      <a:pPr>
+                      <a:pPr algn="l">
                         <a:lnSpc>
                           <a:spcPct val="118000"/>
                         </a:lnSpc>
@@ -11135,7 +12488,7 @@
                     <a:bodyPr wrap="square"/>
                     <a:lstStyle/>
                     <a:p>
-                      <a:pPr>
+                      <a:pPr algn="l">
                         <a:lnSpc>
                           <a:spcPct val="118000"/>
                         </a:lnSpc>
@@ -11165,7 +12518,7 @@
                     <a:bodyPr wrap="square"/>
                     <a:lstStyle/>
                     <a:p>
-                      <a:pPr>
+                      <a:pPr algn="l">
                         <a:lnSpc>
                           <a:spcPct val="118000"/>
                         </a:lnSpc>
@@ -11197,7 +12550,7 @@
                     <a:bodyPr wrap="square"/>
                     <a:lstStyle/>
                     <a:p>
-                      <a:pPr>
+                      <a:pPr algn="l">
                         <a:lnSpc>
                           <a:spcPct val="118000"/>
                         </a:lnSpc>
@@ -11227,7 +12580,7 @@
                     <a:bodyPr wrap="square"/>
                     <a:lstStyle/>
                     <a:p>
-                      <a:pPr>
+                      <a:pPr algn="l">
                         <a:lnSpc>
                           <a:spcPct val="118000"/>
                         </a:lnSpc>
@@ -11257,7 +12610,7 @@
                     <a:bodyPr wrap="square"/>
                     <a:lstStyle/>
                     <a:p>
-                      <a:pPr>
+                      <a:pPr algn="l">
                         <a:lnSpc>
                           <a:spcPct val="118000"/>
                         </a:lnSpc>
@@ -11289,7 +12642,7 @@
                     <a:bodyPr wrap="square"/>
                     <a:lstStyle/>
                     <a:p>
-                      <a:pPr>
+                      <a:pPr algn="l">
                         <a:lnSpc>
                           <a:spcPct val="118000"/>
                         </a:lnSpc>
@@ -11319,7 +12672,7 @@
                     <a:bodyPr wrap="square"/>
                     <a:lstStyle/>
                     <a:p>
-                      <a:pPr>
+                      <a:pPr algn="l">
                         <a:lnSpc>
                           <a:spcPct val="118000"/>
                         </a:lnSpc>
@@ -11349,7 +12702,7 @@
                     <a:bodyPr wrap="square"/>
                     <a:lstStyle/>
                     <a:p>
-                      <a:pPr>
+                      <a:pPr algn="l">
                         <a:lnSpc>
                           <a:spcPct val="118000"/>
                         </a:lnSpc>
@@ -11381,7 +12734,7 @@
                     <a:bodyPr wrap="square"/>
                     <a:lstStyle/>
                     <a:p>
-                      <a:pPr>
+                      <a:pPr algn="l">
                         <a:lnSpc>
                           <a:spcPct val="118000"/>
                         </a:lnSpc>
@@ -11411,7 +12764,7 @@
                     <a:bodyPr wrap="square"/>
                     <a:lstStyle/>
                     <a:p>
-                      <a:pPr>
+                      <a:pPr algn="l">
                         <a:lnSpc>
                           <a:spcPct val="118000"/>
                         </a:lnSpc>
@@ -11441,7 +12794,7 @@
                     <a:bodyPr wrap="square"/>
                     <a:lstStyle/>
                     <a:p>
-                      <a:pPr>
+                      <a:pPr algn="l">
                         <a:lnSpc>
                           <a:spcPct val="118000"/>
                         </a:lnSpc>
@@ -11480,7 +12833,7 @@
         <p:spPr>
           <a:xfrm>
             <a:off x="658368" y="4370832"/>
-            <a:ext cx="10874959" cy="357187"/>
+            <a:ext cx="10874959" cy="622934"/>
           </a:xfrm>
           <a:prstGeom prst="rect">
             <a:avLst/>
@@ -11493,7 +12846,7 @@
           </a:bodyPr>
           <a:lstStyle/>
           <a:p>
-            <a:pPr>
+            <a:pPr algn="l">
               <a:lnSpc>
                 <a:spcPct val="118000"/>
               </a:lnSpc>
@@ -11561,7 +12914,7 @@
           </a:bodyPr>
           <a:lstStyle/>
           <a:p>
-            <a:pPr>
+            <a:pPr algn="l">
               <a:lnSpc>
                 <a:spcPct val="118000"/>
               </a:lnSpc>
@@ -11580,7 +12933,7 @@
             </a:r>
           </a:p>
           <a:p>
-            <a:pPr>
+            <a:pPr algn="l">
               <a:lnSpc>
                 <a:spcPct val="118000"/>
               </a:lnSpc>
@@ -11622,7 +12975,7 @@
           </a:bodyPr>
           <a:lstStyle/>
           <a:p>
-            <a:pPr>
+            <a:pPr algn="l">
               <a:lnSpc>
                 <a:spcPct val="118000"/>
               </a:lnSpc>
@@ -11651,7 +13004,7 @@
         <p:spPr>
           <a:xfrm>
             <a:off x="658368" y="1956816"/>
-            <a:ext cx="10874959" cy="1125220"/>
+            <a:ext cx="10874959" cy="1176020"/>
           </a:xfrm>
           <a:prstGeom prst="roundRect">
             <a:avLst>
@@ -11681,12 +13034,12 @@
           </a:fontRef>
         </p:style>
         <p:txBody>
-          <a:bodyPr rtlCol="0" anchor="ctr" wrap="none" lIns="237744" tIns="118872" rIns="146304" bIns="91440"/>
-          <a:lstStyle/>
-          <a:p>
-            <a:pPr algn="ctr">
-              <a:lnSpc>
-                <a:spcPct val="134000"/>
+          <a:bodyPr rtlCol="0" anchor="t" wrap="none" lIns="237744" tIns="118872" rIns="146304" bIns="91440"/>
+          <a:lstStyle/>
+          <a:p>
+            <a:pPr algn="l">
+              <a:lnSpc>
+                <a:spcPts val="1775"/>
               </a:lnSpc>
               <a:spcAft>
                 <a:spcPts val="0"/>
@@ -11703,9 +13056,9 @@
             </a:r>
           </a:p>
           <a:p>
-            <a:pPr>
-              <a:lnSpc>
-                <a:spcPct val="134000"/>
+            <a:pPr algn="l">
+              <a:lnSpc>
+                <a:spcPts val="1775"/>
               </a:lnSpc>
               <a:spcAft>
                 <a:spcPts val="0"/>
@@ -11722,9 +13075,9 @@
             </a:r>
           </a:p>
           <a:p>
-            <a:pPr>
-              <a:lnSpc>
-                <a:spcPct val="134000"/>
+            <a:pPr algn="l">
+              <a:lnSpc>
+                <a:spcPts val="1775"/>
               </a:lnSpc>
               <a:spcAft>
                 <a:spcPts val="0"/>
@@ -11741,9 +13094,9 @@
             </a:r>
           </a:p>
           <a:p>
-            <a:pPr>
-              <a:lnSpc>
-                <a:spcPct val="134000"/>
+            <a:pPr algn="l">
+              <a:lnSpc>
+                <a:spcPts val="1775"/>
               </a:lnSpc>
               <a:spcAft>
                 <a:spcPts val="0"/>
@@ -11769,8 +13122,8 @@
         </p:nvSpPr>
         <p:spPr>
           <a:xfrm>
-            <a:off x="658368" y="3264916"/>
-            <a:ext cx="10874959" cy="912495"/>
+            <a:off x="658368" y="3315716"/>
+            <a:ext cx="10874959" cy="950595"/>
           </a:xfrm>
           <a:prstGeom prst="roundRect">
             <a:avLst>
@@ -11800,12 +13153,12 @@
           </a:fontRef>
         </p:style>
         <p:txBody>
-          <a:bodyPr rtlCol="0" anchor="ctr" wrap="none" lIns="237744" tIns="118872" rIns="146304" bIns="91440"/>
-          <a:lstStyle/>
-          <a:p>
-            <a:pPr algn="ctr">
-              <a:lnSpc>
-                <a:spcPct val="134000"/>
+          <a:bodyPr rtlCol="0" anchor="t" wrap="none" lIns="237744" tIns="118872" rIns="146304" bIns="91440"/>
+          <a:lstStyle/>
+          <a:p>
+            <a:pPr algn="l">
+              <a:lnSpc>
+                <a:spcPts val="1775"/>
               </a:lnSpc>
               <a:spcAft>
                 <a:spcPts val="0"/>
@@ -11822,9 +13175,9 @@
             </a:r>
           </a:p>
           <a:p>
-            <a:pPr>
-              <a:lnSpc>
-                <a:spcPct val="134000"/>
+            <a:pPr algn="l">
+              <a:lnSpc>
+                <a:spcPts val="1775"/>
               </a:lnSpc>
               <a:spcAft>
                 <a:spcPts val="0"/>
@@ -11841,9 +13194,9 @@
             </a:r>
           </a:p>
           <a:p>
-            <a:pPr>
-              <a:lnSpc>
-                <a:spcPct val="134000"/>
+            <a:pPr algn="l">
+              <a:lnSpc>
+                <a:spcPts val="1775"/>
               </a:lnSpc>
               <a:spcAft>
                 <a:spcPts val="0"/>
@@ -11869,8 +13222,8 @@
         </p:nvSpPr>
         <p:spPr>
           <a:xfrm>
-            <a:off x="658368" y="4360291"/>
-            <a:ext cx="10874959" cy="798385"/>
+            <a:off x="658368" y="4449191"/>
+            <a:ext cx="10874959" cy="755522"/>
           </a:xfrm>
           <a:prstGeom prst="roundRect">
             <a:avLst>
@@ -11917,8 +13270,8 @@
         </p:nvSpPr>
         <p:spPr>
           <a:xfrm>
-            <a:off x="658368" y="4415155"/>
-            <a:ext cx="40640" cy="688657"/>
+            <a:off x="658368" y="4504055"/>
+            <a:ext cx="40640" cy="645794"/>
           </a:xfrm>
           <a:prstGeom prst="rect">
             <a:avLst/>
@@ -11961,8 +13314,8 @@
         </p:nvSpPr>
         <p:spPr>
           <a:xfrm>
-            <a:off x="896112" y="4479163"/>
-            <a:ext cx="10417759" cy="560641"/>
+            <a:off x="896112" y="4568063"/>
+            <a:ext cx="10417759" cy="517778"/>
           </a:xfrm>
           <a:prstGeom prst="rect">
             <a:avLst/>
@@ -11975,7 +13328,7 @@
           </a:bodyPr>
           <a:lstStyle/>
           <a:p>
-            <a:pPr>
+            <a:pPr algn="l">
               <a:lnSpc>
                 <a:spcPct val="118000"/>
               </a:lnSpc>
@@ -11994,7 +13347,7 @@
             </a:r>
           </a:p>
           <a:p>
-            <a:pPr>
+            <a:pPr algn="l">
               <a:lnSpc>
                 <a:spcPct val="118000"/>
               </a:lnSpc>
@@ -12062,7 +13415,7 @@
           </a:bodyPr>
           <a:lstStyle/>
           <a:p>
-            <a:pPr>
+            <a:pPr algn="l">
               <a:lnSpc>
                 <a:spcPct val="118000"/>
               </a:lnSpc>
@@ -12081,7 +13434,7 @@
             </a:r>
           </a:p>
           <a:p>
-            <a:pPr>
+            <a:pPr algn="l">
               <a:lnSpc>
                 <a:spcPct val="118000"/>
               </a:lnSpc>
@@ -12123,7 +13476,7 @@
           </a:bodyPr>
           <a:lstStyle/>
           <a:p>
-            <a:pPr>
+            <a:pPr algn="l">
               <a:lnSpc>
                 <a:spcPct val="118000"/>
               </a:lnSpc>
@@ -12165,7 +13518,7 @@
           </a:bodyPr>
           <a:lstStyle/>
           <a:p>
-            <a:pPr>
+            <a:pPr algn="l">
               <a:lnSpc>
                 <a:spcPct val="118000"/>
               </a:lnSpc>
@@ -12194,7 +13547,7 @@
         <p:spPr>
           <a:xfrm>
             <a:off x="658368" y="2496883"/>
-            <a:ext cx="10874959" cy="3039745"/>
+            <a:ext cx="10874959" cy="3204845"/>
           </a:xfrm>
           <a:prstGeom prst="roundRect">
             <a:avLst>
@@ -12224,12 +13577,12 @@
           </a:fontRef>
         </p:style>
         <p:txBody>
-          <a:bodyPr rtlCol="0" anchor="ctr" wrap="none" lIns="237744" tIns="118872" rIns="146304" bIns="91440"/>
-          <a:lstStyle/>
-          <a:p>
-            <a:pPr algn="ctr">
-              <a:lnSpc>
-                <a:spcPct val="134000"/>
+          <a:bodyPr rtlCol="0" anchor="t" wrap="none" lIns="237744" tIns="118872" rIns="146304" bIns="91440"/>
+          <a:lstStyle/>
+          <a:p>
+            <a:pPr algn="l">
+              <a:lnSpc>
+                <a:spcPts val="1775"/>
               </a:lnSpc>
               <a:spcAft>
                 <a:spcPts val="0"/>
@@ -12246,9 +13599,9 @@
             </a:r>
           </a:p>
           <a:p>
-            <a:pPr>
-              <a:lnSpc>
-                <a:spcPct val="134000"/>
+            <a:pPr algn="l">
+              <a:lnSpc>
+                <a:spcPts val="1775"/>
               </a:lnSpc>
               <a:spcAft>
                 <a:spcPts val="0"/>
@@ -12265,9 +13618,9 @@
             </a:r>
           </a:p>
           <a:p>
-            <a:pPr>
-              <a:lnSpc>
-                <a:spcPct val="134000"/>
+            <a:pPr algn="l">
+              <a:lnSpc>
+                <a:spcPts val="1775"/>
               </a:lnSpc>
               <a:spcAft>
                 <a:spcPts val="0"/>
@@ -12284,9 +13637,9 @@
             </a:r>
           </a:p>
           <a:p>
-            <a:pPr>
-              <a:lnSpc>
-                <a:spcPct val="134000"/>
+            <a:pPr algn="l">
+              <a:lnSpc>
+                <a:spcPts val="1775"/>
               </a:lnSpc>
               <a:spcAft>
                 <a:spcPts val="0"/>
@@ -12303,9 +13656,9 @@
             </a:r>
           </a:p>
           <a:p>
-            <a:pPr>
-              <a:lnSpc>
-                <a:spcPct val="134000"/>
+            <a:pPr algn="l">
+              <a:lnSpc>
+                <a:spcPts val="1775"/>
               </a:lnSpc>
               <a:spcAft>
                 <a:spcPts val="0"/>
@@ -12322,9 +13675,9 @@
             </a:r>
           </a:p>
           <a:p>
-            <a:pPr>
-              <a:lnSpc>
-                <a:spcPct val="134000"/>
+            <a:pPr algn="l">
+              <a:lnSpc>
+                <a:spcPts val="1775"/>
               </a:lnSpc>
               <a:spcAft>
                 <a:spcPts val="0"/>
@@ -12332,9 +13685,9 @@
             </a:pPr>
           </a:p>
           <a:p>
-            <a:pPr>
-              <a:lnSpc>
-                <a:spcPct val="134000"/>
+            <a:pPr algn="l">
+              <a:lnSpc>
+                <a:spcPts val="1775"/>
               </a:lnSpc>
               <a:spcAft>
                 <a:spcPts val="0"/>
@@ -12351,9 +13704,9 @@
             </a:r>
           </a:p>
           <a:p>
-            <a:pPr>
-              <a:lnSpc>
-                <a:spcPct val="134000"/>
+            <a:pPr algn="l">
+              <a:lnSpc>
+                <a:spcPts val="1775"/>
               </a:lnSpc>
               <a:spcAft>
                 <a:spcPts val="0"/>
@@ -12370,9 +13723,9 @@
             </a:r>
           </a:p>
           <a:p>
-            <a:pPr>
-              <a:lnSpc>
-                <a:spcPct val="134000"/>
+            <a:pPr algn="l">
+              <a:lnSpc>
+                <a:spcPts val="1775"/>
               </a:lnSpc>
               <a:spcAft>
                 <a:spcPts val="0"/>
@@ -12389,9 +13742,9 @@
             </a:r>
           </a:p>
           <a:p>
-            <a:pPr>
-              <a:lnSpc>
-                <a:spcPct val="134000"/>
+            <a:pPr algn="l">
+              <a:lnSpc>
+                <a:spcPts val="1775"/>
               </a:lnSpc>
               <a:spcAft>
                 <a:spcPts val="0"/>
@@ -12408,9 +13761,9 @@
             </a:r>
           </a:p>
           <a:p>
-            <a:pPr>
-              <a:lnSpc>
-                <a:spcPct val="134000"/>
+            <a:pPr algn="l">
+              <a:lnSpc>
+                <a:spcPts val="1775"/>
               </a:lnSpc>
               <a:spcAft>
                 <a:spcPts val="0"/>
@@ -12427,9 +13780,9 @@
             </a:r>
           </a:p>
           <a:p>
-            <a:pPr>
-              <a:lnSpc>
-                <a:spcPct val="134000"/>
+            <a:pPr algn="l">
+              <a:lnSpc>
+                <a:spcPts val="1775"/>
               </a:lnSpc>
               <a:spcAft>
                 <a:spcPts val="0"/>
@@ -12446,9 +13799,9 @@
             </a:r>
           </a:p>
           <a:p>
-            <a:pPr>
-              <a:lnSpc>
-                <a:spcPct val="134000"/>
+            <a:pPr algn="l">
+              <a:lnSpc>
+                <a:spcPts val="1775"/>
               </a:lnSpc>
               <a:spcAft>
                 <a:spcPts val="0"/>
@@ -12514,7 +13867,7 @@
           </a:bodyPr>
           <a:lstStyle/>
           <a:p>
-            <a:pPr>
+            <a:pPr algn="l">
               <a:lnSpc>
                 <a:spcPct val="118000"/>
               </a:lnSpc>
@@ -12533,7 +13886,7 @@
             </a:r>
           </a:p>
           <a:p>
-            <a:pPr>
+            <a:pPr algn="l">
               <a:lnSpc>
                 <a:spcPct val="118000"/>
               </a:lnSpc>
@@ -12575,7 +13928,7 @@
           </a:bodyPr>
           <a:lstStyle/>
           <a:p>
-            <a:pPr>
+            <a:pPr algn="l">
               <a:lnSpc>
                 <a:spcPct val="118000"/>
               </a:lnSpc>
@@ -12604,7 +13957,7 @@
         <p:spPr>
           <a:xfrm>
             <a:off x="658368" y="1956816"/>
-            <a:ext cx="10874959" cy="2827020"/>
+            <a:ext cx="10874959" cy="2979420"/>
           </a:xfrm>
           <a:prstGeom prst="roundRect">
             <a:avLst>
@@ -12634,12 +13987,12 @@
           </a:fontRef>
         </p:style>
         <p:txBody>
-          <a:bodyPr rtlCol="0" anchor="ctr" wrap="none" lIns="237744" tIns="118872" rIns="146304" bIns="91440"/>
-          <a:lstStyle/>
-          <a:p>
-            <a:pPr algn="ctr">
-              <a:lnSpc>
-                <a:spcPct val="134000"/>
+          <a:bodyPr rtlCol="0" anchor="t" wrap="none" lIns="237744" tIns="118872" rIns="146304" bIns="91440"/>
+          <a:lstStyle/>
+          <a:p>
+            <a:pPr algn="l">
+              <a:lnSpc>
+                <a:spcPts val="1775"/>
               </a:lnSpc>
               <a:spcAft>
                 <a:spcPts val="0"/>
@@ -12656,9 +14009,9 @@
             </a:r>
           </a:p>
           <a:p>
-            <a:pPr>
-              <a:lnSpc>
-                <a:spcPct val="134000"/>
+            <a:pPr algn="l">
+              <a:lnSpc>
+                <a:spcPts val="1775"/>
               </a:lnSpc>
               <a:spcAft>
                 <a:spcPts val="0"/>
@@ -12675,9 +14028,9 @@
             </a:r>
           </a:p>
           <a:p>
-            <a:pPr>
-              <a:lnSpc>
-                <a:spcPct val="134000"/>
+            <a:pPr algn="l">
+              <a:lnSpc>
+                <a:spcPts val="1775"/>
               </a:lnSpc>
               <a:spcAft>
                 <a:spcPts val="0"/>
@@ -12685,9 +14038,9 @@
             </a:pPr>
           </a:p>
           <a:p>
-            <a:pPr>
-              <a:lnSpc>
-                <a:spcPct val="134000"/>
+            <a:pPr algn="l">
+              <a:lnSpc>
+                <a:spcPts val="1775"/>
               </a:lnSpc>
               <a:spcAft>
                 <a:spcPts val="0"/>
@@ -12704,9 +14057,9 @@
             </a:r>
           </a:p>
           <a:p>
-            <a:pPr>
-              <a:lnSpc>
-                <a:spcPct val="134000"/>
+            <a:pPr algn="l">
+              <a:lnSpc>
+                <a:spcPts val="1775"/>
               </a:lnSpc>
               <a:spcAft>
                 <a:spcPts val="0"/>
@@ -12723,9 +14076,9 @@
             </a:r>
           </a:p>
           <a:p>
-            <a:pPr>
-              <a:lnSpc>
-                <a:spcPct val="134000"/>
+            <a:pPr algn="l">
+              <a:lnSpc>
+                <a:spcPts val="1775"/>
               </a:lnSpc>
               <a:spcAft>
                 <a:spcPts val="0"/>
@@ -12742,9 +14095,9 @@
             </a:r>
           </a:p>
           <a:p>
-            <a:pPr>
-              <a:lnSpc>
-                <a:spcPct val="134000"/>
+            <a:pPr algn="l">
+              <a:lnSpc>
+                <a:spcPts val="1775"/>
               </a:lnSpc>
               <a:spcAft>
                 <a:spcPts val="0"/>
@@ -12752,9 +14105,9 @@
             </a:pPr>
           </a:p>
           <a:p>
-            <a:pPr>
-              <a:lnSpc>
-                <a:spcPct val="134000"/>
+            <a:pPr algn="l">
+              <a:lnSpc>
+                <a:spcPts val="1775"/>
               </a:lnSpc>
               <a:spcAft>
                 <a:spcPts val="0"/>
@@ -12771,9 +14124,9 @@
             </a:r>
           </a:p>
           <a:p>
-            <a:pPr>
-              <a:lnSpc>
-                <a:spcPct val="134000"/>
+            <a:pPr algn="l">
+              <a:lnSpc>
+                <a:spcPts val="1775"/>
               </a:lnSpc>
               <a:spcAft>
                 <a:spcPts val="0"/>
@@ -12790,9 +14143,9 @@
             </a:r>
           </a:p>
           <a:p>
-            <a:pPr>
-              <a:lnSpc>
-                <a:spcPct val="134000"/>
+            <a:pPr algn="l">
+              <a:lnSpc>
+                <a:spcPts val="1775"/>
               </a:lnSpc>
               <a:spcAft>
                 <a:spcPts val="0"/>
@@ -12809,9 +14162,9 @@
             </a:r>
           </a:p>
           <a:p>
-            <a:pPr>
-              <a:lnSpc>
-                <a:spcPct val="134000"/>
+            <a:pPr algn="l">
+              <a:lnSpc>
+                <a:spcPts val="1775"/>
               </a:lnSpc>
               <a:spcAft>
                 <a:spcPts val="0"/>
@@ -12828,9 +14181,9 @@
             </a:r>
           </a:p>
           <a:p>
-            <a:pPr>
-              <a:lnSpc>
-                <a:spcPct val="134000"/>
+            <a:pPr algn="l">
+              <a:lnSpc>
+                <a:spcPts val="1775"/>
               </a:lnSpc>
               <a:spcAft>
                 <a:spcPts val="0"/>
@@ -12856,8 +14209,8 @@
         </p:nvSpPr>
         <p:spPr>
           <a:xfrm>
-            <a:off x="658368" y="4966716"/>
-            <a:ext cx="5336895" cy="1673352"/>
+            <a:off x="658368" y="5119116"/>
+            <a:ext cx="5336895" cy="1191006"/>
           </a:xfrm>
           <a:prstGeom prst="roundRect">
             <a:avLst>
@@ -12904,8 +14257,8 @@
         </p:nvSpPr>
         <p:spPr>
           <a:xfrm>
-            <a:off x="859536" y="5113020"/>
-            <a:ext cx="4934559" cy="1399032"/>
+            <a:off x="859536" y="5265420"/>
+            <a:ext cx="4934559" cy="916686"/>
           </a:xfrm>
           <a:prstGeom prst="rect">
             <a:avLst/>
@@ -12918,7 +14271,7 @@
           </a:bodyPr>
           <a:lstStyle/>
           <a:p>
-            <a:pPr>
+            <a:pPr algn="l">
               <a:lnSpc>
                 <a:spcPct val="118000"/>
               </a:lnSpc>
@@ -12937,7 +14290,7 @@
             </a:r>
           </a:p>
           <a:p>
-            <a:pPr>
+            <a:pPr algn="l">
               <a:lnSpc>
                 <a:spcPct val="118000"/>
               </a:lnSpc>
@@ -12965,8 +14318,8 @@
         </p:nvSpPr>
         <p:spPr>
           <a:xfrm>
-            <a:off x="6196431" y="4966716"/>
-            <a:ext cx="5336895" cy="1673352"/>
+            <a:off x="6196431" y="5119116"/>
+            <a:ext cx="5336895" cy="1191006"/>
           </a:xfrm>
           <a:prstGeom prst="roundRect">
             <a:avLst>
@@ -13013,8 +14366,8 @@
         </p:nvSpPr>
         <p:spPr>
           <a:xfrm>
-            <a:off x="6397599" y="5113020"/>
-            <a:ext cx="4934559" cy="1399032"/>
+            <a:off x="6397599" y="5265420"/>
+            <a:ext cx="4934559" cy="916686"/>
           </a:xfrm>
           <a:prstGeom prst="rect">
             <a:avLst/>
@@ -13027,7 +14380,7 @@
           </a:bodyPr>
           <a:lstStyle/>
           <a:p>
-            <a:pPr>
+            <a:pPr algn="l">
               <a:lnSpc>
                 <a:spcPct val="118000"/>
               </a:lnSpc>
@@ -13046,7 +14399,7 @@
             </a:r>
           </a:p>
           <a:p>
-            <a:pPr>
+            <a:pPr algn="l">
               <a:lnSpc>
                 <a:spcPct val="118000"/>
               </a:lnSpc>
@@ -13114,7 +14467,7 @@
           </a:bodyPr>
           <a:lstStyle/>
           <a:p>
-            <a:pPr>
+            <a:pPr algn="l">
               <a:lnSpc>
                 <a:spcPct val="118000"/>
               </a:lnSpc>
@@ -13133,7 +14486,7 @@
             </a:r>
           </a:p>
           <a:p>
-            <a:pPr>
+            <a:pPr algn="l">
               <a:lnSpc>
                 <a:spcPct val="118000"/>
               </a:lnSpc>
@@ -13175,7 +14528,7 @@
           </a:bodyPr>
           <a:lstStyle/>
           <a:p>
-            <a:pPr>
+            <a:pPr algn="l">
               <a:lnSpc>
                 <a:spcPct val="118000"/>
               </a:lnSpc>
@@ -13204,7 +14557,7 @@
         <p:spPr>
           <a:xfrm>
             <a:off x="658368" y="1956816"/>
-            <a:ext cx="10874959" cy="2614295"/>
+            <a:ext cx="10874959" cy="2753995"/>
           </a:xfrm>
           <a:prstGeom prst="roundRect">
             <a:avLst>
@@ -13234,12 +14587,12 @@
           </a:fontRef>
         </p:style>
         <p:txBody>
-          <a:bodyPr rtlCol="0" anchor="ctr" wrap="none" lIns="237744" tIns="118872" rIns="146304" bIns="91440"/>
-          <a:lstStyle/>
-          <a:p>
-            <a:pPr algn="ctr">
-              <a:lnSpc>
-                <a:spcPct val="134000"/>
+          <a:bodyPr rtlCol="0" anchor="t" wrap="none" lIns="237744" tIns="118872" rIns="146304" bIns="91440"/>
+          <a:lstStyle/>
+          <a:p>
+            <a:pPr algn="l">
+              <a:lnSpc>
+                <a:spcPts val="1775"/>
               </a:lnSpc>
               <a:spcAft>
                 <a:spcPts val="0"/>
@@ -13256,9 +14609,9 @@
             </a:r>
           </a:p>
           <a:p>
-            <a:pPr>
-              <a:lnSpc>
-                <a:spcPct val="134000"/>
+            <a:pPr algn="l">
+              <a:lnSpc>
+                <a:spcPts val="1775"/>
               </a:lnSpc>
               <a:spcAft>
                 <a:spcPts val="0"/>
@@ -13275,9 +14628,9 @@
             </a:r>
           </a:p>
           <a:p>
-            <a:pPr>
-              <a:lnSpc>
-                <a:spcPct val="134000"/>
+            <a:pPr algn="l">
+              <a:lnSpc>
+                <a:spcPts val="1775"/>
               </a:lnSpc>
               <a:spcAft>
                 <a:spcPts val="0"/>
@@ -13294,9 +14647,9 @@
             </a:r>
           </a:p>
           <a:p>
-            <a:pPr>
-              <a:lnSpc>
-                <a:spcPct val="134000"/>
+            <a:pPr algn="l">
+              <a:lnSpc>
+                <a:spcPts val="1775"/>
               </a:lnSpc>
               <a:spcAft>
                 <a:spcPts val="0"/>
@@ -13304,9 +14657,9 @@
             </a:pPr>
           </a:p>
           <a:p>
-            <a:pPr>
-              <a:lnSpc>
-                <a:spcPct val="134000"/>
+            <a:pPr algn="l">
+              <a:lnSpc>
+                <a:spcPts val="1775"/>
               </a:lnSpc>
               <a:spcAft>
                 <a:spcPts val="0"/>
@@ -13323,9 +14676,9 @@
             </a:r>
           </a:p>
           <a:p>
-            <a:pPr>
-              <a:lnSpc>
-                <a:spcPct val="134000"/>
+            <a:pPr algn="l">
+              <a:lnSpc>
+                <a:spcPts val="1775"/>
               </a:lnSpc>
               <a:spcAft>
                 <a:spcPts val="0"/>
@@ -13342,9 +14695,9 @@
             </a:r>
           </a:p>
           <a:p>
-            <a:pPr>
-              <a:lnSpc>
-                <a:spcPct val="134000"/>
+            <a:pPr algn="l">
+              <a:lnSpc>
+                <a:spcPts val="1775"/>
               </a:lnSpc>
               <a:spcAft>
                 <a:spcPts val="0"/>
@@ -13361,9 +14714,9 @@
             </a:r>
           </a:p>
           <a:p>
-            <a:pPr>
-              <a:lnSpc>
-                <a:spcPct val="134000"/>
+            <a:pPr algn="l">
+              <a:lnSpc>
+                <a:spcPts val="1775"/>
               </a:lnSpc>
               <a:spcAft>
                 <a:spcPts val="0"/>
@@ -13371,9 +14724,9 @@
             </a:pPr>
           </a:p>
           <a:p>
-            <a:pPr>
-              <a:lnSpc>
-                <a:spcPct val="134000"/>
+            <a:pPr algn="l">
+              <a:lnSpc>
+                <a:spcPts val="1775"/>
               </a:lnSpc>
               <a:spcAft>
                 <a:spcPts val="0"/>
@@ -13390,9 +14743,9 @@
             </a:r>
           </a:p>
           <a:p>
-            <a:pPr>
-              <a:lnSpc>
-                <a:spcPct val="134000"/>
+            <a:pPr algn="l">
+              <a:lnSpc>
+                <a:spcPts val="1775"/>
               </a:lnSpc>
               <a:spcAft>
                 <a:spcPts val="0"/>
@@ -13409,9 +14762,9 @@
             </a:r>
           </a:p>
           <a:p>
-            <a:pPr>
-              <a:lnSpc>
-                <a:spcPct val="134000"/>
+            <a:pPr algn="l">
+              <a:lnSpc>
+                <a:spcPts val="1775"/>
               </a:lnSpc>
               <a:spcAft>
                 <a:spcPts val="0"/>
@@ -13437,8 +14790,8 @@
         </p:nvSpPr>
         <p:spPr>
           <a:xfrm>
-            <a:off x="658368" y="4753991"/>
-            <a:ext cx="10874959" cy="798385"/>
+            <a:off x="658368" y="4893691"/>
+            <a:ext cx="10874959" cy="998980"/>
           </a:xfrm>
           <a:prstGeom prst="roundRect">
             <a:avLst>
@@ -13485,8 +14838,8 @@
         </p:nvSpPr>
         <p:spPr>
           <a:xfrm>
-            <a:off x="658368" y="4808855"/>
-            <a:ext cx="40640" cy="688657"/>
+            <a:off x="658368" y="4948555"/>
+            <a:ext cx="40640" cy="889252"/>
           </a:xfrm>
           <a:prstGeom prst="rect">
             <a:avLst/>
@@ -13529,8 +14882,8 @@
         </p:nvSpPr>
         <p:spPr>
           <a:xfrm>
-            <a:off x="896112" y="4872863"/>
-            <a:ext cx="10417759" cy="560641"/>
+            <a:off x="896112" y="5012563"/>
+            <a:ext cx="10417759" cy="761236"/>
           </a:xfrm>
           <a:prstGeom prst="rect">
             <a:avLst/>
@@ -13543,7 +14896,7 @@
           </a:bodyPr>
           <a:lstStyle/>
           <a:p>
-            <a:pPr>
+            <a:pPr algn="l">
               <a:lnSpc>
                 <a:spcPct val="118000"/>
               </a:lnSpc>
@@ -13562,7 +14915,7 @@
             </a:r>
           </a:p>
           <a:p>
-            <a:pPr>
+            <a:pPr algn="l">
               <a:lnSpc>
                 <a:spcPct val="118000"/>
               </a:lnSpc>
@@ -13630,7 +14983,7 @@
           </a:bodyPr>
           <a:lstStyle/>
           <a:p>
-            <a:pPr>
+            <a:pPr algn="l">
               <a:lnSpc>
                 <a:spcPct val="118000"/>
               </a:lnSpc>
@@ -13649,7 +15002,7 @@
             </a:r>
           </a:p>
           <a:p>
-            <a:pPr>
+            <a:pPr algn="l">
               <a:lnSpc>
                 <a:spcPct val="118000"/>
               </a:lnSpc>
@@ -13698,7 +15051,7 @@
                     <a:bodyPr wrap="square"/>
                     <a:lstStyle/>
                     <a:p>
-                      <a:pPr>
+                      <a:pPr algn="l">
                         <a:lnSpc>
                           <a:spcPct val="118000"/>
                         </a:lnSpc>
@@ -13728,7 +15081,7 @@
                     <a:bodyPr wrap="square"/>
                     <a:lstStyle/>
                     <a:p>
-                      <a:pPr>
+                      <a:pPr algn="l">
                         <a:lnSpc>
                           <a:spcPct val="118000"/>
                         </a:lnSpc>
@@ -13758,7 +15111,7 @@
                     <a:bodyPr wrap="square"/>
                     <a:lstStyle/>
                     <a:p>
-                      <a:pPr>
+                      <a:pPr algn="l">
                         <a:lnSpc>
                           <a:spcPct val="118000"/>
                         </a:lnSpc>
@@ -13790,7 +15143,7 @@
                     <a:bodyPr wrap="square"/>
                     <a:lstStyle/>
                     <a:p>
-                      <a:pPr>
+                      <a:pPr algn="l">
                         <a:lnSpc>
                           <a:spcPct val="118000"/>
                         </a:lnSpc>
@@ -13820,7 +15173,7 @@
                     <a:bodyPr wrap="square"/>
                     <a:lstStyle/>
                     <a:p>
-                      <a:pPr>
+                      <a:pPr algn="l">
                         <a:lnSpc>
                           <a:spcPct val="118000"/>
                         </a:lnSpc>
@@ -13850,7 +15203,7 @@
                     <a:bodyPr wrap="square"/>
                     <a:lstStyle/>
                     <a:p>
-                      <a:pPr>
+                      <a:pPr algn="l">
                         <a:lnSpc>
                           <a:spcPct val="118000"/>
                         </a:lnSpc>
@@ -13882,7 +15235,7 @@
                     <a:bodyPr wrap="square"/>
                     <a:lstStyle/>
                     <a:p>
-                      <a:pPr>
+                      <a:pPr algn="l">
                         <a:lnSpc>
                           <a:spcPct val="118000"/>
                         </a:lnSpc>
@@ -13912,7 +15265,7 @@
                     <a:bodyPr wrap="square"/>
                     <a:lstStyle/>
                     <a:p>
-                      <a:pPr>
+                      <a:pPr algn="l">
                         <a:lnSpc>
                           <a:spcPct val="118000"/>
                         </a:lnSpc>
@@ -13942,7 +15295,7 @@
                     <a:bodyPr wrap="square"/>
                     <a:lstStyle/>
                     <a:p>
-                      <a:pPr>
+                      <a:pPr algn="l">
                         <a:lnSpc>
                           <a:spcPct val="118000"/>
                         </a:lnSpc>
@@ -13974,7 +15327,7 @@
                     <a:bodyPr wrap="square"/>
                     <a:lstStyle/>
                     <a:p>
-                      <a:pPr>
+                      <a:pPr algn="l">
                         <a:lnSpc>
                           <a:spcPct val="118000"/>
                         </a:lnSpc>
@@ -14004,7 +15357,7 @@
                     <a:bodyPr wrap="square"/>
                     <a:lstStyle/>
                     <a:p>
-                      <a:pPr>
+                      <a:pPr algn="l">
                         <a:lnSpc>
                           <a:spcPct val="118000"/>
                         </a:lnSpc>
@@ -14034,7 +15387,7 @@
                     <a:bodyPr wrap="square"/>
                     <a:lstStyle/>
                     <a:p>
-                      <a:pPr>
+                      <a:pPr algn="l">
                         <a:lnSpc>
                           <a:spcPct val="118000"/>
                         </a:lnSpc>
@@ -14066,7 +15419,7 @@
                     <a:bodyPr wrap="square"/>
                     <a:lstStyle/>
                     <a:p>
-                      <a:pPr>
+                      <a:pPr algn="l">
                         <a:lnSpc>
                           <a:spcPct val="118000"/>
                         </a:lnSpc>
@@ -14096,7 +15449,7 @@
                     <a:bodyPr wrap="square"/>
                     <a:lstStyle/>
                     <a:p>
-                      <a:pPr>
+                      <a:pPr algn="l">
                         <a:lnSpc>
                           <a:spcPct val="118000"/>
                         </a:lnSpc>
@@ -14126,7 +15479,7 @@
                     <a:bodyPr wrap="square"/>
                     <a:lstStyle/>
                     <a:p>
-                      <a:pPr>
+                      <a:pPr algn="l">
                         <a:lnSpc>
                           <a:spcPct val="118000"/>
                         </a:lnSpc>
@@ -14165,7 +15518,7 @@
         <p:spPr>
           <a:xfrm>
             <a:off x="658368" y="3675888"/>
-            <a:ext cx="10874959" cy="912495"/>
+            <a:ext cx="10874959" cy="950595"/>
           </a:xfrm>
           <a:prstGeom prst="roundRect">
             <a:avLst>
@@ -14195,12 +15548,12 @@
           </a:fontRef>
         </p:style>
         <p:txBody>
-          <a:bodyPr rtlCol="0" anchor="ctr" wrap="none" lIns="237744" tIns="118872" rIns="146304" bIns="91440"/>
-          <a:lstStyle/>
-          <a:p>
-            <a:pPr algn="ctr">
-              <a:lnSpc>
-                <a:spcPct val="134000"/>
+          <a:bodyPr rtlCol="0" anchor="t" wrap="none" lIns="237744" tIns="118872" rIns="146304" bIns="91440"/>
+          <a:lstStyle/>
+          <a:p>
+            <a:pPr algn="l">
+              <a:lnSpc>
+                <a:spcPts val="1775"/>
               </a:lnSpc>
               <a:spcAft>
                 <a:spcPts val="0"/>
@@ -14217,9 +15570,9 @@
             </a:r>
           </a:p>
           <a:p>
-            <a:pPr>
-              <a:lnSpc>
-                <a:spcPct val="134000"/>
+            <a:pPr algn="l">
+              <a:lnSpc>
+                <a:spcPts val="1775"/>
               </a:lnSpc>
               <a:spcAft>
                 <a:spcPts val="0"/>
@@ -14236,9 +15589,9 @@
             </a:r>
           </a:p>
           <a:p>
-            <a:pPr>
-              <a:lnSpc>
-                <a:spcPct val="134000"/>
+            <a:pPr algn="l">
+              <a:lnSpc>
+                <a:spcPts val="1775"/>
               </a:lnSpc>
               <a:spcAft>
                 <a:spcPts val="0"/>
@@ -14264,8 +15617,8 @@
         </p:nvSpPr>
         <p:spPr>
           <a:xfrm>
-            <a:off x="658368" y="4771263"/>
-            <a:ext cx="10874959" cy="798385"/>
+            <a:off x="658368" y="4809363"/>
+            <a:ext cx="10874959" cy="998980"/>
           </a:xfrm>
           <a:prstGeom prst="roundRect">
             <a:avLst>
@@ -14312,8 +15665,8 @@
         </p:nvSpPr>
         <p:spPr>
           <a:xfrm>
-            <a:off x="658368" y="4826127"/>
-            <a:ext cx="40640" cy="688657"/>
+            <a:off x="658368" y="4864227"/>
+            <a:ext cx="40640" cy="889252"/>
           </a:xfrm>
           <a:prstGeom prst="rect">
             <a:avLst/>
@@ -14356,8 +15709,8 @@
         </p:nvSpPr>
         <p:spPr>
           <a:xfrm>
-            <a:off x="896112" y="4890135"/>
-            <a:ext cx="10417759" cy="560641"/>
+            <a:off x="896112" y="4928235"/>
+            <a:ext cx="10417759" cy="761236"/>
           </a:xfrm>
           <a:prstGeom prst="rect">
             <a:avLst/>
@@ -14370,7 +15723,7 @@
           </a:bodyPr>
           <a:lstStyle/>
           <a:p>
-            <a:pPr>
+            <a:pPr algn="l">
               <a:lnSpc>
                 <a:spcPct val="118000"/>
               </a:lnSpc>
@@ -14389,7 +15742,7 @@
             </a:r>
           </a:p>
           <a:p>
-            <a:pPr>
+            <a:pPr algn="l">
               <a:lnSpc>
                 <a:spcPct val="118000"/>
               </a:lnSpc>
@@ -14735,4 +16088,324 @@
   </a:objectDefaults>
   <a:extraClrSchemeLst/>
 </a:theme>
+</file>
+
+<file path=ppt/theme/theme2.xml><?xml version="1.0" encoding="utf-8"?>
+<a:theme xmlns:a="http://schemas.openxmlformats.org/drawingml/2006/main" name="Office Theme">
+  <a:themeElements>
+    <a:clrScheme name="Office">
+      <a:dk1>
+        <a:sysClr val="windowText" lastClr="000000"/>
+      </a:dk1>
+      <a:lt1>
+        <a:sysClr val="window" lastClr="FFFFFF"/>
+      </a:lt1>
+      <a:dk2>
+        <a:srgbClr val="1F497D"/>
+      </a:dk2>
+      <a:lt2>
+        <a:srgbClr val="EEECE1"/>
+      </a:lt2>
+      <a:accent1>
+        <a:srgbClr val="4F81BD"/>
+      </a:accent1>
+      <a:accent2>
+        <a:srgbClr val="C0504D"/>
+      </a:accent2>
+      <a:accent3>
+        <a:srgbClr val="9BBB59"/>
+      </a:accent3>
+      <a:accent4>
+        <a:srgbClr val="8064A2"/>
+      </a:accent4>
+      <a:accent5>
+        <a:srgbClr val="4BACC6"/>
+      </a:accent5>
+      <a:accent6>
+        <a:srgbClr val="F79646"/>
+      </a:accent6>
+      <a:hlink>
+        <a:srgbClr val="0000FF"/>
+      </a:hlink>
+      <a:folHlink>
+        <a:srgbClr val="800080"/>
+      </a:folHlink>
+    </a:clrScheme>
+    <a:fontScheme name="Office">
+      <a:majorFont>
+        <a:latin typeface="Calibri"/>
+        <a:ea typeface=""/>
+        <a:cs typeface=""/>
+        <a:font script="Jpan" typeface="ＭＳ Ｐゴシック"/>
+        <a:font script="Hang" typeface="맑은 고딕"/>
+        <a:font script="Hans" typeface="宋体"/>
+        <a:font script="Hant" typeface="新細明體"/>
+        <a:font script="Arab" typeface="Times New Roman"/>
+        <a:font script="Hebr" typeface="Times New Roman"/>
+        <a:font script="Thai" typeface="Angsana New"/>
+        <a:font script="Ethi" typeface="Nyala"/>
+        <a:font script="Beng" typeface="Vrinda"/>
+        <a:font script="Gujr" typeface="Shruti"/>
+        <a:font script="Khmr" typeface="MoolBoran"/>
+        <a:font script="Knda" typeface="Tunga"/>
+        <a:font script="Guru" typeface="Raavi"/>
+        <a:font script="Cans" typeface="Euphemia"/>
+        <a:font script="Cher" typeface="Plantagenet Cherokee"/>
+        <a:font script="Yiii" typeface="Microsoft Yi Baiti"/>
+        <a:font script="Tibt" typeface="Microsoft Himalaya"/>
+        <a:font script="Thaa" typeface="MV Boli"/>
+        <a:font script="Deva" typeface="Mangal"/>
+        <a:font script="Telu" typeface="Gautami"/>
+        <a:font script="Taml" typeface="Latha"/>
+        <a:font script="Syrc" typeface="Estrangelo Edessa"/>
+        <a:font script="Orya" typeface="Kalinga"/>
+        <a:font script="Mlym" typeface="Kartika"/>
+        <a:font script="Laoo" typeface="DokChampa"/>
+        <a:font script="Sinh" typeface="Iskoola Pota"/>
+        <a:font script="Mong" typeface="Mongolian Baiti"/>
+        <a:font script="Viet" typeface="Times New Roman"/>
+        <a:font script="Uigh" typeface="Microsoft Uighur"/>
+        <a:font script="Geor" typeface="Sylfaen"/>
+      </a:majorFont>
+      <a:minorFont>
+        <a:latin typeface="Calibri"/>
+        <a:ea typeface=""/>
+        <a:cs typeface=""/>
+        <a:font script="Jpan" typeface="ＭＳ Ｐゴシック"/>
+        <a:font script="Hang" typeface="맑은 고딕"/>
+        <a:font script="Hans" typeface="宋体"/>
+        <a:font script="Hant" typeface="新細明體"/>
+        <a:font script="Arab" typeface="Arial"/>
+        <a:font script="Hebr" typeface="Arial"/>
+        <a:font script="Thai" typeface="Cordia New"/>
+        <a:font script="Ethi" typeface="Nyala"/>
+        <a:font script="Beng" typeface="Vrinda"/>
+        <a:font script="Gujr" typeface="Shruti"/>
+        <a:font script="Khmr" typeface="DaunPenh"/>
+        <a:font script="Knda" typeface="Tunga"/>
+        <a:font script="Guru" typeface="Raavi"/>
+        <a:font script="Cans" typeface="Euphemia"/>
+        <a:font script="Cher" typeface="Plantagenet Cherokee"/>
+        <a:font script="Yiii" typeface="Microsoft Yi Baiti"/>
+        <a:font script="Tibt" typeface="Microsoft Himalaya"/>
+        <a:font script="Thaa" typeface="MV Boli"/>
+        <a:font script="Deva" typeface="Mangal"/>
+        <a:font script="Telu" typeface="Gautami"/>
+        <a:font script="Taml" typeface="Latha"/>
+        <a:font script="Syrc" typeface="Estrangelo Edessa"/>
+        <a:font script="Orya" typeface="Kalinga"/>
+        <a:font script="Mlym" typeface="Kartika"/>
+        <a:font script="Laoo" typeface="DokChampa"/>
+        <a:font script="Sinh" typeface="Iskoola Pota"/>
+        <a:font script="Mong" typeface="Mongolian Baiti"/>
+        <a:font script="Viet" typeface="Arial"/>
+        <a:font script="Uigh" typeface="Microsoft Uighur"/>
+        <a:font script="Geor" typeface="Sylfaen"/>
+      </a:minorFont>
+    </a:fontScheme>
+    <a:fmtScheme name="Office">
+      <a:fillStyleLst>
+        <a:solidFill>
+          <a:schemeClr val="phClr"/>
+        </a:solidFill>
+        <a:gradFill rotWithShape="1">
+          <a:gsLst>
+            <a:gs pos="0">
+              <a:schemeClr val="phClr">
+                <a:tint val="50000"/>
+                <a:satMod val="300000"/>
+              </a:schemeClr>
+            </a:gs>
+            <a:gs pos="35000">
+              <a:schemeClr val="phClr">
+                <a:tint val="37000"/>
+                <a:satMod val="300000"/>
+              </a:schemeClr>
+            </a:gs>
+            <a:gs pos="100000">
+              <a:schemeClr val="phClr">
+                <a:tint val="15000"/>
+                <a:satMod val="350000"/>
+              </a:schemeClr>
+            </a:gs>
+          </a:gsLst>
+          <a:lin ang="16200000" scaled="1"/>
+        </a:gradFill>
+        <a:gradFill rotWithShape="1">
+          <a:gsLst>
+            <a:gs pos="0">
+              <a:schemeClr val="phClr">
+                <a:tint val="100000"/>
+                <a:shade val="100000"/>
+                <a:satMod val="130000"/>
+              </a:schemeClr>
+            </a:gs>
+            <a:gs pos="100000">
+              <a:schemeClr val="phClr">
+                <a:tint val="50000"/>
+                <a:shade val="100000"/>
+                <a:satMod val="350000"/>
+              </a:schemeClr>
+            </a:gs>
+          </a:gsLst>
+          <a:lin ang="16200000" scaled="0"/>
+        </a:gradFill>
+      </a:fillStyleLst>
+      <a:lnStyleLst>
+        <a:ln w="9525" cap="flat" cmpd="sng" algn="ctr">
+          <a:solidFill>
+            <a:schemeClr val="phClr">
+              <a:shade val="95000"/>
+              <a:satMod val="105000"/>
+            </a:schemeClr>
+          </a:solidFill>
+          <a:prstDash val="solid"/>
+        </a:ln>
+        <a:ln w="25400" cap="flat" cmpd="sng" algn="ctr">
+          <a:solidFill>
+            <a:schemeClr val="phClr"/>
+          </a:solidFill>
+          <a:prstDash val="solid"/>
+        </a:ln>
+        <a:ln w="38100" cap="flat" cmpd="sng" algn="ctr">
+          <a:solidFill>
+            <a:schemeClr val="phClr"/>
+          </a:solidFill>
+          <a:prstDash val="solid"/>
+        </a:ln>
+      </a:lnStyleLst>
+      <a:effectStyleLst>
+        <a:effectStyle>
+          <a:effectLst>
+            <a:outerShdw blurRad="40000" dist="20000" dir="5400000" rotWithShape="0">
+              <a:srgbClr val="000000">
+                <a:alpha val="38000"/>
+              </a:srgbClr>
+            </a:outerShdw>
+          </a:effectLst>
+        </a:effectStyle>
+        <a:effectStyle>
+          <a:effectLst>
+            <a:outerShdw blurRad="40000" dist="23000" dir="5400000" rotWithShape="0">
+              <a:srgbClr val="000000">
+                <a:alpha val="35000"/>
+              </a:srgbClr>
+            </a:outerShdw>
+          </a:effectLst>
+        </a:effectStyle>
+        <a:effectStyle>
+          <a:effectLst>
+            <a:outerShdw blurRad="40000" dist="23000" dir="5400000" rotWithShape="0">
+              <a:srgbClr val="000000">
+                <a:alpha val="35000"/>
+              </a:srgbClr>
+            </a:outerShdw>
+          </a:effectLst>
+          <a:scene3d>
+            <a:camera prst="orthographicFront">
+              <a:rot lat="0" lon="0" rev="0"/>
+            </a:camera>
+            <a:lightRig rig="threePt" dir="t">
+              <a:rot lat="0" lon="0" rev="1200000"/>
+            </a:lightRig>
+          </a:scene3d>
+          <a:sp3d>
+            <a:bevelT w="63500" h="25400"/>
+          </a:sp3d>
+        </a:effectStyle>
+      </a:effectStyleLst>
+      <a:bgFillStyleLst>
+        <a:solidFill>
+          <a:schemeClr val="phClr"/>
+        </a:solidFill>
+        <a:gradFill rotWithShape="1">
+          <a:gsLst>
+            <a:gs pos="0">
+              <a:schemeClr val="phClr">
+                <a:tint val="40000"/>
+                <a:satMod val="350000"/>
+              </a:schemeClr>
+            </a:gs>
+            <a:gs pos="40000">
+              <a:schemeClr val="phClr">
+                <a:tint val="45000"/>
+                <a:shade val="99000"/>
+                <a:satMod val="350000"/>
+              </a:schemeClr>
+            </a:gs>
+            <a:gs pos="100000">
+              <a:schemeClr val="phClr">
+                <a:shade val="20000"/>
+                <a:satMod val="255000"/>
+              </a:schemeClr>
+            </a:gs>
+          </a:gsLst>
+          <a:path path="circle">
+            <a:fillToRect l="50000" t="-80000" r="50000" b="180000"/>
+          </a:path>
+        </a:gradFill>
+        <a:gradFill rotWithShape="1">
+          <a:gsLst>
+            <a:gs pos="0">
+              <a:schemeClr val="phClr">
+                <a:tint val="80000"/>
+                <a:satMod val="300000"/>
+              </a:schemeClr>
+            </a:gs>
+            <a:gs pos="100000">
+              <a:schemeClr val="phClr">
+                <a:shade val="30000"/>
+                <a:satMod val="200000"/>
+              </a:schemeClr>
+            </a:gs>
+          </a:gsLst>
+          <a:path path="circle">
+            <a:fillToRect l="50000" t="50000" r="50000" b="50000"/>
+          </a:path>
+        </a:gradFill>
+      </a:bgFillStyleLst>
+    </a:fmtScheme>
+  </a:themeElements>
+  <a:objectDefaults>
+    <a:spDef>
+      <a:spPr/>
+      <a:bodyPr/>
+      <a:lstStyle/>
+      <a:style>
+        <a:lnRef idx="1">
+          <a:schemeClr val="accent1"/>
+        </a:lnRef>
+        <a:fillRef idx="3">
+          <a:schemeClr val="accent1"/>
+        </a:fillRef>
+        <a:effectRef idx="2">
+          <a:schemeClr val="accent1"/>
+        </a:effectRef>
+        <a:fontRef idx="minor">
+          <a:schemeClr val="lt1"/>
+        </a:fontRef>
+      </a:style>
+    </a:spDef>
+    <a:lnDef>
+      <a:spPr/>
+      <a:bodyPr/>
+      <a:lstStyle/>
+      <a:style>
+        <a:lnRef idx="2">
+          <a:schemeClr val="accent1"/>
+        </a:lnRef>
+        <a:fillRef idx="0">
+          <a:schemeClr val="accent1"/>
+        </a:fillRef>
+        <a:effectRef idx="1">
+          <a:schemeClr val="accent1"/>
+        </a:effectRef>
+        <a:fontRef idx="minor">
+          <a:schemeClr val="tx1"/>
+        </a:fontRef>
+      </a:style>
+    </a:lnDef>
+  </a:objectDefaults>
+  <a:extraClrSchemeLst/>
+</a:theme>
 </file>
--- a/VNPAY-seminar.pptx
+++ b/VNPAY-seminar.pptx
@@ -532,7 +532,7 @@
           <a:p>
             <a:r>
               <a:rPr lang="vi-VN" sz="1600" dirty="0"/>
-              <a:t>Chào mọi người, hôm nay mình trình bày về tích hợp VNPAY Sandbox. Buổi này ít lý thuyết, chủ yếu cả lớp code cùng mình. Code chỉ có một file Java, không cần Spring hay Maven.</a:t>
+              <a:t>Chào mọi người, hôm nay mình làm một buổi nhỏ về VNPAY Sandbox. Buổi này làm cho vui thôi, ít lý thuyết, chủ yếu cả lớp code cùng mình. Code chỉ có một file Java, bị lỗi thì cứ giơ tay hỏi nha.</a:t>
             </a:r>
           </a:p>
           <a:p>
@@ -562,7 +562,7 @@
           <a:p>
             <a:r>
               <a:rPr lang="vi-VN" sz="1600" dirty="0"/>
-              <a:t>Đáp: Tự lưu số thẻ là vi phạm chuẩn PCI-DSS, với lại ngân hàng cũng không cấp API cho sinh viên làm đồ án. Nên mới cần cổng trung gian như VNPAY, khách nhập thẻ trên trang của VNPAY.</a:t>
+              <a:t>Đáp: Tự lưu số thẻ là vi phạm chuẩn PCI-DSS, với lại ngân hàng cũng không cấp API cho mình tự gọi. Nên mới cần cổng trung gian như VNPAY, khách nhập thẻ trên trang của VNPAY.</a:t>
             </a:r>
           </a:p>
           <a:p>
@@ -1321,7 +1321,7 @@
           <a:p>
             <a:r>
               <a:rPr lang="vi-VN" sz="1600" dirty="0"/>
-              <a:t>Đáp: Deploy lên server có IP public, hoặc dùng Cloudflare Tunnel. Nhưng làm đồ án thì ngrok là nhanh nhất.</a:t>
+              <a:t>Đáp: Deploy lên server có IP public, hoặc dùng Cloudflare Tunnel. Nhưng để thử nhanh như hôm nay thì ngrok là tiện nhất.</a:t>
             </a:r>
           </a:p>
           <a:p>
@@ -2500,7 +2500,7 @@
           <a:p>
             <a:r>
               <a:rPr lang="vi-VN" sz="1600" b="1" dirty="0"/>
-              <a:t>Hỏi: Làm tới đây rồi thì đồ án làm gì tiếp?</a:t>
+              <a:t>Hỏi: Muốn làm thành web bán hàng thật thì thêm gì nữa?</a:t>
             </a:r>
           </a:p>
           <a:p>
@@ -2632,7 +2632,7 @@
           <a:p>
             <a:r>
               <a:rPr lang="vi-VN" sz="1600" b="1" dirty="0"/>
-              <a:t>Hỏi: Trong đồ án nên gọi querydr lúc nào?</a:t>
+              <a:t>Hỏi: Web thật thì nên gọi querydr lúc nào?</a:t>
             </a:r>
           </a:p>
           <a:p>
@@ -2854,7 +2854,7 @@
           <a:p>
             <a:r>
               <a:rPr lang="vi-VN" sz="1600" dirty="0"/>
-              <a:t>Đây là mấy điều cần nhớ khi đưa vào đồ án, quan trọng nhất là cái đầu: chỉ cập nhật trạng thái đơn từ IPN hoặc querydr.</a:t>
+              <a:t>Đây là mấy điều nên nhớ nếu sau này mọi người tự tích hợp VNPAY, quan trọng nhất là cái đầu: chỉ cập nhật trạng thái đơn từ IPN hoặc querydr.</a:t>
             </a:r>
           </a:p>
           <a:p>
@@ -3001,7 +3001,7 @@
           <a:p>
             <a:r>
               <a:rPr lang="vi-VN" sz="1600" dirty="0"/>
-              <a:t>Phần của mình tới đây là hết. Mọi người có câu hỏi gì thì hỏi nha, bạn nào còn bị lỗi thì mở ShopDone.java trên Drive ra so.</a:t>
+              <a:t>Phần của mình tới đây là hết, cảm ơn mọi người đã code cùng mình. Ai có câu hỏi gì thì hỏi nha, bạn nào còn bị lỗi thì mở ShopDone.java trên Drive ra so.</a:t>
             </a:r>
           </a:p>
           <a:p>
@@ -20592,7 +20592,7 @@
         <p:spPr>
           <a:xfrm>
             <a:off x="660380" y="643829"/>
-            <a:ext cx="3662081" cy="426750"/>
+            <a:ext cx="7023324" cy="426750"/>
           </a:xfrm>
           <a:prstGeom prst="rect">
             <a:avLst/>
@@ -20616,7 +20616,7 @@
                 <a:ea typeface="Arial" pitchFamily="34" charset="-122"/>
                 <a:cs typeface="Arial" pitchFamily="34" charset="-120"/>
               </a:rPr>
-              <a:t>Lưu ý khi làm đồ án</a:t>
+              <a:t>Mấy điều nên nhớ khi tích hợp VNPAY</a:t>
             </a:r>
             <a:endParaRPr lang="en-US" sz="3000" dirty="0"/>
           </a:p>
